--- a/毕业论文draw.pptx
+++ b/毕业论文draw.pptx
@@ -6,6 +6,7 @@
   </p:sldMasterIdLst>
   <p:sldIdLst>
     <p:sldId id="256" r:id="rId2"/>
+    <p:sldId id="257" r:id="rId3"/>
   </p:sldIdLst>
   <p:sldSz cx="12192000" cy="6858000"/>
   <p:notesSz cx="6858000" cy="9144000"/>
@@ -3321,833 +3322,12 @@
           <a:chExt cx="0" cy="0"/>
         </a:xfrm>
       </p:grpSpPr>
-      <p:sp>
-        <p:nvSpPr>
-          <p:cNvPr id="4" name="矩形 3">
-            <a:extLst>
-              <a:ext uri="{FF2B5EF4-FFF2-40B4-BE49-F238E27FC236}">
-                <a16:creationId xmlns:a16="http://schemas.microsoft.com/office/drawing/2014/main" id="{D972F806-6100-F8F3-3A80-7818806F13FE}"/>
-              </a:ext>
-            </a:extLst>
-          </p:cNvPr>
-          <p:cNvSpPr/>
-          <p:nvPr/>
-        </p:nvSpPr>
-        <p:spPr>
-          <a:xfrm>
-            <a:off x="2174488" y="111512"/>
-            <a:ext cx="7263158" cy="568713"/>
-          </a:xfrm>
-          <a:prstGeom prst="rect">
-            <a:avLst/>
-          </a:prstGeom>
-          <a:noFill/>
-          <a:ln>
-            <a:solidFill>
-              <a:schemeClr val="tx1"/>
-            </a:solidFill>
-          </a:ln>
-        </p:spPr>
-        <p:style>
-          <a:lnRef idx="2">
-            <a:schemeClr val="accent6"/>
-          </a:lnRef>
-          <a:fillRef idx="1">
-            <a:schemeClr val="lt1"/>
-          </a:fillRef>
-          <a:effectRef idx="0">
-            <a:schemeClr val="accent6"/>
-          </a:effectRef>
-          <a:fontRef idx="minor">
-            <a:schemeClr val="dk1"/>
-          </a:fontRef>
-        </p:style>
-        <p:txBody>
-          <a:bodyPr rtlCol="0" anchor="ctr"/>
-          <a:lstStyle/>
-          <a:p>
-            <a:pPr algn="ctr"/>
-            <a:endParaRPr kumimoji="1" lang="zh-CN" altLang="en-US">
-              <a:ln w="0"/>
-              <a:solidFill>
-                <a:schemeClr val="tx1"/>
-              </a:solidFill>
-              <a:effectLst>
-                <a:outerShdw blurRad="38100" dist="19050" dir="2700000" algn="tl" rotWithShape="0">
-                  <a:schemeClr val="dk1">
-                    <a:alpha val="40000"/>
-                  </a:schemeClr>
-                </a:outerShdw>
-              </a:effectLst>
-            </a:endParaRPr>
-          </a:p>
-        </p:txBody>
-      </p:sp>
-      <p:sp>
-        <p:nvSpPr>
-          <p:cNvPr id="5" name="文本框 4">
-            <a:extLst>
-              <a:ext uri="{FF2B5EF4-FFF2-40B4-BE49-F238E27FC236}">
-                <a16:creationId xmlns:a16="http://schemas.microsoft.com/office/drawing/2014/main" id="{9BFE693D-2377-BDC7-91E6-D8214984D3CA}"/>
-              </a:ext>
-            </a:extLst>
-          </p:cNvPr>
-          <p:cNvSpPr txBox="1"/>
-          <p:nvPr/>
-        </p:nvSpPr>
-        <p:spPr>
-          <a:xfrm>
-            <a:off x="3542368" y="207829"/>
-            <a:ext cx="4839630" cy="338554"/>
-          </a:xfrm>
-          <a:prstGeom prst="rect">
-            <a:avLst/>
-          </a:prstGeom>
-          <a:noFill/>
-        </p:spPr>
-        <p:txBody>
-          <a:bodyPr wrap="square" rtlCol="0">
-            <a:spAutoFit/>
-          </a:bodyPr>
-          <a:lstStyle/>
-          <a:p>
-            <a:r>
-              <a:rPr kumimoji="1" lang="zh-CN" altLang="en-US" sz="1600" dirty="0"/>
-              <a:t>分布式信源编码辅助的编码计算结果传输方法研究</a:t>
-            </a:r>
-          </a:p>
-        </p:txBody>
-      </p:sp>
-      <p:sp>
-        <p:nvSpPr>
-          <p:cNvPr id="6" name="矩形 5">
-            <a:extLst>
-              <a:ext uri="{FF2B5EF4-FFF2-40B4-BE49-F238E27FC236}">
-                <a16:creationId xmlns:a16="http://schemas.microsoft.com/office/drawing/2014/main" id="{1D4CA199-F4E0-9137-2FE5-B98C65F6F002}"/>
-              </a:ext>
-            </a:extLst>
-          </p:cNvPr>
-          <p:cNvSpPr/>
-          <p:nvPr/>
-        </p:nvSpPr>
-        <p:spPr>
-          <a:xfrm>
-            <a:off x="2174486" y="952864"/>
-            <a:ext cx="3341647" cy="369331"/>
-          </a:xfrm>
-          <a:prstGeom prst="rect">
-            <a:avLst/>
-          </a:prstGeom>
-          <a:ln>
-            <a:solidFill>
-              <a:schemeClr val="tx1"/>
-            </a:solidFill>
-          </a:ln>
-        </p:spPr>
-        <p:style>
-          <a:lnRef idx="2">
-            <a:schemeClr val="accent6"/>
-          </a:lnRef>
-          <a:fillRef idx="1">
-            <a:schemeClr val="lt1"/>
-          </a:fillRef>
-          <a:effectRef idx="0">
-            <a:schemeClr val="accent6"/>
-          </a:effectRef>
-          <a:fontRef idx="minor">
-            <a:schemeClr val="dk1"/>
-          </a:fontRef>
-        </p:style>
-        <p:txBody>
-          <a:bodyPr rtlCol="0" anchor="ctr"/>
-          <a:lstStyle/>
-          <a:p>
-            <a:pPr algn="ctr"/>
-            <a:endParaRPr kumimoji="1" lang="zh-CN" altLang="en-US"/>
-          </a:p>
-        </p:txBody>
-      </p:sp>
-      <p:sp>
-        <p:nvSpPr>
-          <p:cNvPr id="7" name="矩形 6">
-            <a:extLst>
-              <a:ext uri="{FF2B5EF4-FFF2-40B4-BE49-F238E27FC236}">
-                <a16:creationId xmlns:a16="http://schemas.microsoft.com/office/drawing/2014/main" id="{E9870C36-BBED-B06A-2FC7-90770FE61814}"/>
-              </a:ext>
-            </a:extLst>
-          </p:cNvPr>
-          <p:cNvSpPr/>
-          <p:nvPr/>
-        </p:nvSpPr>
-        <p:spPr>
-          <a:xfrm>
-            <a:off x="6095999" y="956760"/>
-            <a:ext cx="3341648" cy="369332"/>
-          </a:xfrm>
-          <a:prstGeom prst="rect">
-            <a:avLst/>
-          </a:prstGeom>
-          <a:ln>
-            <a:solidFill>
-              <a:schemeClr val="tx1"/>
-            </a:solidFill>
-          </a:ln>
-        </p:spPr>
-        <p:style>
-          <a:lnRef idx="2">
-            <a:schemeClr val="accent6"/>
-          </a:lnRef>
-          <a:fillRef idx="1">
-            <a:schemeClr val="lt1"/>
-          </a:fillRef>
-          <a:effectRef idx="0">
-            <a:schemeClr val="accent6"/>
-          </a:effectRef>
-          <a:fontRef idx="minor">
-            <a:schemeClr val="dk1"/>
-          </a:fontRef>
-        </p:style>
-        <p:txBody>
-          <a:bodyPr rtlCol="0" anchor="ctr"/>
-          <a:lstStyle/>
-          <a:p>
-            <a:pPr algn="ctr"/>
-            <a:endParaRPr kumimoji="1" lang="zh-CN" altLang="en-US"/>
-          </a:p>
-        </p:txBody>
-      </p:sp>
-      <p:sp>
-        <p:nvSpPr>
-          <p:cNvPr id="8" name="文本框 7">
-            <a:extLst>
-              <a:ext uri="{FF2B5EF4-FFF2-40B4-BE49-F238E27FC236}">
-                <a16:creationId xmlns:a16="http://schemas.microsoft.com/office/drawing/2014/main" id="{1CFC36BD-DAC9-04B1-9812-69ACABB34AD2}"/>
-              </a:ext>
-            </a:extLst>
-          </p:cNvPr>
-          <p:cNvSpPr txBox="1"/>
-          <p:nvPr/>
-        </p:nvSpPr>
-        <p:spPr>
-          <a:xfrm>
-            <a:off x="2996889" y="967808"/>
-            <a:ext cx="2274849" cy="307777"/>
-          </a:xfrm>
-          <a:prstGeom prst="rect">
-            <a:avLst/>
-          </a:prstGeom>
-          <a:noFill/>
-        </p:spPr>
-        <p:txBody>
-          <a:bodyPr wrap="square" rtlCol="0">
-            <a:spAutoFit/>
-          </a:bodyPr>
-          <a:lstStyle/>
-          <a:p>
-            <a:r>
-              <a:rPr kumimoji="1" lang="zh-CN" altLang="en-US" sz="1400" dirty="0"/>
-              <a:t>第一章</a:t>
-            </a:r>
-            <a:r>
-              <a:rPr kumimoji="1" lang="en-US" altLang="zh-CN" sz="1400" dirty="0"/>
-              <a:t>	</a:t>
-            </a:r>
-            <a:r>
-              <a:rPr kumimoji="1" lang="zh-CN" altLang="en-US" sz="1400" dirty="0"/>
-              <a:t>绪论</a:t>
-            </a:r>
-          </a:p>
-        </p:txBody>
-      </p:sp>
-      <p:sp>
-        <p:nvSpPr>
-          <p:cNvPr id="9" name="文本框 8">
-            <a:extLst>
-              <a:ext uri="{FF2B5EF4-FFF2-40B4-BE49-F238E27FC236}">
-                <a16:creationId xmlns:a16="http://schemas.microsoft.com/office/drawing/2014/main" id="{682A481C-4570-7EA2-87FA-2048C5469A84}"/>
-              </a:ext>
-            </a:extLst>
-          </p:cNvPr>
-          <p:cNvSpPr txBox="1"/>
-          <p:nvPr/>
-        </p:nvSpPr>
-        <p:spPr>
-          <a:xfrm>
-            <a:off x="6338536" y="992836"/>
-            <a:ext cx="3341649" cy="307777"/>
-          </a:xfrm>
-          <a:prstGeom prst="rect">
-            <a:avLst/>
-          </a:prstGeom>
-          <a:noFill/>
-        </p:spPr>
-        <p:txBody>
-          <a:bodyPr wrap="square" rtlCol="0">
-            <a:spAutoFit/>
-          </a:bodyPr>
-          <a:lstStyle/>
-          <a:p>
-            <a:r>
-              <a:rPr kumimoji="1" lang="zh-CN" altLang="en-US" sz="1400" dirty="0"/>
-              <a:t>第二章</a:t>
-            </a:r>
-            <a:r>
-              <a:rPr kumimoji="1" lang="en-US" altLang="zh-CN" sz="1400" dirty="0"/>
-              <a:t>	</a:t>
-            </a:r>
-            <a:r>
-              <a:rPr kumimoji="1" lang="zh-CN" altLang="en-US" sz="1400" dirty="0"/>
-              <a:t>理论基础与相关技术</a:t>
-            </a:r>
-          </a:p>
-        </p:txBody>
-      </p:sp>
-      <p:sp>
-        <p:nvSpPr>
-          <p:cNvPr id="10" name="下箭头 9">
-            <a:extLst>
-              <a:ext uri="{FF2B5EF4-FFF2-40B4-BE49-F238E27FC236}">
-                <a16:creationId xmlns:a16="http://schemas.microsoft.com/office/drawing/2014/main" id="{337BCAEE-2B43-3C2C-8031-DAD7B233AA76}"/>
-              </a:ext>
-            </a:extLst>
-          </p:cNvPr>
-          <p:cNvSpPr/>
-          <p:nvPr/>
-        </p:nvSpPr>
-        <p:spPr>
-          <a:xfrm>
-            <a:off x="3845309" y="680224"/>
-            <a:ext cx="157978" cy="278109"/>
-          </a:xfrm>
-          <a:prstGeom prst="downArrow">
-            <a:avLst/>
-          </a:prstGeom>
-          <a:ln>
-            <a:solidFill>
-              <a:schemeClr val="tx1"/>
-            </a:solidFill>
-          </a:ln>
-        </p:spPr>
-        <p:style>
-          <a:lnRef idx="2">
-            <a:schemeClr val="accent6"/>
-          </a:lnRef>
-          <a:fillRef idx="1">
-            <a:schemeClr val="lt1"/>
-          </a:fillRef>
-          <a:effectRef idx="0">
-            <a:schemeClr val="accent6"/>
-          </a:effectRef>
-          <a:fontRef idx="minor">
-            <a:schemeClr val="dk1"/>
-          </a:fontRef>
-        </p:style>
-        <p:txBody>
-          <a:bodyPr rtlCol="0" anchor="ctr"/>
-          <a:lstStyle/>
-          <a:p>
-            <a:pPr algn="ctr"/>
-            <a:endParaRPr kumimoji="1" lang="zh-CN" altLang="en-US"/>
-          </a:p>
-        </p:txBody>
-      </p:sp>
-      <p:sp>
-        <p:nvSpPr>
-          <p:cNvPr id="11" name="下箭头 10">
-            <a:extLst>
-              <a:ext uri="{FF2B5EF4-FFF2-40B4-BE49-F238E27FC236}">
-                <a16:creationId xmlns:a16="http://schemas.microsoft.com/office/drawing/2014/main" id="{24FF7630-3B0C-4C99-31CF-003E62A7CD09}"/>
-              </a:ext>
-            </a:extLst>
-          </p:cNvPr>
-          <p:cNvSpPr/>
-          <p:nvPr/>
-        </p:nvSpPr>
-        <p:spPr>
-          <a:xfrm>
-            <a:off x="7186954" y="680224"/>
-            <a:ext cx="157978" cy="278109"/>
-          </a:xfrm>
-          <a:prstGeom prst="downArrow">
-            <a:avLst/>
-          </a:prstGeom>
-          <a:ln>
-            <a:solidFill>
-              <a:schemeClr val="tx1"/>
-            </a:solidFill>
-          </a:ln>
-        </p:spPr>
-        <p:style>
-          <a:lnRef idx="2">
-            <a:schemeClr val="accent6"/>
-          </a:lnRef>
-          <a:fillRef idx="1">
-            <a:schemeClr val="lt1"/>
-          </a:fillRef>
-          <a:effectRef idx="0">
-            <a:schemeClr val="accent6"/>
-          </a:effectRef>
-          <a:fontRef idx="minor">
-            <a:schemeClr val="dk1"/>
-          </a:fontRef>
-        </p:style>
-        <p:txBody>
-          <a:bodyPr rtlCol="0" anchor="ctr"/>
-          <a:lstStyle/>
-          <a:p>
-            <a:pPr algn="ctr"/>
-            <a:endParaRPr kumimoji="1" lang="zh-CN" altLang="en-US"/>
-          </a:p>
-        </p:txBody>
-      </p:sp>
-      <p:sp>
-        <p:nvSpPr>
-          <p:cNvPr id="12" name="矩形 11">
-            <a:extLst>
-              <a:ext uri="{FF2B5EF4-FFF2-40B4-BE49-F238E27FC236}">
-                <a16:creationId xmlns:a16="http://schemas.microsoft.com/office/drawing/2014/main" id="{750E5A2C-05A1-E47A-54FC-82A8E932F9AD}"/>
-              </a:ext>
-            </a:extLst>
-          </p:cNvPr>
-          <p:cNvSpPr/>
-          <p:nvPr/>
-        </p:nvSpPr>
-        <p:spPr>
-          <a:xfrm>
-            <a:off x="2174485" y="1539587"/>
-            <a:ext cx="7263161" cy="1083969"/>
-          </a:xfrm>
-          <a:prstGeom prst="rect">
-            <a:avLst/>
-          </a:prstGeom>
-          <a:ln>
-            <a:solidFill>
-              <a:schemeClr val="tx1"/>
-            </a:solidFill>
-          </a:ln>
-        </p:spPr>
-        <p:style>
-          <a:lnRef idx="2">
-            <a:schemeClr val="accent6"/>
-          </a:lnRef>
-          <a:fillRef idx="1">
-            <a:schemeClr val="lt1"/>
-          </a:fillRef>
-          <a:effectRef idx="0">
-            <a:schemeClr val="accent6"/>
-          </a:effectRef>
-          <a:fontRef idx="minor">
-            <a:schemeClr val="dk1"/>
-          </a:fontRef>
-        </p:style>
-        <p:txBody>
-          <a:bodyPr rtlCol="0" anchor="ctr"/>
-          <a:lstStyle/>
-          <a:p>
-            <a:pPr algn="ctr"/>
-            <a:endParaRPr kumimoji="1" lang="zh-CN" altLang="en-US"/>
-          </a:p>
-        </p:txBody>
-      </p:sp>
-      <p:sp>
-        <p:nvSpPr>
-          <p:cNvPr id="13" name="矩形 12">
-            <a:extLst>
-              <a:ext uri="{FF2B5EF4-FFF2-40B4-BE49-F238E27FC236}">
-                <a16:creationId xmlns:a16="http://schemas.microsoft.com/office/drawing/2014/main" id="{19CBF791-1226-1B7F-E326-9B3091A4083C}"/>
-              </a:ext>
-            </a:extLst>
-          </p:cNvPr>
-          <p:cNvSpPr/>
-          <p:nvPr/>
-        </p:nvSpPr>
-        <p:spPr>
-          <a:xfrm>
-            <a:off x="1009883" y="1561841"/>
-            <a:ext cx="858644" cy="1080611"/>
-          </a:xfrm>
-          <a:prstGeom prst="rect">
-            <a:avLst/>
-          </a:prstGeom>
-          <a:ln>
-            <a:solidFill>
-              <a:schemeClr val="tx1"/>
-            </a:solidFill>
-          </a:ln>
-        </p:spPr>
-        <p:style>
-          <a:lnRef idx="2">
-            <a:schemeClr val="accent6"/>
-          </a:lnRef>
-          <a:fillRef idx="1">
-            <a:schemeClr val="lt1"/>
-          </a:fillRef>
-          <a:effectRef idx="0">
-            <a:schemeClr val="accent6"/>
-          </a:effectRef>
-          <a:fontRef idx="minor">
-            <a:schemeClr val="dk1"/>
-          </a:fontRef>
-        </p:style>
-        <p:txBody>
-          <a:bodyPr rtlCol="0" anchor="ctr"/>
-          <a:lstStyle/>
-          <a:p>
-            <a:pPr algn="ctr"/>
-            <a:endParaRPr kumimoji="1" lang="zh-CN" altLang="en-US"/>
-          </a:p>
-        </p:txBody>
-      </p:sp>
-      <p:sp>
-        <p:nvSpPr>
-          <p:cNvPr id="14" name="文本框 13">
-            <a:extLst>
-              <a:ext uri="{FF2B5EF4-FFF2-40B4-BE49-F238E27FC236}">
-                <a16:creationId xmlns:a16="http://schemas.microsoft.com/office/drawing/2014/main" id="{E5086C02-7BEE-B6AA-68CE-8B36814EADA5}"/>
-              </a:ext>
-            </a:extLst>
-          </p:cNvPr>
-          <p:cNvSpPr txBox="1"/>
-          <p:nvPr/>
-        </p:nvSpPr>
-        <p:spPr>
-          <a:xfrm>
-            <a:off x="1115127" y="1791758"/>
-            <a:ext cx="858644" cy="646331"/>
-          </a:xfrm>
-          <a:prstGeom prst="rect">
-            <a:avLst/>
-          </a:prstGeom>
-          <a:noFill/>
-        </p:spPr>
-        <p:txBody>
-          <a:bodyPr wrap="square" rtlCol="0">
-            <a:spAutoFit/>
-          </a:bodyPr>
-          <a:lstStyle/>
-          <a:p>
-            <a:r>
-              <a:rPr kumimoji="1" lang="zh-CN" altLang="en-US" dirty="0"/>
-              <a:t>面临挑战</a:t>
-            </a:r>
-          </a:p>
-        </p:txBody>
-      </p:sp>
-      <p:sp>
-        <p:nvSpPr>
-          <p:cNvPr id="15" name="矩形 14">
-            <a:extLst>
-              <a:ext uri="{FF2B5EF4-FFF2-40B4-BE49-F238E27FC236}">
-                <a16:creationId xmlns:a16="http://schemas.microsoft.com/office/drawing/2014/main" id="{0ACC151C-7AD9-478C-1C86-C6D12554CAF6}"/>
-              </a:ext>
-            </a:extLst>
-          </p:cNvPr>
-          <p:cNvSpPr/>
-          <p:nvPr/>
-        </p:nvSpPr>
-        <p:spPr>
-          <a:xfrm>
-            <a:off x="1020337" y="2880057"/>
-            <a:ext cx="858644" cy="3200254"/>
-          </a:xfrm>
-          <a:prstGeom prst="rect">
-            <a:avLst/>
-          </a:prstGeom>
-          <a:ln>
-            <a:solidFill>
-              <a:schemeClr val="tx1"/>
-            </a:solidFill>
-          </a:ln>
-        </p:spPr>
-        <p:style>
-          <a:lnRef idx="2">
-            <a:schemeClr val="accent6"/>
-          </a:lnRef>
-          <a:fillRef idx="1">
-            <a:schemeClr val="lt1"/>
-          </a:fillRef>
-          <a:effectRef idx="0">
-            <a:schemeClr val="accent6"/>
-          </a:effectRef>
-          <a:fontRef idx="minor">
-            <a:schemeClr val="dk1"/>
-          </a:fontRef>
-        </p:style>
-        <p:txBody>
-          <a:bodyPr rtlCol="0" anchor="ctr"/>
-          <a:lstStyle/>
-          <a:p>
-            <a:pPr algn="ctr"/>
-            <a:endParaRPr kumimoji="1" lang="zh-CN" altLang="en-US"/>
-          </a:p>
-        </p:txBody>
-      </p:sp>
-      <p:sp>
-        <p:nvSpPr>
-          <p:cNvPr id="16" name="文本框 15">
-            <a:extLst>
-              <a:ext uri="{FF2B5EF4-FFF2-40B4-BE49-F238E27FC236}">
-                <a16:creationId xmlns:a16="http://schemas.microsoft.com/office/drawing/2014/main" id="{5BD950AE-AEB9-8749-49DB-F187ACF27066}"/>
-              </a:ext>
-            </a:extLst>
-          </p:cNvPr>
-          <p:cNvSpPr txBox="1"/>
-          <p:nvPr/>
-        </p:nvSpPr>
-        <p:spPr>
-          <a:xfrm>
-            <a:off x="1214787" y="3673871"/>
-            <a:ext cx="501804" cy="1200329"/>
-          </a:xfrm>
-          <a:prstGeom prst="rect">
-            <a:avLst/>
-          </a:prstGeom>
-          <a:noFill/>
-        </p:spPr>
-        <p:txBody>
-          <a:bodyPr wrap="square" rtlCol="0">
-            <a:spAutoFit/>
-          </a:bodyPr>
-          <a:lstStyle/>
-          <a:p>
-            <a:r>
-              <a:rPr kumimoji="1" lang="zh-CN" altLang="en-US" dirty="0"/>
-              <a:t>研究内容</a:t>
-            </a:r>
-          </a:p>
-        </p:txBody>
-      </p:sp>
-      <p:sp>
-        <p:nvSpPr>
-          <p:cNvPr id="17" name="矩形 16">
-            <a:extLst>
-              <a:ext uri="{FF2B5EF4-FFF2-40B4-BE49-F238E27FC236}">
-                <a16:creationId xmlns:a16="http://schemas.microsoft.com/office/drawing/2014/main" id="{F4918191-AC98-6A35-C245-77E14379FD7D}"/>
-              </a:ext>
-            </a:extLst>
-          </p:cNvPr>
-          <p:cNvSpPr/>
-          <p:nvPr/>
-        </p:nvSpPr>
-        <p:spPr>
-          <a:xfrm>
-            <a:off x="2181917" y="2880057"/>
-            <a:ext cx="7263161" cy="3208509"/>
-          </a:xfrm>
-          <a:prstGeom prst="rect">
-            <a:avLst/>
-          </a:prstGeom>
-          <a:ln>
-            <a:solidFill>
-              <a:schemeClr val="tx1"/>
-            </a:solidFill>
-          </a:ln>
-        </p:spPr>
-        <p:style>
-          <a:lnRef idx="2">
-            <a:schemeClr val="accent6"/>
-          </a:lnRef>
-          <a:fillRef idx="1">
-            <a:schemeClr val="lt1"/>
-          </a:fillRef>
-          <a:effectRef idx="0">
-            <a:schemeClr val="accent6"/>
-          </a:effectRef>
-          <a:fontRef idx="minor">
-            <a:schemeClr val="dk1"/>
-          </a:fontRef>
-        </p:style>
-        <p:txBody>
-          <a:bodyPr rtlCol="0" anchor="ctr"/>
-          <a:lstStyle/>
-          <a:p>
-            <a:pPr algn="ctr"/>
-            <a:endParaRPr kumimoji="1" lang="zh-CN" altLang="en-US"/>
-          </a:p>
-        </p:txBody>
-      </p:sp>
-      <p:sp>
-        <p:nvSpPr>
-          <p:cNvPr id="18" name="圆角矩形 17">
-            <a:extLst>
-              <a:ext uri="{FF2B5EF4-FFF2-40B4-BE49-F238E27FC236}">
-                <a16:creationId xmlns:a16="http://schemas.microsoft.com/office/drawing/2014/main" id="{FDAB5A5A-5D7D-E2D0-A3BF-73DECCF50F89}"/>
-              </a:ext>
-            </a:extLst>
-          </p:cNvPr>
-          <p:cNvSpPr/>
-          <p:nvPr/>
-        </p:nvSpPr>
-        <p:spPr>
-          <a:xfrm>
-            <a:off x="2386361" y="1661532"/>
-            <a:ext cx="3163232" cy="837955"/>
-          </a:xfrm>
-          <a:prstGeom prst="roundRect">
-            <a:avLst/>
-          </a:prstGeom>
-          <a:ln>
-            <a:solidFill>
-              <a:schemeClr val="tx1"/>
-            </a:solidFill>
-          </a:ln>
-        </p:spPr>
-        <p:style>
-          <a:lnRef idx="2">
-            <a:schemeClr val="accent6"/>
-          </a:lnRef>
-          <a:fillRef idx="1">
-            <a:schemeClr val="lt1"/>
-          </a:fillRef>
-          <a:effectRef idx="0">
-            <a:schemeClr val="accent6"/>
-          </a:effectRef>
-          <a:fontRef idx="minor">
-            <a:schemeClr val="dk1"/>
-          </a:fontRef>
-        </p:style>
-        <p:txBody>
-          <a:bodyPr rtlCol="0" anchor="ctr"/>
-          <a:lstStyle/>
-          <a:p>
-            <a:pPr algn="ctr"/>
-            <a:endParaRPr kumimoji="1" lang="zh-CN" altLang="en-US"/>
-          </a:p>
-        </p:txBody>
-      </p:sp>
-      <p:sp>
-        <p:nvSpPr>
-          <p:cNvPr id="19" name="圆角矩形 18">
-            <a:extLst>
-              <a:ext uri="{FF2B5EF4-FFF2-40B4-BE49-F238E27FC236}">
-                <a16:creationId xmlns:a16="http://schemas.microsoft.com/office/drawing/2014/main" id="{6A49BD52-F5E0-A9E2-C53C-9B92FD33A423}"/>
-              </a:ext>
-            </a:extLst>
-          </p:cNvPr>
-          <p:cNvSpPr/>
-          <p:nvPr/>
-        </p:nvSpPr>
-        <p:spPr>
-          <a:xfrm>
-            <a:off x="5962183" y="1671372"/>
-            <a:ext cx="3378820" cy="806126"/>
-          </a:xfrm>
-          <a:prstGeom prst="roundRect">
-            <a:avLst/>
-          </a:prstGeom>
-          <a:ln>
-            <a:solidFill>
-              <a:schemeClr val="tx1"/>
-            </a:solidFill>
-          </a:ln>
-        </p:spPr>
-        <p:style>
-          <a:lnRef idx="2">
-            <a:schemeClr val="accent6"/>
-          </a:lnRef>
-          <a:fillRef idx="1">
-            <a:schemeClr val="lt1"/>
-          </a:fillRef>
-          <a:effectRef idx="0">
-            <a:schemeClr val="accent6"/>
-          </a:effectRef>
-          <a:fontRef idx="minor">
-            <a:schemeClr val="dk1"/>
-          </a:fontRef>
-        </p:style>
-        <p:txBody>
-          <a:bodyPr rtlCol="0" anchor="ctr"/>
-          <a:lstStyle/>
-          <a:p>
-            <a:pPr algn="ctr"/>
-            <a:endParaRPr kumimoji="1" lang="zh-CN" altLang="en-US"/>
-          </a:p>
-        </p:txBody>
-      </p:sp>
-      <p:sp>
-        <p:nvSpPr>
-          <p:cNvPr id="22" name="文本框 21">
-            <a:extLst>
-              <a:ext uri="{FF2B5EF4-FFF2-40B4-BE49-F238E27FC236}">
-                <a16:creationId xmlns:a16="http://schemas.microsoft.com/office/drawing/2014/main" id="{5CCEE64D-15DC-0E60-A3B2-9E30E53D16A9}"/>
-              </a:ext>
-            </a:extLst>
-          </p:cNvPr>
-          <p:cNvSpPr txBox="1"/>
-          <p:nvPr/>
-        </p:nvSpPr>
-        <p:spPr>
-          <a:xfrm>
-            <a:off x="2563385" y="1689954"/>
-            <a:ext cx="2721825" cy="738664"/>
-          </a:xfrm>
-          <a:prstGeom prst="rect">
-            <a:avLst/>
-          </a:prstGeom>
-          <a:noFill/>
-        </p:spPr>
-        <p:txBody>
-          <a:bodyPr wrap="square" rtlCol="0">
-            <a:spAutoFit/>
-          </a:bodyPr>
-          <a:lstStyle/>
-          <a:p>
-            <a:r>
-              <a:rPr kumimoji="1" lang="zh-CN" altLang="en-US" sz="1400" dirty="0"/>
-              <a:t>编码计算下行传输过程受信道衰落影响导致通信延迟增大，从而影响整体计算时长</a:t>
-            </a:r>
-          </a:p>
-        </p:txBody>
-      </p:sp>
-      <p:sp>
-        <p:nvSpPr>
-          <p:cNvPr id="23" name="文本框 22">
-            <a:extLst>
-              <a:ext uri="{FF2B5EF4-FFF2-40B4-BE49-F238E27FC236}">
-                <a16:creationId xmlns:a16="http://schemas.microsoft.com/office/drawing/2014/main" id="{319AAF94-7A6F-A5EB-DC3E-466A0F3074C0}"/>
-              </a:ext>
-            </a:extLst>
-          </p:cNvPr>
-          <p:cNvSpPr txBox="1"/>
-          <p:nvPr/>
-        </p:nvSpPr>
-        <p:spPr>
-          <a:xfrm>
-            <a:off x="6188920" y="1705103"/>
-            <a:ext cx="3126059" cy="738664"/>
-          </a:xfrm>
-          <a:prstGeom prst="rect">
-            <a:avLst/>
-          </a:prstGeom>
-          <a:noFill/>
-        </p:spPr>
-        <p:txBody>
-          <a:bodyPr wrap="square" rtlCol="0">
-            <a:spAutoFit/>
-          </a:bodyPr>
-          <a:lstStyle/>
-          <a:p>
-            <a:r>
-              <a:rPr kumimoji="1" lang="zh-CN" altLang="en-US" sz="1400" dirty="0"/>
-              <a:t>编码计算由于引入任务编码，计算子任务间存在相关性，现有机制未能充分利用相关性，并与</a:t>
-            </a:r>
-            <a:r>
-              <a:rPr kumimoji="1" lang="en-US" altLang="zh-CN" sz="1400" dirty="0"/>
-              <a:t>DSC</a:t>
-            </a:r>
-            <a:r>
-              <a:rPr kumimoji="1" lang="zh-CN" altLang="en-US" sz="1400" dirty="0"/>
-              <a:t>问题结合</a:t>
-            </a:r>
-          </a:p>
-        </p:txBody>
-      </p:sp>
       <p:grpSp>
         <p:nvGrpSpPr>
-          <p:cNvPr id="37" name="组合 36">
-            <a:extLst>
-              <a:ext uri="{FF2B5EF4-FFF2-40B4-BE49-F238E27FC236}">
-                <a16:creationId xmlns:a16="http://schemas.microsoft.com/office/drawing/2014/main" id="{2FCA9E7C-0B52-8C1F-756C-102B2594540E}"/>
+          <p:cNvPr id="47" name="组合 46">
+            <a:extLst>
+              <a:ext uri="{FF2B5EF4-FFF2-40B4-BE49-F238E27FC236}">
+                <a16:creationId xmlns:a16="http://schemas.microsoft.com/office/drawing/2014/main" id="{F2D24455-FF72-CA5A-8DFC-895F7DE0DEB2}"/>
               </a:ext>
             </a:extLst>
           </p:cNvPr>
@@ -4156,18 +3336,18 @@
         </p:nvGrpSpPr>
         <p:grpSpPr>
           <a:xfrm>
-            <a:off x="2304595" y="2983640"/>
-            <a:ext cx="3077265" cy="2190582"/>
-            <a:chOff x="2452341" y="2972433"/>
-            <a:chExt cx="3077265" cy="2190582"/>
+            <a:off x="1009883" y="111512"/>
+            <a:ext cx="8670302" cy="6663762"/>
+            <a:chOff x="1009883" y="111512"/>
+            <a:chExt cx="8670302" cy="6663762"/>
           </a:xfrm>
         </p:grpSpPr>
         <p:sp>
           <p:nvSpPr>
-            <p:cNvPr id="20" name="矩形 19">
+            <p:cNvPr id="4" name="矩形 3">
               <a:extLst>
                 <a:ext uri="{FF2B5EF4-FFF2-40B4-BE49-F238E27FC236}">
-                  <a16:creationId xmlns:a16="http://schemas.microsoft.com/office/drawing/2014/main" id="{592F0B53-A95C-70C2-A5C6-06BACE7A55C0}"/>
+                  <a16:creationId xmlns:a16="http://schemas.microsoft.com/office/drawing/2014/main" id="{D972F806-6100-F8F3-3A80-7818806F13FE}"/>
                 </a:ext>
               </a:extLst>
             </p:cNvPr>
@@ -4176,8 +3356,1472 @@
           </p:nvSpPr>
           <p:spPr>
             <a:xfrm>
-              <a:off x="2452341" y="2972433"/>
-              <a:ext cx="2963435" cy="2190582"/>
+              <a:off x="2174488" y="111512"/>
+              <a:ext cx="7263158" cy="568713"/>
+            </a:xfrm>
+            <a:prstGeom prst="rect">
+              <a:avLst/>
+            </a:prstGeom>
+            <a:noFill/>
+            <a:ln>
+              <a:solidFill>
+                <a:schemeClr val="tx1"/>
+              </a:solidFill>
+            </a:ln>
+          </p:spPr>
+          <p:style>
+            <a:lnRef idx="2">
+              <a:schemeClr val="accent6"/>
+            </a:lnRef>
+            <a:fillRef idx="1">
+              <a:schemeClr val="lt1"/>
+            </a:fillRef>
+            <a:effectRef idx="0">
+              <a:schemeClr val="accent6"/>
+            </a:effectRef>
+            <a:fontRef idx="minor">
+              <a:schemeClr val="dk1"/>
+            </a:fontRef>
+          </p:style>
+          <p:txBody>
+            <a:bodyPr rtlCol="0" anchor="ctr"/>
+            <a:lstStyle/>
+            <a:p>
+              <a:pPr algn="ctr"/>
+              <a:endParaRPr kumimoji="1" lang="zh-CN" altLang="en-US">
+                <a:ln w="0"/>
+                <a:solidFill>
+                  <a:schemeClr val="tx1"/>
+                </a:solidFill>
+                <a:effectLst>
+                  <a:outerShdw blurRad="38100" dist="19050" dir="2700000" algn="tl" rotWithShape="0">
+                    <a:schemeClr val="dk1">
+                      <a:alpha val="40000"/>
+                    </a:schemeClr>
+                  </a:outerShdw>
+                </a:effectLst>
+              </a:endParaRPr>
+            </a:p>
+          </p:txBody>
+        </p:sp>
+        <p:sp>
+          <p:nvSpPr>
+            <p:cNvPr id="5" name="文本框 4">
+              <a:extLst>
+                <a:ext uri="{FF2B5EF4-FFF2-40B4-BE49-F238E27FC236}">
+                  <a16:creationId xmlns:a16="http://schemas.microsoft.com/office/drawing/2014/main" id="{9BFE693D-2377-BDC7-91E6-D8214984D3CA}"/>
+                </a:ext>
+              </a:extLst>
+            </p:cNvPr>
+            <p:cNvSpPr txBox="1"/>
+            <p:nvPr/>
+          </p:nvSpPr>
+          <p:spPr>
+            <a:xfrm>
+              <a:off x="3542368" y="207829"/>
+              <a:ext cx="4839630" cy="338554"/>
+            </a:xfrm>
+            <a:prstGeom prst="rect">
+              <a:avLst/>
+            </a:prstGeom>
+            <a:noFill/>
+          </p:spPr>
+          <p:txBody>
+            <a:bodyPr wrap="square" rtlCol="0">
+              <a:spAutoFit/>
+            </a:bodyPr>
+            <a:lstStyle/>
+            <a:p>
+              <a:r>
+                <a:rPr kumimoji="1" lang="zh-CN" altLang="en-US" sz="1600" dirty="0"/>
+                <a:t>分布式信源编码辅助的编码计算结果传输方法研究</a:t>
+              </a:r>
+            </a:p>
+          </p:txBody>
+        </p:sp>
+        <p:sp>
+          <p:nvSpPr>
+            <p:cNvPr id="6" name="矩形 5">
+              <a:extLst>
+                <a:ext uri="{FF2B5EF4-FFF2-40B4-BE49-F238E27FC236}">
+                  <a16:creationId xmlns:a16="http://schemas.microsoft.com/office/drawing/2014/main" id="{1D4CA199-F4E0-9137-2FE5-B98C65F6F002}"/>
+                </a:ext>
+              </a:extLst>
+            </p:cNvPr>
+            <p:cNvSpPr/>
+            <p:nvPr/>
+          </p:nvSpPr>
+          <p:spPr>
+            <a:xfrm>
+              <a:off x="2174486" y="952864"/>
+              <a:ext cx="3341647" cy="369331"/>
+            </a:xfrm>
+            <a:prstGeom prst="rect">
+              <a:avLst/>
+            </a:prstGeom>
+            <a:ln>
+              <a:solidFill>
+                <a:schemeClr val="tx1"/>
+              </a:solidFill>
+            </a:ln>
+          </p:spPr>
+          <p:style>
+            <a:lnRef idx="2">
+              <a:schemeClr val="accent6"/>
+            </a:lnRef>
+            <a:fillRef idx="1">
+              <a:schemeClr val="lt1"/>
+            </a:fillRef>
+            <a:effectRef idx="0">
+              <a:schemeClr val="accent6"/>
+            </a:effectRef>
+            <a:fontRef idx="minor">
+              <a:schemeClr val="dk1"/>
+            </a:fontRef>
+          </p:style>
+          <p:txBody>
+            <a:bodyPr rtlCol="0" anchor="ctr"/>
+            <a:lstStyle/>
+            <a:p>
+              <a:pPr algn="ctr"/>
+              <a:endParaRPr kumimoji="1" lang="zh-CN" altLang="en-US"/>
+            </a:p>
+          </p:txBody>
+        </p:sp>
+        <p:sp>
+          <p:nvSpPr>
+            <p:cNvPr id="7" name="矩形 6">
+              <a:extLst>
+                <a:ext uri="{FF2B5EF4-FFF2-40B4-BE49-F238E27FC236}">
+                  <a16:creationId xmlns:a16="http://schemas.microsoft.com/office/drawing/2014/main" id="{E9870C36-BBED-B06A-2FC7-90770FE61814}"/>
+                </a:ext>
+              </a:extLst>
+            </p:cNvPr>
+            <p:cNvSpPr/>
+            <p:nvPr/>
+          </p:nvSpPr>
+          <p:spPr>
+            <a:xfrm>
+              <a:off x="6095999" y="956760"/>
+              <a:ext cx="3341648" cy="369332"/>
+            </a:xfrm>
+            <a:prstGeom prst="rect">
+              <a:avLst/>
+            </a:prstGeom>
+            <a:ln>
+              <a:solidFill>
+                <a:schemeClr val="tx1"/>
+              </a:solidFill>
+            </a:ln>
+          </p:spPr>
+          <p:style>
+            <a:lnRef idx="2">
+              <a:schemeClr val="accent6"/>
+            </a:lnRef>
+            <a:fillRef idx="1">
+              <a:schemeClr val="lt1"/>
+            </a:fillRef>
+            <a:effectRef idx="0">
+              <a:schemeClr val="accent6"/>
+            </a:effectRef>
+            <a:fontRef idx="minor">
+              <a:schemeClr val="dk1"/>
+            </a:fontRef>
+          </p:style>
+          <p:txBody>
+            <a:bodyPr rtlCol="0" anchor="ctr"/>
+            <a:lstStyle/>
+            <a:p>
+              <a:pPr algn="ctr"/>
+              <a:endParaRPr kumimoji="1" lang="zh-CN" altLang="en-US"/>
+            </a:p>
+          </p:txBody>
+        </p:sp>
+        <p:sp>
+          <p:nvSpPr>
+            <p:cNvPr id="8" name="文本框 7">
+              <a:extLst>
+                <a:ext uri="{FF2B5EF4-FFF2-40B4-BE49-F238E27FC236}">
+                  <a16:creationId xmlns:a16="http://schemas.microsoft.com/office/drawing/2014/main" id="{1CFC36BD-DAC9-04B1-9812-69ACABB34AD2}"/>
+                </a:ext>
+              </a:extLst>
+            </p:cNvPr>
+            <p:cNvSpPr txBox="1"/>
+            <p:nvPr/>
+          </p:nvSpPr>
+          <p:spPr>
+            <a:xfrm>
+              <a:off x="2996889" y="967808"/>
+              <a:ext cx="2274849" cy="307777"/>
+            </a:xfrm>
+            <a:prstGeom prst="rect">
+              <a:avLst/>
+            </a:prstGeom>
+            <a:noFill/>
+          </p:spPr>
+          <p:txBody>
+            <a:bodyPr wrap="square" rtlCol="0">
+              <a:spAutoFit/>
+            </a:bodyPr>
+            <a:lstStyle/>
+            <a:p>
+              <a:r>
+                <a:rPr kumimoji="1" lang="zh-CN" altLang="en-US" sz="1400" dirty="0"/>
+                <a:t>第一章</a:t>
+              </a:r>
+              <a:r>
+                <a:rPr kumimoji="1" lang="en-US" altLang="zh-CN" sz="1400" dirty="0"/>
+                <a:t>	</a:t>
+              </a:r>
+              <a:r>
+                <a:rPr kumimoji="1" lang="zh-CN" altLang="en-US" sz="1400" dirty="0"/>
+                <a:t>绪论</a:t>
+              </a:r>
+            </a:p>
+          </p:txBody>
+        </p:sp>
+        <p:sp>
+          <p:nvSpPr>
+            <p:cNvPr id="9" name="文本框 8">
+              <a:extLst>
+                <a:ext uri="{FF2B5EF4-FFF2-40B4-BE49-F238E27FC236}">
+                  <a16:creationId xmlns:a16="http://schemas.microsoft.com/office/drawing/2014/main" id="{682A481C-4570-7EA2-87FA-2048C5469A84}"/>
+                </a:ext>
+              </a:extLst>
+            </p:cNvPr>
+            <p:cNvSpPr txBox="1"/>
+            <p:nvPr/>
+          </p:nvSpPr>
+          <p:spPr>
+            <a:xfrm>
+              <a:off x="6338536" y="992836"/>
+              <a:ext cx="3341649" cy="307777"/>
+            </a:xfrm>
+            <a:prstGeom prst="rect">
+              <a:avLst/>
+            </a:prstGeom>
+            <a:noFill/>
+          </p:spPr>
+          <p:txBody>
+            <a:bodyPr wrap="square" rtlCol="0">
+              <a:spAutoFit/>
+            </a:bodyPr>
+            <a:lstStyle/>
+            <a:p>
+              <a:r>
+                <a:rPr kumimoji="1" lang="zh-CN" altLang="en-US" sz="1400" dirty="0"/>
+                <a:t>第二章</a:t>
+              </a:r>
+              <a:r>
+                <a:rPr kumimoji="1" lang="en-US" altLang="zh-CN" sz="1400" dirty="0"/>
+                <a:t>	</a:t>
+              </a:r>
+              <a:r>
+                <a:rPr kumimoji="1" lang="zh-CN" altLang="en-US" sz="1400" dirty="0"/>
+                <a:t>理论基础与相关技术</a:t>
+              </a:r>
+            </a:p>
+          </p:txBody>
+        </p:sp>
+        <p:sp>
+          <p:nvSpPr>
+            <p:cNvPr id="10" name="下箭头 9">
+              <a:extLst>
+                <a:ext uri="{FF2B5EF4-FFF2-40B4-BE49-F238E27FC236}">
+                  <a16:creationId xmlns:a16="http://schemas.microsoft.com/office/drawing/2014/main" id="{337BCAEE-2B43-3C2C-8031-DAD7B233AA76}"/>
+                </a:ext>
+              </a:extLst>
+            </p:cNvPr>
+            <p:cNvSpPr/>
+            <p:nvPr/>
+          </p:nvSpPr>
+          <p:spPr>
+            <a:xfrm>
+              <a:off x="3845309" y="680224"/>
+              <a:ext cx="157978" cy="278109"/>
+            </a:xfrm>
+            <a:prstGeom prst="downArrow">
+              <a:avLst/>
+            </a:prstGeom>
+            <a:ln>
+              <a:solidFill>
+                <a:schemeClr val="tx1"/>
+              </a:solidFill>
+            </a:ln>
+          </p:spPr>
+          <p:style>
+            <a:lnRef idx="2">
+              <a:schemeClr val="accent6"/>
+            </a:lnRef>
+            <a:fillRef idx="1">
+              <a:schemeClr val="lt1"/>
+            </a:fillRef>
+            <a:effectRef idx="0">
+              <a:schemeClr val="accent6"/>
+            </a:effectRef>
+            <a:fontRef idx="minor">
+              <a:schemeClr val="dk1"/>
+            </a:fontRef>
+          </p:style>
+          <p:txBody>
+            <a:bodyPr rtlCol="0" anchor="ctr"/>
+            <a:lstStyle/>
+            <a:p>
+              <a:pPr algn="ctr"/>
+              <a:endParaRPr kumimoji="1" lang="zh-CN" altLang="en-US"/>
+            </a:p>
+          </p:txBody>
+        </p:sp>
+        <p:sp>
+          <p:nvSpPr>
+            <p:cNvPr id="11" name="下箭头 10">
+              <a:extLst>
+                <a:ext uri="{FF2B5EF4-FFF2-40B4-BE49-F238E27FC236}">
+                  <a16:creationId xmlns:a16="http://schemas.microsoft.com/office/drawing/2014/main" id="{24FF7630-3B0C-4C99-31CF-003E62A7CD09}"/>
+                </a:ext>
+              </a:extLst>
+            </p:cNvPr>
+            <p:cNvSpPr/>
+            <p:nvPr/>
+          </p:nvSpPr>
+          <p:spPr>
+            <a:xfrm>
+              <a:off x="7186954" y="680224"/>
+              <a:ext cx="157978" cy="278109"/>
+            </a:xfrm>
+            <a:prstGeom prst="downArrow">
+              <a:avLst/>
+            </a:prstGeom>
+            <a:ln>
+              <a:solidFill>
+                <a:schemeClr val="tx1"/>
+              </a:solidFill>
+            </a:ln>
+          </p:spPr>
+          <p:style>
+            <a:lnRef idx="2">
+              <a:schemeClr val="accent6"/>
+            </a:lnRef>
+            <a:fillRef idx="1">
+              <a:schemeClr val="lt1"/>
+            </a:fillRef>
+            <a:effectRef idx="0">
+              <a:schemeClr val="accent6"/>
+            </a:effectRef>
+            <a:fontRef idx="minor">
+              <a:schemeClr val="dk1"/>
+            </a:fontRef>
+          </p:style>
+          <p:txBody>
+            <a:bodyPr rtlCol="0" anchor="ctr"/>
+            <a:lstStyle/>
+            <a:p>
+              <a:pPr algn="ctr"/>
+              <a:endParaRPr kumimoji="1" lang="zh-CN" altLang="en-US"/>
+            </a:p>
+          </p:txBody>
+        </p:sp>
+        <p:sp>
+          <p:nvSpPr>
+            <p:cNvPr id="12" name="矩形 11">
+              <a:extLst>
+                <a:ext uri="{FF2B5EF4-FFF2-40B4-BE49-F238E27FC236}">
+                  <a16:creationId xmlns:a16="http://schemas.microsoft.com/office/drawing/2014/main" id="{750E5A2C-05A1-E47A-54FC-82A8E932F9AD}"/>
+                </a:ext>
+              </a:extLst>
+            </p:cNvPr>
+            <p:cNvSpPr/>
+            <p:nvPr/>
+          </p:nvSpPr>
+          <p:spPr>
+            <a:xfrm>
+              <a:off x="2174485" y="1539587"/>
+              <a:ext cx="7263161" cy="1083969"/>
+            </a:xfrm>
+            <a:prstGeom prst="rect">
+              <a:avLst/>
+            </a:prstGeom>
+            <a:ln>
+              <a:solidFill>
+                <a:schemeClr val="tx1"/>
+              </a:solidFill>
+            </a:ln>
+          </p:spPr>
+          <p:style>
+            <a:lnRef idx="2">
+              <a:schemeClr val="accent6"/>
+            </a:lnRef>
+            <a:fillRef idx="1">
+              <a:schemeClr val="lt1"/>
+            </a:fillRef>
+            <a:effectRef idx="0">
+              <a:schemeClr val="accent6"/>
+            </a:effectRef>
+            <a:fontRef idx="minor">
+              <a:schemeClr val="dk1"/>
+            </a:fontRef>
+          </p:style>
+          <p:txBody>
+            <a:bodyPr rtlCol="0" anchor="ctr"/>
+            <a:lstStyle/>
+            <a:p>
+              <a:pPr algn="ctr"/>
+              <a:endParaRPr kumimoji="1" lang="zh-CN" altLang="en-US"/>
+            </a:p>
+          </p:txBody>
+        </p:sp>
+        <p:sp>
+          <p:nvSpPr>
+            <p:cNvPr id="13" name="矩形 12">
+              <a:extLst>
+                <a:ext uri="{FF2B5EF4-FFF2-40B4-BE49-F238E27FC236}">
+                  <a16:creationId xmlns:a16="http://schemas.microsoft.com/office/drawing/2014/main" id="{19CBF791-1226-1B7F-E326-9B3091A4083C}"/>
+                </a:ext>
+              </a:extLst>
+            </p:cNvPr>
+            <p:cNvSpPr/>
+            <p:nvPr/>
+          </p:nvSpPr>
+          <p:spPr>
+            <a:xfrm>
+              <a:off x="1009883" y="1561841"/>
+              <a:ext cx="858644" cy="1080611"/>
+            </a:xfrm>
+            <a:prstGeom prst="rect">
+              <a:avLst/>
+            </a:prstGeom>
+            <a:ln>
+              <a:solidFill>
+                <a:schemeClr val="tx1"/>
+              </a:solidFill>
+            </a:ln>
+          </p:spPr>
+          <p:style>
+            <a:lnRef idx="2">
+              <a:schemeClr val="accent6"/>
+            </a:lnRef>
+            <a:fillRef idx="1">
+              <a:schemeClr val="lt1"/>
+            </a:fillRef>
+            <a:effectRef idx="0">
+              <a:schemeClr val="accent6"/>
+            </a:effectRef>
+            <a:fontRef idx="minor">
+              <a:schemeClr val="dk1"/>
+            </a:fontRef>
+          </p:style>
+          <p:txBody>
+            <a:bodyPr rtlCol="0" anchor="ctr"/>
+            <a:lstStyle/>
+            <a:p>
+              <a:pPr algn="ctr"/>
+              <a:endParaRPr kumimoji="1" lang="zh-CN" altLang="en-US"/>
+            </a:p>
+          </p:txBody>
+        </p:sp>
+        <p:sp>
+          <p:nvSpPr>
+            <p:cNvPr id="14" name="文本框 13">
+              <a:extLst>
+                <a:ext uri="{FF2B5EF4-FFF2-40B4-BE49-F238E27FC236}">
+                  <a16:creationId xmlns:a16="http://schemas.microsoft.com/office/drawing/2014/main" id="{E5086C02-7BEE-B6AA-68CE-8B36814EADA5}"/>
+                </a:ext>
+              </a:extLst>
+            </p:cNvPr>
+            <p:cNvSpPr txBox="1"/>
+            <p:nvPr/>
+          </p:nvSpPr>
+          <p:spPr>
+            <a:xfrm>
+              <a:off x="1115127" y="1791758"/>
+              <a:ext cx="858644" cy="646331"/>
+            </a:xfrm>
+            <a:prstGeom prst="rect">
+              <a:avLst/>
+            </a:prstGeom>
+            <a:noFill/>
+          </p:spPr>
+          <p:txBody>
+            <a:bodyPr wrap="square" rtlCol="0">
+              <a:spAutoFit/>
+            </a:bodyPr>
+            <a:lstStyle/>
+            <a:p>
+              <a:r>
+                <a:rPr kumimoji="1" lang="zh-CN" altLang="en-US" dirty="0"/>
+                <a:t>面临挑战</a:t>
+              </a:r>
+            </a:p>
+          </p:txBody>
+        </p:sp>
+        <p:sp>
+          <p:nvSpPr>
+            <p:cNvPr id="15" name="矩形 14">
+              <a:extLst>
+                <a:ext uri="{FF2B5EF4-FFF2-40B4-BE49-F238E27FC236}">
+                  <a16:creationId xmlns:a16="http://schemas.microsoft.com/office/drawing/2014/main" id="{0ACC151C-7AD9-478C-1C86-C6D12554CAF6}"/>
+                </a:ext>
+              </a:extLst>
+            </p:cNvPr>
+            <p:cNvSpPr/>
+            <p:nvPr/>
+          </p:nvSpPr>
+          <p:spPr>
+            <a:xfrm>
+              <a:off x="1020337" y="2880057"/>
+              <a:ext cx="858644" cy="3200254"/>
+            </a:xfrm>
+            <a:prstGeom prst="rect">
+              <a:avLst/>
+            </a:prstGeom>
+            <a:ln>
+              <a:solidFill>
+                <a:schemeClr val="tx1"/>
+              </a:solidFill>
+            </a:ln>
+          </p:spPr>
+          <p:style>
+            <a:lnRef idx="2">
+              <a:schemeClr val="accent6"/>
+            </a:lnRef>
+            <a:fillRef idx="1">
+              <a:schemeClr val="lt1"/>
+            </a:fillRef>
+            <a:effectRef idx="0">
+              <a:schemeClr val="accent6"/>
+            </a:effectRef>
+            <a:fontRef idx="minor">
+              <a:schemeClr val="dk1"/>
+            </a:fontRef>
+          </p:style>
+          <p:txBody>
+            <a:bodyPr rtlCol="0" anchor="ctr"/>
+            <a:lstStyle/>
+            <a:p>
+              <a:pPr algn="ctr"/>
+              <a:endParaRPr kumimoji="1" lang="zh-CN" altLang="en-US"/>
+            </a:p>
+          </p:txBody>
+        </p:sp>
+        <p:sp>
+          <p:nvSpPr>
+            <p:cNvPr id="16" name="文本框 15">
+              <a:extLst>
+                <a:ext uri="{FF2B5EF4-FFF2-40B4-BE49-F238E27FC236}">
+                  <a16:creationId xmlns:a16="http://schemas.microsoft.com/office/drawing/2014/main" id="{5BD950AE-AEB9-8749-49DB-F187ACF27066}"/>
+                </a:ext>
+              </a:extLst>
+            </p:cNvPr>
+            <p:cNvSpPr txBox="1"/>
+            <p:nvPr/>
+          </p:nvSpPr>
+          <p:spPr>
+            <a:xfrm>
+              <a:off x="1214787" y="3673871"/>
+              <a:ext cx="501804" cy="1200329"/>
+            </a:xfrm>
+            <a:prstGeom prst="rect">
+              <a:avLst/>
+            </a:prstGeom>
+            <a:noFill/>
+          </p:spPr>
+          <p:txBody>
+            <a:bodyPr wrap="square" rtlCol="0">
+              <a:spAutoFit/>
+            </a:bodyPr>
+            <a:lstStyle/>
+            <a:p>
+              <a:r>
+                <a:rPr kumimoji="1" lang="zh-CN" altLang="en-US" dirty="0"/>
+                <a:t>研究内容</a:t>
+              </a:r>
+            </a:p>
+          </p:txBody>
+        </p:sp>
+        <p:sp>
+          <p:nvSpPr>
+            <p:cNvPr id="17" name="矩形 16">
+              <a:extLst>
+                <a:ext uri="{FF2B5EF4-FFF2-40B4-BE49-F238E27FC236}">
+                  <a16:creationId xmlns:a16="http://schemas.microsoft.com/office/drawing/2014/main" id="{F4918191-AC98-6A35-C245-77E14379FD7D}"/>
+                </a:ext>
+              </a:extLst>
+            </p:cNvPr>
+            <p:cNvSpPr/>
+            <p:nvPr/>
+          </p:nvSpPr>
+          <p:spPr>
+            <a:xfrm>
+              <a:off x="2181917" y="2880057"/>
+              <a:ext cx="7263161" cy="3208509"/>
+            </a:xfrm>
+            <a:prstGeom prst="rect">
+              <a:avLst/>
+            </a:prstGeom>
+            <a:ln>
+              <a:solidFill>
+                <a:schemeClr val="tx1"/>
+              </a:solidFill>
+            </a:ln>
+          </p:spPr>
+          <p:style>
+            <a:lnRef idx="2">
+              <a:schemeClr val="accent6"/>
+            </a:lnRef>
+            <a:fillRef idx="1">
+              <a:schemeClr val="lt1"/>
+            </a:fillRef>
+            <a:effectRef idx="0">
+              <a:schemeClr val="accent6"/>
+            </a:effectRef>
+            <a:fontRef idx="minor">
+              <a:schemeClr val="dk1"/>
+            </a:fontRef>
+          </p:style>
+          <p:txBody>
+            <a:bodyPr rtlCol="0" anchor="ctr"/>
+            <a:lstStyle/>
+            <a:p>
+              <a:pPr algn="ctr"/>
+              <a:endParaRPr kumimoji="1" lang="zh-CN" altLang="en-US"/>
+            </a:p>
+          </p:txBody>
+        </p:sp>
+        <p:sp>
+          <p:nvSpPr>
+            <p:cNvPr id="18" name="圆角矩形 17">
+              <a:extLst>
+                <a:ext uri="{FF2B5EF4-FFF2-40B4-BE49-F238E27FC236}">
+                  <a16:creationId xmlns:a16="http://schemas.microsoft.com/office/drawing/2014/main" id="{FDAB5A5A-5D7D-E2D0-A3BF-73DECCF50F89}"/>
+                </a:ext>
+              </a:extLst>
+            </p:cNvPr>
+            <p:cNvSpPr/>
+            <p:nvPr/>
+          </p:nvSpPr>
+          <p:spPr>
+            <a:xfrm>
+              <a:off x="2386361" y="1661532"/>
+              <a:ext cx="3163232" cy="837955"/>
+            </a:xfrm>
+            <a:prstGeom prst="roundRect">
+              <a:avLst/>
+            </a:prstGeom>
+            <a:ln>
+              <a:solidFill>
+                <a:schemeClr val="tx1"/>
+              </a:solidFill>
+            </a:ln>
+          </p:spPr>
+          <p:style>
+            <a:lnRef idx="2">
+              <a:schemeClr val="accent6"/>
+            </a:lnRef>
+            <a:fillRef idx="1">
+              <a:schemeClr val="lt1"/>
+            </a:fillRef>
+            <a:effectRef idx="0">
+              <a:schemeClr val="accent6"/>
+            </a:effectRef>
+            <a:fontRef idx="minor">
+              <a:schemeClr val="dk1"/>
+            </a:fontRef>
+          </p:style>
+          <p:txBody>
+            <a:bodyPr rtlCol="0" anchor="ctr"/>
+            <a:lstStyle/>
+            <a:p>
+              <a:pPr algn="ctr"/>
+              <a:endParaRPr kumimoji="1" lang="zh-CN" altLang="en-US"/>
+            </a:p>
+          </p:txBody>
+        </p:sp>
+        <p:sp>
+          <p:nvSpPr>
+            <p:cNvPr id="19" name="圆角矩形 18">
+              <a:extLst>
+                <a:ext uri="{FF2B5EF4-FFF2-40B4-BE49-F238E27FC236}">
+                  <a16:creationId xmlns:a16="http://schemas.microsoft.com/office/drawing/2014/main" id="{6A49BD52-F5E0-A9E2-C53C-9B92FD33A423}"/>
+                </a:ext>
+              </a:extLst>
+            </p:cNvPr>
+            <p:cNvSpPr/>
+            <p:nvPr/>
+          </p:nvSpPr>
+          <p:spPr>
+            <a:xfrm>
+              <a:off x="5962183" y="1671372"/>
+              <a:ext cx="3378820" cy="806126"/>
+            </a:xfrm>
+            <a:prstGeom prst="roundRect">
+              <a:avLst/>
+            </a:prstGeom>
+            <a:ln>
+              <a:solidFill>
+                <a:schemeClr val="tx1"/>
+              </a:solidFill>
+            </a:ln>
+          </p:spPr>
+          <p:style>
+            <a:lnRef idx="2">
+              <a:schemeClr val="accent6"/>
+            </a:lnRef>
+            <a:fillRef idx="1">
+              <a:schemeClr val="lt1"/>
+            </a:fillRef>
+            <a:effectRef idx="0">
+              <a:schemeClr val="accent6"/>
+            </a:effectRef>
+            <a:fontRef idx="minor">
+              <a:schemeClr val="dk1"/>
+            </a:fontRef>
+          </p:style>
+          <p:txBody>
+            <a:bodyPr rtlCol="0" anchor="ctr"/>
+            <a:lstStyle/>
+            <a:p>
+              <a:pPr algn="ctr"/>
+              <a:endParaRPr kumimoji="1" lang="zh-CN" altLang="en-US"/>
+            </a:p>
+          </p:txBody>
+        </p:sp>
+        <p:sp>
+          <p:nvSpPr>
+            <p:cNvPr id="22" name="文本框 21">
+              <a:extLst>
+                <a:ext uri="{FF2B5EF4-FFF2-40B4-BE49-F238E27FC236}">
+                  <a16:creationId xmlns:a16="http://schemas.microsoft.com/office/drawing/2014/main" id="{5CCEE64D-15DC-0E60-A3B2-9E30E53D16A9}"/>
+                </a:ext>
+              </a:extLst>
+            </p:cNvPr>
+            <p:cNvSpPr txBox="1"/>
+            <p:nvPr/>
+          </p:nvSpPr>
+          <p:spPr>
+            <a:xfrm>
+              <a:off x="2563385" y="1689954"/>
+              <a:ext cx="2721825" cy="738664"/>
+            </a:xfrm>
+            <a:prstGeom prst="rect">
+              <a:avLst/>
+            </a:prstGeom>
+            <a:noFill/>
+          </p:spPr>
+          <p:txBody>
+            <a:bodyPr wrap="square" rtlCol="0">
+              <a:spAutoFit/>
+            </a:bodyPr>
+            <a:lstStyle/>
+            <a:p>
+              <a:r>
+                <a:rPr kumimoji="1" lang="zh-CN" altLang="en-US" sz="1400" dirty="0"/>
+                <a:t>编码计算下行传输过程受信道衰落影响导致通信延迟增大，从而影响整体计算时长</a:t>
+              </a:r>
+            </a:p>
+          </p:txBody>
+        </p:sp>
+        <p:sp>
+          <p:nvSpPr>
+            <p:cNvPr id="23" name="文本框 22">
+              <a:extLst>
+                <a:ext uri="{FF2B5EF4-FFF2-40B4-BE49-F238E27FC236}">
+                  <a16:creationId xmlns:a16="http://schemas.microsoft.com/office/drawing/2014/main" id="{319AAF94-7A6F-A5EB-DC3E-466A0F3074C0}"/>
+                </a:ext>
+              </a:extLst>
+            </p:cNvPr>
+            <p:cNvSpPr txBox="1"/>
+            <p:nvPr/>
+          </p:nvSpPr>
+          <p:spPr>
+            <a:xfrm>
+              <a:off x="6188920" y="1705103"/>
+              <a:ext cx="3126059" cy="738664"/>
+            </a:xfrm>
+            <a:prstGeom prst="rect">
+              <a:avLst/>
+            </a:prstGeom>
+            <a:noFill/>
+          </p:spPr>
+          <p:txBody>
+            <a:bodyPr wrap="square" rtlCol="0">
+              <a:spAutoFit/>
+            </a:bodyPr>
+            <a:lstStyle/>
+            <a:p>
+              <a:r>
+                <a:rPr kumimoji="1" lang="zh-CN" altLang="en-US" sz="1400" dirty="0"/>
+                <a:t>编码计算由于引入任务编码，计算子任务间存在相关性，现有机制未能充分利用相关性，并与</a:t>
+              </a:r>
+              <a:r>
+                <a:rPr kumimoji="1" lang="en-US" altLang="zh-CN" sz="1400" dirty="0"/>
+                <a:t>DSC</a:t>
+              </a:r>
+              <a:r>
+                <a:rPr kumimoji="1" lang="zh-CN" altLang="en-US" sz="1400" dirty="0"/>
+                <a:t>问题结合</a:t>
+              </a:r>
+            </a:p>
+          </p:txBody>
+        </p:sp>
+        <p:grpSp>
+          <p:nvGrpSpPr>
+            <p:cNvPr id="37" name="组合 36">
+              <a:extLst>
+                <a:ext uri="{FF2B5EF4-FFF2-40B4-BE49-F238E27FC236}">
+                  <a16:creationId xmlns:a16="http://schemas.microsoft.com/office/drawing/2014/main" id="{2FCA9E7C-0B52-8C1F-756C-102B2594540E}"/>
+                </a:ext>
+              </a:extLst>
+            </p:cNvPr>
+            <p:cNvGrpSpPr/>
+            <p:nvPr/>
+          </p:nvGrpSpPr>
+          <p:grpSpPr>
+            <a:xfrm>
+              <a:off x="2304595" y="2983640"/>
+              <a:ext cx="3077265" cy="2190582"/>
+              <a:chOff x="2452341" y="2972433"/>
+              <a:chExt cx="3077265" cy="2190582"/>
+            </a:xfrm>
+          </p:grpSpPr>
+          <p:sp>
+            <p:nvSpPr>
+              <p:cNvPr id="20" name="矩形 19">
+                <a:extLst>
+                  <a:ext uri="{FF2B5EF4-FFF2-40B4-BE49-F238E27FC236}">
+                    <a16:creationId xmlns:a16="http://schemas.microsoft.com/office/drawing/2014/main" id="{592F0B53-A95C-70C2-A5C6-06BACE7A55C0}"/>
+                  </a:ext>
+                </a:extLst>
+              </p:cNvPr>
+              <p:cNvSpPr/>
+              <p:nvPr/>
+            </p:nvSpPr>
+            <p:spPr>
+              <a:xfrm>
+                <a:off x="2452341" y="2972433"/>
+                <a:ext cx="2963435" cy="2190582"/>
+              </a:xfrm>
+              <a:prstGeom prst="rect">
+                <a:avLst/>
+              </a:prstGeom>
+              <a:ln>
+                <a:solidFill>
+                  <a:schemeClr val="tx1"/>
+                </a:solidFill>
+                <a:prstDash val="sysDash"/>
+              </a:ln>
+            </p:spPr>
+            <p:style>
+              <a:lnRef idx="2">
+                <a:schemeClr val="accent6"/>
+              </a:lnRef>
+              <a:fillRef idx="1">
+                <a:schemeClr val="lt1"/>
+              </a:fillRef>
+              <a:effectRef idx="0">
+                <a:schemeClr val="accent6"/>
+              </a:effectRef>
+              <a:fontRef idx="minor">
+                <a:schemeClr val="dk1"/>
+              </a:fontRef>
+            </p:style>
+            <p:txBody>
+              <a:bodyPr rtlCol="0" anchor="ctr"/>
+              <a:lstStyle/>
+              <a:p>
+                <a:pPr algn="ctr"/>
+                <a:endParaRPr kumimoji="1" lang="zh-CN" altLang="en-US"/>
+              </a:p>
+            </p:txBody>
+          </p:sp>
+          <p:sp>
+            <p:nvSpPr>
+              <p:cNvPr id="24" name="文本框 23">
+                <a:extLst>
+                  <a:ext uri="{FF2B5EF4-FFF2-40B4-BE49-F238E27FC236}">
+                    <a16:creationId xmlns:a16="http://schemas.microsoft.com/office/drawing/2014/main" id="{8F97E032-AF2A-8D82-C37E-6E2F21227DD4}"/>
+                  </a:ext>
+                </a:extLst>
+              </p:cNvPr>
+              <p:cNvSpPr txBox="1"/>
+              <p:nvPr/>
+            </p:nvSpPr>
+            <p:spPr>
+              <a:xfrm>
+                <a:off x="2563385" y="3065650"/>
+                <a:ext cx="2966221" cy="523220"/>
+              </a:xfrm>
+              <a:prstGeom prst="rect">
+                <a:avLst/>
+              </a:prstGeom>
+              <a:noFill/>
+            </p:spPr>
+            <p:txBody>
+              <a:bodyPr wrap="square" rtlCol="0">
+                <a:spAutoFit/>
+              </a:bodyPr>
+              <a:lstStyle/>
+              <a:p>
+                <a:r>
+                  <a:rPr kumimoji="1" lang="zh-CN" altLang="en-US" sz="1400" dirty="0"/>
+                  <a:t>第三章  面向完整重构的</a:t>
+                </a:r>
+                <a:r>
+                  <a:rPr kumimoji="1" lang="en" altLang="zh-CN" sz="1400" dirty="0"/>
+                  <a:t>DSC</a:t>
+                </a:r>
+                <a:r>
+                  <a:rPr kumimoji="1" lang="zh-CN" altLang="en-US" sz="1400" dirty="0"/>
+                  <a:t>辅助编码计算结果传输方法研究</a:t>
+                </a:r>
+              </a:p>
+            </p:txBody>
+          </p:sp>
+          <p:sp>
+            <p:nvSpPr>
+              <p:cNvPr id="27" name="圆角矩形 26">
+                <a:extLst>
+                  <a:ext uri="{FF2B5EF4-FFF2-40B4-BE49-F238E27FC236}">
+                    <a16:creationId xmlns:a16="http://schemas.microsoft.com/office/drawing/2014/main" id="{08D3D132-1C90-67B8-1E3A-31C816DC346D}"/>
+                  </a:ext>
+                </a:extLst>
+              </p:cNvPr>
+              <p:cNvSpPr/>
+              <p:nvPr/>
+            </p:nvSpPr>
+            <p:spPr>
+              <a:xfrm>
+                <a:off x="2555720" y="3659141"/>
+                <a:ext cx="2729490" cy="1347757"/>
+              </a:xfrm>
+              <a:prstGeom prst="roundRect">
+                <a:avLst/>
+              </a:prstGeom>
+              <a:ln>
+                <a:solidFill>
+                  <a:schemeClr val="tx1"/>
+                </a:solidFill>
+              </a:ln>
+            </p:spPr>
+            <p:style>
+              <a:lnRef idx="2">
+                <a:schemeClr val="accent6"/>
+              </a:lnRef>
+              <a:fillRef idx="1">
+                <a:schemeClr val="lt1"/>
+              </a:fillRef>
+              <a:effectRef idx="0">
+                <a:schemeClr val="accent6"/>
+              </a:effectRef>
+              <a:fontRef idx="minor">
+                <a:schemeClr val="dk1"/>
+              </a:fontRef>
+            </p:style>
+            <p:txBody>
+              <a:bodyPr rtlCol="0" anchor="ctr"/>
+              <a:lstStyle/>
+              <a:p>
+                <a:pPr algn="ctr"/>
+                <a:endParaRPr kumimoji="1" lang="zh-CN" altLang="en-US"/>
+              </a:p>
+            </p:txBody>
+          </p:sp>
+          <p:sp>
+            <p:nvSpPr>
+              <p:cNvPr id="29" name="文本框 28">
+                <a:extLst>
+                  <a:ext uri="{FF2B5EF4-FFF2-40B4-BE49-F238E27FC236}">
+                    <a16:creationId xmlns:a16="http://schemas.microsoft.com/office/drawing/2014/main" id="{D295368C-3E6B-37C0-E99D-DA4FD562103E}"/>
+                  </a:ext>
+                </a:extLst>
+              </p:cNvPr>
+              <p:cNvSpPr txBox="1"/>
+              <p:nvPr/>
+            </p:nvSpPr>
+            <p:spPr>
+              <a:xfrm>
+                <a:off x="2617058" y="3855965"/>
+                <a:ext cx="2701837" cy="954107"/>
+              </a:xfrm>
+              <a:prstGeom prst="rect">
+                <a:avLst/>
+              </a:prstGeom>
+              <a:noFill/>
+            </p:spPr>
+            <p:txBody>
+              <a:bodyPr wrap="square" rtlCol="0">
+                <a:spAutoFit/>
+              </a:bodyPr>
+              <a:lstStyle/>
+              <a:p>
+                <a:r>
+                  <a:rPr kumimoji="1" lang="zh-CN" altLang="en-US" sz="1400" dirty="0"/>
+                  <a:t>针对独立恢复计算子任务结果场景，提出基于</a:t>
+                </a:r>
+                <a:r>
+                  <a:rPr kumimoji="1" lang="en-US" altLang="zh-CN" sz="1400" dirty="0"/>
+                  <a:t>DSC</a:t>
+                </a:r>
+                <a:r>
+                  <a:rPr kumimoji="1" lang="zh-CN" altLang="en-US" sz="1400" dirty="0"/>
+                  <a:t>的编码计算结果下行传输机制，并提出一种基于伴随式穿刺的实际编码方案</a:t>
+                </a:r>
+              </a:p>
+            </p:txBody>
+          </p:sp>
+        </p:grpSp>
+        <p:grpSp>
+          <p:nvGrpSpPr>
+            <p:cNvPr id="36" name="组合 35">
+              <a:extLst>
+                <a:ext uri="{FF2B5EF4-FFF2-40B4-BE49-F238E27FC236}">
+                  <a16:creationId xmlns:a16="http://schemas.microsoft.com/office/drawing/2014/main" id="{04A48E13-472E-6DBA-E16A-6EFDBC902CCA}"/>
+                </a:ext>
+              </a:extLst>
+            </p:cNvPr>
+            <p:cNvGrpSpPr/>
+            <p:nvPr/>
+          </p:nvGrpSpPr>
+          <p:grpSpPr>
+            <a:xfrm>
+              <a:off x="6188920" y="2972434"/>
+              <a:ext cx="3146045" cy="2190581"/>
+              <a:chOff x="6076013" y="2972433"/>
+              <a:chExt cx="3146045" cy="2190581"/>
+            </a:xfrm>
+          </p:grpSpPr>
+          <p:sp>
+            <p:nvSpPr>
+              <p:cNvPr id="21" name="矩形 20">
+                <a:extLst>
+                  <a:ext uri="{FF2B5EF4-FFF2-40B4-BE49-F238E27FC236}">
+                    <a16:creationId xmlns:a16="http://schemas.microsoft.com/office/drawing/2014/main" id="{577B3CA9-3349-34D2-A8B2-F20068EA404E}"/>
+                  </a:ext>
+                </a:extLst>
+              </p:cNvPr>
+              <p:cNvSpPr/>
+              <p:nvPr/>
+            </p:nvSpPr>
+            <p:spPr>
+              <a:xfrm>
+                <a:off x="6076013" y="2972433"/>
+                <a:ext cx="3146045" cy="2190581"/>
+              </a:xfrm>
+              <a:prstGeom prst="rect">
+                <a:avLst/>
+              </a:prstGeom>
+              <a:ln>
+                <a:solidFill>
+                  <a:schemeClr val="tx1"/>
+                </a:solidFill>
+                <a:prstDash val="sysDash"/>
+              </a:ln>
+            </p:spPr>
+            <p:style>
+              <a:lnRef idx="2">
+                <a:schemeClr val="accent6"/>
+              </a:lnRef>
+              <a:fillRef idx="1">
+                <a:schemeClr val="lt1"/>
+              </a:fillRef>
+              <a:effectRef idx="0">
+                <a:schemeClr val="accent6"/>
+              </a:effectRef>
+              <a:fontRef idx="minor">
+                <a:schemeClr val="dk1"/>
+              </a:fontRef>
+            </p:style>
+            <p:txBody>
+              <a:bodyPr rtlCol="0" anchor="ctr"/>
+              <a:lstStyle/>
+              <a:p>
+                <a:pPr algn="ctr"/>
+                <a:endParaRPr kumimoji="1" lang="zh-CN" altLang="en-US"/>
+              </a:p>
+            </p:txBody>
+          </p:sp>
+          <p:sp>
+            <p:nvSpPr>
+              <p:cNvPr id="25" name="文本框 24">
+                <a:extLst>
+                  <a:ext uri="{FF2B5EF4-FFF2-40B4-BE49-F238E27FC236}">
+                    <a16:creationId xmlns:a16="http://schemas.microsoft.com/office/drawing/2014/main" id="{FF8540A1-ED44-2B0D-0432-8086D1356629}"/>
+                  </a:ext>
+                </a:extLst>
+              </p:cNvPr>
+              <p:cNvSpPr txBox="1"/>
+              <p:nvPr/>
+            </p:nvSpPr>
+            <p:spPr>
+              <a:xfrm>
+                <a:off x="6109008" y="3065650"/>
+                <a:ext cx="3113050" cy="523220"/>
+              </a:xfrm>
+              <a:prstGeom prst="rect">
+                <a:avLst/>
+              </a:prstGeom>
+              <a:noFill/>
+            </p:spPr>
+            <p:txBody>
+              <a:bodyPr wrap="square" rtlCol="0">
+                <a:spAutoFit/>
+              </a:bodyPr>
+              <a:lstStyle/>
+              <a:p>
+                <a:r>
+                  <a:rPr kumimoji="1" lang="zh-CN" altLang="en-US" sz="1400" dirty="0"/>
+                  <a:t>第四章  面向线性聚合的</a:t>
+                </a:r>
+                <a:r>
+                  <a:rPr kumimoji="1" lang="en" altLang="zh-CN" sz="1400" dirty="0"/>
+                  <a:t>DSC</a:t>
+                </a:r>
+                <a:r>
+                  <a:rPr kumimoji="1" lang="zh-CN" altLang="en-US" sz="1400" dirty="0"/>
+                  <a:t>辅助编码计算结果传输方法研究</a:t>
+                </a:r>
+              </a:p>
+            </p:txBody>
+          </p:sp>
+          <p:sp>
+            <p:nvSpPr>
+              <p:cNvPr id="28" name="圆角矩形 27">
+                <a:extLst>
+                  <a:ext uri="{FF2B5EF4-FFF2-40B4-BE49-F238E27FC236}">
+                    <a16:creationId xmlns:a16="http://schemas.microsoft.com/office/drawing/2014/main" id="{DFA2878E-B099-D6FC-B44B-B1C95811C5A8}"/>
+                  </a:ext>
+                </a:extLst>
+              </p:cNvPr>
+              <p:cNvSpPr/>
+              <p:nvPr/>
+            </p:nvSpPr>
+            <p:spPr>
+              <a:xfrm>
+                <a:off x="6192877" y="3670480"/>
+                <a:ext cx="2834030" cy="1347757"/>
+              </a:xfrm>
+              <a:prstGeom prst="roundRect">
+                <a:avLst/>
+              </a:prstGeom>
+              <a:ln>
+                <a:solidFill>
+                  <a:schemeClr val="tx1"/>
+                </a:solidFill>
+              </a:ln>
+            </p:spPr>
+            <p:style>
+              <a:lnRef idx="2">
+                <a:schemeClr val="accent6"/>
+              </a:lnRef>
+              <a:fillRef idx="1">
+                <a:schemeClr val="lt1"/>
+              </a:fillRef>
+              <a:effectRef idx="0">
+                <a:schemeClr val="accent6"/>
+              </a:effectRef>
+              <a:fontRef idx="minor">
+                <a:schemeClr val="dk1"/>
+              </a:fontRef>
+            </p:style>
+            <p:txBody>
+              <a:bodyPr rtlCol="0" anchor="ctr"/>
+              <a:lstStyle/>
+              <a:p>
+                <a:pPr algn="ctr"/>
+                <a:endParaRPr kumimoji="1" lang="zh-CN" altLang="en-US"/>
+              </a:p>
+            </p:txBody>
+          </p:sp>
+          <p:sp>
+            <p:nvSpPr>
+              <p:cNvPr id="30" name="文本框 29">
+                <a:extLst>
+                  <a:ext uri="{FF2B5EF4-FFF2-40B4-BE49-F238E27FC236}">
+                    <a16:creationId xmlns:a16="http://schemas.microsoft.com/office/drawing/2014/main" id="{B7EC2620-25FE-4D2D-378D-9027AA994C75}"/>
+                  </a:ext>
+                </a:extLst>
+              </p:cNvPr>
+              <p:cNvSpPr txBox="1"/>
+              <p:nvPr/>
+            </p:nvSpPr>
+            <p:spPr>
+              <a:xfrm>
+                <a:off x="6241201" y="3668295"/>
+                <a:ext cx="2701837" cy="1384995"/>
+              </a:xfrm>
+              <a:prstGeom prst="rect">
+                <a:avLst/>
+              </a:prstGeom>
+              <a:noFill/>
+            </p:spPr>
+            <p:txBody>
+              <a:bodyPr wrap="square" rtlCol="0">
+                <a:spAutoFit/>
+              </a:bodyPr>
+              <a:lstStyle/>
+              <a:p>
+                <a:r>
+                  <a:rPr kumimoji="1" lang="zh-CN" altLang="en-US" sz="1400" dirty="0"/>
+                  <a:t>针对恢复子任务线性函数计算结果场景，提出基于嵌套线性编码和典型性译码联合的编码计算结果下行传输机制，并证明该方法比独立恢复进一步压缩了信源，从而提升传输效率</a:t>
+                </a:r>
+              </a:p>
+            </p:txBody>
+          </p:sp>
+        </p:grpSp>
+        <p:sp>
+          <p:nvSpPr>
+            <p:cNvPr id="31" name="下箭头 30">
+              <a:extLst>
+                <a:ext uri="{FF2B5EF4-FFF2-40B4-BE49-F238E27FC236}">
+                  <a16:creationId xmlns:a16="http://schemas.microsoft.com/office/drawing/2014/main" id="{472C5B10-DAF1-ACF0-2D9D-3B396B989CC1}"/>
+                </a:ext>
+              </a:extLst>
+            </p:cNvPr>
+            <p:cNvSpPr/>
+            <p:nvPr/>
+          </p:nvSpPr>
+          <p:spPr>
+            <a:xfrm>
+              <a:off x="3867150" y="1328496"/>
+              <a:ext cx="157978" cy="205806"/>
+            </a:xfrm>
+            <a:prstGeom prst="downArrow">
+              <a:avLst/>
+            </a:prstGeom>
+            <a:ln>
+              <a:solidFill>
+                <a:schemeClr val="tx1"/>
+              </a:solidFill>
+            </a:ln>
+          </p:spPr>
+          <p:style>
+            <a:lnRef idx="2">
+              <a:schemeClr val="accent6"/>
+            </a:lnRef>
+            <a:fillRef idx="1">
+              <a:schemeClr val="lt1"/>
+            </a:fillRef>
+            <a:effectRef idx="0">
+              <a:schemeClr val="accent6"/>
+            </a:effectRef>
+            <a:fontRef idx="minor">
+              <a:schemeClr val="dk1"/>
+            </a:fontRef>
+          </p:style>
+          <p:txBody>
+            <a:bodyPr rtlCol="0" anchor="ctr"/>
+            <a:lstStyle/>
+            <a:p>
+              <a:pPr algn="ctr"/>
+              <a:endParaRPr kumimoji="1" lang="zh-CN" altLang="en-US"/>
+            </a:p>
+          </p:txBody>
+        </p:sp>
+        <p:sp>
+          <p:nvSpPr>
+            <p:cNvPr id="32" name="下箭头 31">
+              <a:extLst>
+                <a:ext uri="{FF2B5EF4-FFF2-40B4-BE49-F238E27FC236}">
+                  <a16:creationId xmlns:a16="http://schemas.microsoft.com/office/drawing/2014/main" id="{B4C29DC9-2279-888B-C996-08EFDCDFEB28}"/>
+                </a:ext>
+              </a:extLst>
+            </p:cNvPr>
+            <p:cNvSpPr/>
+            <p:nvPr/>
+          </p:nvSpPr>
+          <p:spPr>
+            <a:xfrm>
+              <a:off x="7217618" y="1333781"/>
+              <a:ext cx="157978" cy="205806"/>
+            </a:xfrm>
+            <a:prstGeom prst="downArrow">
+              <a:avLst/>
+            </a:prstGeom>
+            <a:ln>
+              <a:solidFill>
+                <a:schemeClr val="tx1"/>
+              </a:solidFill>
+            </a:ln>
+          </p:spPr>
+          <p:style>
+            <a:lnRef idx="2">
+              <a:schemeClr val="accent6"/>
+            </a:lnRef>
+            <a:fillRef idx="1">
+              <a:schemeClr val="lt1"/>
+            </a:fillRef>
+            <a:effectRef idx="0">
+              <a:schemeClr val="accent6"/>
+            </a:effectRef>
+            <a:fontRef idx="minor">
+              <a:schemeClr val="dk1"/>
+            </a:fontRef>
+          </p:style>
+          <p:txBody>
+            <a:bodyPr rtlCol="0" anchor="ctr"/>
+            <a:lstStyle/>
+            <a:p>
+              <a:pPr algn="ctr"/>
+              <a:endParaRPr kumimoji="1" lang="zh-CN" altLang="en-US"/>
+            </a:p>
+          </p:txBody>
+        </p:sp>
+        <p:sp>
+          <p:nvSpPr>
+            <p:cNvPr id="33" name="下箭头 32">
+              <a:extLst>
+                <a:ext uri="{FF2B5EF4-FFF2-40B4-BE49-F238E27FC236}">
+                  <a16:creationId xmlns:a16="http://schemas.microsoft.com/office/drawing/2014/main" id="{CFD6C499-89EE-5ACF-E2F3-9C1376EEB77E}"/>
+                </a:ext>
+              </a:extLst>
+            </p:cNvPr>
+            <p:cNvSpPr/>
+            <p:nvPr/>
+          </p:nvSpPr>
+          <p:spPr>
+            <a:xfrm>
+              <a:off x="5727076" y="2642452"/>
+              <a:ext cx="157978" cy="205806"/>
+            </a:xfrm>
+            <a:prstGeom prst="downArrow">
+              <a:avLst/>
+            </a:prstGeom>
+            <a:ln>
+              <a:solidFill>
+                <a:schemeClr val="tx1"/>
+              </a:solidFill>
+            </a:ln>
+          </p:spPr>
+          <p:style>
+            <a:lnRef idx="2">
+              <a:schemeClr val="accent6"/>
+            </a:lnRef>
+            <a:fillRef idx="1">
+              <a:schemeClr val="lt1"/>
+            </a:fillRef>
+            <a:effectRef idx="0">
+              <a:schemeClr val="accent6"/>
+            </a:effectRef>
+            <a:fontRef idx="minor">
+              <a:schemeClr val="dk1"/>
+            </a:fontRef>
+          </p:style>
+          <p:txBody>
+            <a:bodyPr rtlCol="0" anchor="ctr"/>
+            <a:lstStyle/>
+            <a:p>
+              <a:pPr algn="ctr"/>
+              <a:endParaRPr kumimoji="1" lang="zh-CN" altLang="en-US"/>
+            </a:p>
+          </p:txBody>
+        </p:sp>
+        <p:sp>
+          <p:nvSpPr>
+            <p:cNvPr id="34" name="右箭头 33">
+              <a:extLst>
+                <a:ext uri="{FF2B5EF4-FFF2-40B4-BE49-F238E27FC236}">
+                  <a16:creationId xmlns:a16="http://schemas.microsoft.com/office/drawing/2014/main" id="{140B7E63-5D25-4148-94D4-09C9DB399554}"/>
+                </a:ext>
+              </a:extLst>
+            </p:cNvPr>
+            <p:cNvSpPr/>
+            <p:nvPr/>
+          </p:nvSpPr>
+          <p:spPr>
+            <a:xfrm>
+              <a:off x="5291710" y="4078931"/>
+              <a:ext cx="897210" cy="168319"/>
+            </a:xfrm>
+            <a:prstGeom prst="rightArrow">
+              <a:avLst/>
+            </a:prstGeom>
+            <a:ln>
+              <a:solidFill>
+                <a:schemeClr val="tx1"/>
+              </a:solidFill>
+            </a:ln>
+          </p:spPr>
+          <p:style>
+            <a:lnRef idx="2">
+              <a:schemeClr val="accent6"/>
+            </a:lnRef>
+            <a:fillRef idx="1">
+              <a:schemeClr val="lt1"/>
+            </a:fillRef>
+            <a:effectRef idx="0">
+              <a:schemeClr val="accent6"/>
+            </a:effectRef>
+            <a:fontRef idx="minor">
+              <a:schemeClr val="dk1"/>
+            </a:fontRef>
+          </p:style>
+          <p:txBody>
+            <a:bodyPr rtlCol="0" anchor="ctr"/>
+            <a:lstStyle/>
+            <a:p>
+              <a:pPr algn="ctr"/>
+              <a:endParaRPr kumimoji="1" lang="zh-CN" altLang="en-US"/>
+            </a:p>
+          </p:txBody>
+        </p:sp>
+        <p:sp>
+          <p:nvSpPr>
+            <p:cNvPr id="35" name="文本框 34">
+              <a:extLst>
+                <a:ext uri="{FF2B5EF4-FFF2-40B4-BE49-F238E27FC236}">
+                  <a16:creationId xmlns:a16="http://schemas.microsoft.com/office/drawing/2014/main" id="{1E1568DD-A82C-E3A6-229B-FE7F9FAA70DC}"/>
+                </a:ext>
+              </a:extLst>
+            </p:cNvPr>
+            <p:cNvSpPr txBox="1"/>
+            <p:nvPr/>
+          </p:nvSpPr>
+          <p:spPr>
+            <a:xfrm>
+              <a:off x="5336337" y="3252797"/>
+              <a:ext cx="806821" cy="830997"/>
+            </a:xfrm>
+            <a:prstGeom prst="rect">
+              <a:avLst/>
+            </a:prstGeom>
+            <a:noFill/>
+          </p:spPr>
+          <p:txBody>
+            <a:bodyPr wrap="square" rtlCol="0">
+              <a:spAutoFit/>
+            </a:bodyPr>
+            <a:lstStyle/>
+            <a:p>
+              <a:r>
+                <a:rPr kumimoji="1" lang="zh-CN" altLang="en-US" sz="1200" dirty="0"/>
+                <a:t>恢复独立信源</a:t>
+              </a:r>
+              <a:r>
+                <a:rPr kumimoji="1" lang="en-US" altLang="zh-CN" sz="1200" dirty="0"/>
+                <a:t>→</a:t>
+              </a:r>
+              <a:r>
+                <a:rPr kumimoji="1" lang="zh-CN" altLang="en-US" sz="1200" dirty="0"/>
+                <a:t>恢复信源线性函数</a:t>
+              </a:r>
+            </a:p>
+          </p:txBody>
+        </p:sp>
+        <p:sp>
+          <p:nvSpPr>
+            <p:cNvPr id="39" name="矩形 38">
+              <a:extLst>
+                <a:ext uri="{FF2B5EF4-FFF2-40B4-BE49-F238E27FC236}">
+                  <a16:creationId xmlns:a16="http://schemas.microsoft.com/office/drawing/2014/main" id="{E7120628-BCB0-0AEE-6C62-D4D5A79E4412}"/>
+                </a:ext>
+              </a:extLst>
+            </p:cNvPr>
+            <p:cNvSpPr/>
+            <p:nvPr/>
+          </p:nvSpPr>
+          <p:spPr>
+            <a:xfrm>
+              <a:off x="2996889" y="5574532"/>
+              <a:ext cx="5645305" cy="386761"/>
             </a:xfrm>
             <a:prstGeom prst="rect">
               <a:avLst/>
@@ -4214,10 +4858,10 @@
         </p:sp>
         <p:sp>
           <p:nvSpPr>
-            <p:cNvPr id="24" name="文本框 23">
+            <p:cNvPr id="40" name="文本框 39">
               <a:extLst>
                 <a:ext uri="{FF2B5EF4-FFF2-40B4-BE49-F238E27FC236}">
-                  <a16:creationId xmlns:a16="http://schemas.microsoft.com/office/drawing/2014/main" id="{8F97E032-AF2A-8D82-C37E-6E2F21227DD4}"/>
+                  <a16:creationId xmlns:a16="http://schemas.microsoft.com/office/drawing/2014/main" id="{E469F641-EF95-735F-6A17-04CED5C556CC}"/>
                 </a:ext>
               </a:extLst>
             </p:cNvPr>
@@ -4226,8 +4870,8 @@
           </p:nvSpPr>
           <p:spPr>
             <a:xfrm>
-              <a:off x="2563385" y="3065650"/>
-              <a:ext cx="2966221" cy="523220"/>
+              <a:off x="2996889" y="5642309"/>
+              <a:ext cx="5645305" cy="307777"/>
             </a:xfrm>
             <a:prstGeom prst="rect">
               <a:avLst/>
@@ -4242,25 +4886,33 @@
             <a:p>
               <a:r>
                 <a:rPr kumimoji="1" lang="zh-CN" altLang="en-US" sz="1400" dirty="0"/>
-                <a:t>第三章  面向完整重构的</a:t>
+                <a:t>结合编码计算与</a:t>
               </a:r>
               <a:r>
-                <a:rPr kumimoji="1" lang="en" altLang="zh-CN" sz="1400" dirty="0"/>
+                <a:rPr kumimoji="1" lang="en-US" altLang="zh-CN" sz="1400" dirty="0"/>
                 <a:t>DSC</a:t>
               </a:r>
               <a:r>
                 <a:rPr kumimoji="1" lang="zh-CN" altLang="en-US" sz="1400" dirty="0"/>
-                <a:t>辅助编码计算结果传输方法研究</a:t>
+                <a:t>技术，利用</a:t>
+              </a:r>
+              <a:r>
+                <a:rPr kumimoji="1" lang="en-US" altLang="zh-CN" sz="1400" dirty="0"/>
+                <a:t>DSC</a:t>
+              </a:r>
+              <a:r>
+                <a:rPr kumimoji="1" lang="zh-CN" altLang="en-US" sz="1400" dirty="0"/>
+                <a:t>技术进行编码计算的传输负载压缩</a:t>
               </a:r>
             </a:p>
           </p:txBody>
         </p:sp>
         <p:sp>
           <p:nvSpPr>
-            <p:cNvPr id="27" name="圆角矩形 26">
+            <p:cNvPr id="41" name="下箭头 40">
               <a:extLst>
                 <a:ext uri="{FF2B5EF4-FFF2-40B4-BE49-F238E27FC236}">
-                  <a16:creationId xmlns:a16="http://schemas.microsoft.com/office/drawing/2014/main" id="{08D3D132-1C90-67B8-1E3A-31C816DC346D}"/>
+                  <a16:creationId xmlns:a16="http://schemas.microsoft.com/office/drawing/2014/main" id="{244776AE-AC0E-8089-459A-E669B995B2F5}"/>
                 </a:ext>
               </a:extLst>
             </p:cNvPr>
@@ -4269,10 +4921,10 @@
           </p:nvSpPr>
           <p:spPr>
             <a:xfrm>
-              <a:off x="2555720" y="3659141"/>
-              <a:ext cx="2729490" cy="1347757"/>
+              <a:off x="3953570" y="5204556"/>
+              <a:ext cx="183531" cy="324948"/>
             </a:xfrm>
-            <a:prstGeom prst="roundRect">
+            <a:prstGeom prst="downArrow">
               <a:avLst/>
             </a:prstGeom>
             <a:ln>
@@ -4306,74 +4958,10 @@
         </p:sp>
         <p:sp>
           <p:nvSpPr>
-            <p:cNvPr id="29" name="文本框 28">
+            <p:cNvPr id="42" name="下箭头 41">
               <a:extLst>
                 <a:ext uri="{FF2B5EF4-FFF2-40B4-BE49-F238E27FC236}">
-                  <a16:creationId xmlns:a16="http://schemas.microsoft.com/office/drawing/2014/main" id="{D295368C-3E6B-37C0-E99D-DA4FD562103E}"/>
-                </a:ext>
-              </a:extLst>
-            </p:cNvPr>
-            <p:cNvSpPr txBox="1"/>
-            <p:nvPr/>
-          </p:nvSpPr>
-          <p:spPr>
-            <a:xfrm>
-              <a:off x="2617058" y="3855965"/>
-              <a:ext cx="2701837" cy="954107"/>
-            </a:xfrm>
-            <a:prstGeom prst="rect">
-              <a:avLst/>
-            </a:prstGeom>
-            <a:noFill/>
-          </p:spPr>
-          <p:txBody>
-            <a:bodyPr wrap="square" rtlCol="0">
-              <a:spAutoFit/>
-            </a:bodyPr>
-            <a:lstStyle/>
-            <a:p>
-              <a:r>
-                <a:rPr kumimoji="1" lang="zh-CN" altLang="en-US" sz="1400" dirty="0"/>
-                <a:t>针对独立恢复计算子任务结果场景，提出基于</a:t>
-              </a:r>
-              <a:r>
-                <a:rPr kumimoji="1" lang="en-US" altLang="zh-CN" sz="1400" dirty="0"/>
-                <a:t>DSC</a:t>
-              </a:r>
-              <a:r>
-                <a:rPr kumimoji="1" lang="zh-CN" altLang="en-US" sz="1400" dirty="0"/>
-                <a:t>的编码计算结果下行传输机制，并提出一种基于伴随式穿刺的实际编码方案</a:t>
-              </a:r>
-            </a:p>
-          </p:txBody>
-        </p:sp>
-      </p:grpSp>
-      <p:grpSp>
-        <p:nvGrpSpPr>
-          <p:cNvPr id="36" name="组合 35">
-            <a:extLst>
-              <a:ext uri="{FF2B5EF4-FFF2-40B4-BE49-F238E27FC236}">
-                <a16:creationId xmlns:a16="http://schemas.microsoft.com/office/drawing/2014/main" id="{04A48E13-472E-6DBA-E16A-6EFDBC902CCA}"/>
-              </a:ext>
-            </a:extLst>
-          </p:cNvPr>
-          <p:cNvGrpSpPr/>
-          <p:nvPr/>
-        </p:nvGrpSpPr>
-        <p:grpSpPr>
-          <a:xfrm>
-            <a:off x="6188920" y="2972434"/>
-            <a:ext cx="3146045" cy="2190581"/>
-            <a:chOff x="6076013" y="2972433"/>
-            <a:chExt cx="3146045" cy="2190581"/>
-          </a:xfrm>
-        </p:grpSpPr>
-        <p:sp>
-          <p:nvSpPr>
-            <p:cNvPr id="21" name="矩形 20">
-              <a:extLst>
-                <a:ext uri="{FF2B5EF4-FFF2-40B4-BE49-F238E27FC236}">
-                  <a16:creationId xmlns:a16="http://schemas.microsoft.com/office/drawing/2014/main" id="{577B3CA9-3349-34D2-A8B2-F20068EA404E}"/>
+                  <a16:creationId xmlns:a16="http://schemas.microsoft.com/office/drawing/2014/main" id="{93898745-C80D-2FB5-69EB-E9421EB21E8A}"/>
                 </a:ext>
               </a:extLst>
             </p:cNvPr>
@@ -4382,103 +4970,10 @@
           </p:nvSpPr>
           <p:spPr>
             <a:xfrm>
-              <a:off x="6076013" y="2972433"/>
-              <a:ext cx="3146045" cy="2190581"/>
+              <a:off x="7318909" y="5182331"/>
+              <a:ext cx="183531" cy="380994"/>
             </a:xfrm>
-            <a:prstGeom prst="rect">
-              <a:avLst/>
-            </a:prstGeom>
-            <a:ln>
-              <a:solidFill>
-                <a:schemeClr val="tx1"/>
-              </a:solidFill>
-              <a:prstDash val="sysDash"/>
-            </a:ln>
-          </p:spPr>
-          <p:style>
-            <a:lnRef idx="2">
-              <a:schemeClr val="accent6"/>
-            </a:lnRef>
-            <a:fillRef idx="1">
-              <a:schemeClr val="lt1"/>
-            </a:fillRef>
-            <a:effectRef idx="0">
-              <a:schemeClr val="accent6"/>
-            </a:effectRef>
-            <a:fontRef idx="minor">
-              <a:schemeClr val="dk1"/>
-            </a:fontRef>
-          </p:style>
-          <p:txBody>
-            <a:bodyPr rtlCol="0" anchor="ctr"/>
-            <a:lstStyle/>
-            <a:p>
-              <a:pPr algn="ctr"/>
-              <a:endParaRPr kumimoji="1" lang="zh-CN" altLang="en-US"/>
-            </a:p>
-          </p:txBody>
-        </p:sp>
-        <p:sp>
-          <p:nvSpPr>
-            <p:cNvPr id="25" name="文本框 24">
-              <a:extLst>
-                <a:ext uri="{FF2B5EF4-FFF2-40B4-BE49-F238E27FC236}">
-                  <a16:creationId xmlns:a16="http://schemas.microsoft.com/office/drawing/2014/main" id="{FF8540A1-ED44-2B0D-0432-8086D1356629}"/>
-                </a:ext>
-              </a:extLst>
-            </p:cNvPr>
-            <p:cNvSpPr txBox="1"/>
-            <p:nvPr/>
-          </p:nvSpPr>
-          <p:spPr>
-            <a:xfrm>
-              <a:off x="6109008" y="3065650"/>
-              <a:ext cx="3113050" cy="523220"/>
-            </a:xfrm>
-            <a:prstGeom prst="rect">
-              <a:avLst/>
-            </a:prstGeom>
-            <a:noFill/>
-          </p:spPr>
-          <p:txBody>
-            <a:bodyPr wrap="square" rtlCol="0">
-              <a:spAutoFit/>
-            </a:bodyPr>
-            <a:lstStyle/>
-            <a:p>
-              <a:r>
-                <a:rPr kumimoji="1" lang="zh-CN" altLang="en-US" sz="1400" dirty="0"/>
-                <a:t>第四章  面向线性聚合的</a:t>
-              </a:r>
-              <a:r>
-                <a:rPr kumimoji="1" lang="en" altLang="zh-CN" sz="1400" dirty="0"/>
-                <a:t>DSC</a:t>
-              </a:r>
-              <a:r>
-                <a:rPr kumimoji="1" lang="zh-CN" altLang="en-US" sz="1400" dirty="0"/>
-                <a:t>辅助编码计算结果传输方法研究</a:t>
-              </a:r>
-            </a:p>
-          </p:txBody>
-        </p:sp>
-        <p:sp>
-          <p:nvSpPr>
-            <p:cNvPr id="28" name="圆角矩形 27">
-              <a:extLst>
-                <a:ext uri="{FF2B5EF4-FFF2-40B4-BE49-F238E27FC236}">
-                  <a16:creationId xmlns:a16="http://schemas.microsoft.com/office/drawing/2014/main" id="{DFA2878E-B099-D6FC-B44B-B1C95811C5A8}"/>
-                </a:ext>
-              </a:extLst>
-            </p:cNvPr>
-            <p:cNvSpPr/>
-            <p:nvPr/>
-          </p:nvSpPr>
-          <p:spPr>
-            <a:xfrm>
-              <a:off x="6192877" y="3670480"/>
-              <a:ext cx="2834030" cy="1347757"/>
-            </a:xfrm>
-            <a:prstGeom prst="roundRect">
+            <a:prstGeom prst="downArrow">
               <a:avLst/>
             </a:prstGeom>
             <a:ln>
@@ -4512,10 +5007,59 @@
         </p:sp>
         <p:sp>
           <p:nvSpPr>
-            <p:cNvPr id="30" name="文本框 29">
+            <p:cNvPr id="43" name="矩形 42">
               <a:extLst>
                 <a:ext uri="{FF2B5EF4-FFF2-40B4-BE49-F238E27FC236}">
-                  <a16:creationId xmlns:a16="http://schemas.microsoft.com/office/drawing/2014/main" id="{B7EC2620-25FE-4D2D-378D-9027AA994C75}"/>
+                  <a16:creationId xmlns:a16="http://schemas.microsoft.com/office/drawing/2014/main" id="{D89081E1-3BF5-FBED-AD3C-F1238E54CB08}"/>
+                </a:ext>
+              </a:extLst>
+            </p:cNvPr>
+            <p:cNvSpPr/>
+            <p:nvPr/>
+          </p:nvSpPr>
+          <p:spPr>
+            <a:xfrm>
+              <a:off x="2174485" y="6405943"/>
+              <a:ext cx="7270593" cy="369331"/>
+            </a:xfrm>
+            <a:prstGeom prst="rect">
+              <a:avLst/>
+            </a:prstGeom>
+            <a:ln>
+              <a:solidFill>
+                <a:schemeClr val="tx1"/>
+              </a:solidFill>
+            </a:ln>
+          </p:spPr>
+          <p:style>
+            <a:lnRef idx="2">
+              <a:schemeClr val="accent6"/>
+            </a:lnRef>
+            <a:fillRef idx="1">
+              <a:schemeClr val="lt1"/>
+            </a:fillRef>
+            <a:effectRef idx="0">
+              <a:schemeClr val="accent6"/>
+            </a:effectRef>
+            <a:fontRef idx="minor">
+              <a:schemeClr val="dk1"/>
+            </a:fontRef>
+          </p:style>
+          <p:txBody>
+            <a:bodyPr rtlCol="0" anchor="ctr"/>
+            <a:lstStyle/>
+            <a:p>
+              <a:pPr algn="ctr"/>
+              <a:endParaRPr kumimoji="1" lang="zh-CN" altLang="en-US"/>
+            </a:p>
+          </p:txBody>
+        </p:sp>
+        <p:sp>
+          <p:nvSpPr>
+            <p:cNvPr id="44" name="文本框 43">
+              <a:extLst>
+                <a:ext uri="{FF2B5EF4-FFF2-40B4-BE49-F238E27FC236}">
+                  <a16:creationId xmlns:a16="http://schemas.microsoft.com/office/drawing/2014/main" id="{00050065-EBB5-8F6A-15B2-4D53745E16A3}"/>
                 </a:ext>
               </a:extLst>
             </p:cNvPr>
@@ -4524,8 +5068,8 @@
           </p:nvSpPr>
           <p:spPr>
             <a:xfrm>
-              <a:off x="6241201" y="3668295"/>
-              <a:ext cx="2701837" cy="1384995"/>
+              <a:off x="4660606" y="6435468"/>
+              <a:ext cx="5005180" cy="307777"/>
             </a:xfrm>
             <a:prstGeom prst="rect">
               <a:avLst/>
@@ -4540,214 +5084,1105 @@
             <a:p>
               <a:r>
                 <a:rPr kumimoji="1" lang="zh-CN" altLang="en-US" sz="1400" dirty="0"/>
-                <a:t>针对恢复子任务线性函数计算结果场景，提出基于嵌套线性编码和典型性译码联合的编码计算结果下行传输机制，并证明该方法比独立恢复进一步压缩了信源，从而提升传输效率</a:t>
+                <a:t>第六章</a:t>
+              </a:r>
+              <a:r>
+                <a:rPr kumimoji="1" lang="en-US" altLang="zh-CN" sz="1400" dirty="0"/>
+                <a:t>	</a:t>
+              </a:r>
+              <a:r>
+                <a:rPr kumimoji="1" lang="zh-CN" altLang="en-US" sz="1400" dirty="0"/>
+                <a:t>总结与展望</a:t>
               </a:r>
             </a:p>
           </p:txBody>
         </p:sp>
+        <p:sp>
+          <p:nvSpPr>
+            <p:cNvPr id="45" name="下箭头 44">
+              <a:extLst>
+                <a:ext uri="{FF2B5EF4-FFF2-40B4-BE49-F238E27FC236}">
+                  <a16:creationId xmlns:a16="http://schemas.microsoft.com/office/drawing/2014/main" id="{7EC38CC6-B210-7F1A-A529-DAE537F45385}"/>
+                </a:ext>
+              </a:extLst>
+            </p:cNvPr>
+            <p:cNvSpPr/>
+            <p:nvPr/>
+          </p:nvSpPr>
+          <p:spPr>
+            <a:xfrm>
+              <a:off x="5609752" y="6080311"/>
+              <a:ext cx="183531" cy="324948"/>
+            </a:xfrm>
+            <a:prstGeom prst="downArrow">
+              <a:avLst/>
+            </a:prstGeom>
+            <a:ln>
+              <a:solidFill>
+                <a:schemeClr val="tx1"/>
+              </a:solidFill>
+            </a:ln>
+          </p:spPr>
+          <p:style>
+            <a:lnRef idx="2">
+              <a:schemeClr val="accent6"/>
+            </a:lnRef>
+            <a:fillRef idx="1">
+              <a:schemeClr val="lt1"/>
+            </a:fillRef>
+            <a:effectRef idx="0">
+              <a:schemeClr val="accent6"/>
+            </a:effectRef>
+            <a:fontRef idx="minor">
+              <a:schemeClr val="dk1"/>
+            </a:fontRef>
+          </p:style>
+          <p:txBody>
+            <a:bodyPr rtlCol="0" anchor="ctr"/>
+            <a:lstStyle/>
+            <a:p>
+              <a:pPr algn="ctr"/>
+              <a:endParaRPr kumimoji="1" lang="zh-CN" altLang="en-US"/>
+            </a:p>
+          </p:txBody>
+        </p:sp>
       </p:grpSp>
-      <p:sp>
-        <p:nvSpPr>
-          <p:cNvPr id="31" name="下箭头 30">
-            <a:extLst>
-              <a:ext uri="{FF2B5EF4-FFF2-40B4-BE49-F238E27FC236}">
-                <a16:creationId xmlns:a16="http://schemas.microsoft.com/office/drawing/2014/main" id="{472C5B10-DAF1-ACF0-2D9D-3B396B989CC1}"/>
-              </a:ext>
-            </a:extLst>
-          </p:cNvPr>
-          <p:cNvSpPr/>
+    </p:spTree>
+    <p:extLst>
+      <p:ext uri="{BB962C8B-B14F-4D97-AF65-F5344CB8AC3E}">
+        <p14:creationId xmlns:p14="http://schemas.microsoft.com/office/powerpoint/2010/main" val="151063987"/>
+      </p:ext>
+    </p:extLst>
+  </p:cSld>
+  <p:clrMapOvr>
+    <a:masterClrMapping/>
+  </p:clrMapOvr>
+</p:sld>
+</file>
+
+<file path=ppt/slides/slide2.xml><?xml version="1.0" encoding="utf-8"?>
+<p:sld xmlns:a="http://schemas.openxmlformats.org/drawingml/2006/main" xmlns:r="http://schemas.openxmlformats.org/officeDocument/2006/relationships" xmlns:p="http://schemas.openxmlformats.org/presentationml/2006/main">
+  <p:cSld>
+    <p:spTree>
+      <p:nvGrpSpPr>
+        <p:cNvPr id="1" name=""/>
+        <p:cNvGrpSpPr/>
+        <p:nvPr/>
+      </p:nvGrpSpPr>
+      <p:grpSpPr>
+        <a:xfrm>
+          <a:off x="0" y="0"/>
+          <a:ext cx="0" cy="0"/>
+          <a:chOff x="0" y="0"/>
+          <a:chExt cx="0" cy="0"/>
+        </a:xfrm>
+      </p:grpSpPr>
+      <p:pic>
+        <p:nvPicPr>
+          <p:cNvPr id="7" name="图片 6" descr="图标&#10;&#10;AI 生成的内容可能不正确。">
+            <a:extLst>
+              <a:ext uri="{FF2B5EF4-FFF2-40B4-BE49-F238E27FC236}">
+                <a16:creationId xmlns:a16="http://schemas.microsoft.com/office/drawing/2014/main" id="{87096A42-779A-8298-06A6-B8E6E0ECA63F}"/>
+              </a:ext>
+            </a:extLst>
+          </p:cNvPr>
+          <p:cNvPicPr>
+            <a:picLocks noChangeAspect="1"/>
+          </p:cNvPicPr>
           <p:nvPr/>
-        </p:nvSpPr>
+        </p:nvPicPr>
+        <p:blipFill>
+          <a:blip r:embed="rId2"/>
+          <a:stretch>
+            <a:fillRect/>
+          </a:stretch>
+        </p:blipFill>
         <p:spPr>
           <a:xfrm>
-            <a:off x="3867150" y="1328496"/>
-            <a:ext cx="157978" cy="205806"/>
+            <a:off x="3053645" y="1823154"/>
+            <a:ext cx="970845" cy="970845"/>
           </a:xfrm>
-          <a:prstGeom prst="downArrow">
+          <a:prstGeom prst="rect">
+            <a:avLst/>
+          </a:prstGeom>
+        </p:spPr>
+      </p:pic>
+      <p:pic>
+        <p:nvPicPr>
+          <p:cNvPr id="8" name="图片 7" descr="图标&#10;&#10;AI 生成的内容可能不正确。">
+            <a:extLst>
+              <a:ext uri="{FF2B5EF4-FFF2-40B4-BE49-F238E27FC236}">
+                <a16:creationId xmlns:a16="http://schemas.microsoft.com/office/drawing/2014/main" id="{BDDDF511-E732-113B-10A0-EF98803C1E85}"/>
+              </a:ext>
+            </a:extLst>
+          </p:cNvPr>
+          <p:cNvPicPr>
+            <a:picLocks noChangeAspect="1"/>
+          </p:cNvPicPr>
+          <p:nvPr/>
+        </p:nvPicPr>
+        <p:blipFill>
+          <a:blip r:embed="rId2"/>
+          <a:stretch>
+            <a:fillRect/>
+          </a:stretch>
+        </p:blipFill>
+        <p:spPr>
+          <a:xfrm>
+            <a:off x="4642556" y="1337732"/>
+            <a:ext cx="970845" cy="970845"/>
+          </a:xfrm>
+          <a:prstGeom prst="rect">
+            <a:avLst/>
+          </a:prstGeom>
+        </p:spPr>
+      </p:pic>
+      <p:pic>
+        <p:nvPicPr>
+          <p:cNvPr id="9" name="图片 8" descr="图标&#10;&#10;AI 生成的内容可能不正确。">
+            <a:extLst>
+              <a:ext uri="{FF2B5EF4-FFF2-40B4-BE49-F238E27FC236}">
+                <a16:creationId xmlns:a16="http://schemas.microsoft.com/office/drawing/2014/main" id="{6627A8A3-8E30-D543-F04A-0DE02A6E4FE7}"/>
+              </a:ext>
+            </a:extLst>
+          </p:cNvPr>
+          <p:cNvPicPr>
+            <a:picLocks noChangeAspect="1"/>
+          </p:cNvPicPr>
+          <p:nvPr/>
+        </p:nvPicPr>
+        <p:blipFill>
+          <a:blip r:embed="rId2"/>
+          <a:stretch>
+            <a:fillRect/>
+          </a:stretch>
+        </p:blipFill>
+        <p:spPr>
+          <a:xfrm>
+            <a:off x="6364111" y="1337732"/>
+            <a:ext cx="970845" cy="970845"/>
+          </a:xfrm>
+          <a:prstGeom prst="rect">
+            <a:avLst/>
+          </a:prstGeom>
+        </p:spPr>
+      </p:pic>
+      <p:pic>
+        <p:nvPicPr>
+          <p:cNvPr id="10" name="图片 9" descr="图标&#10;&#10;AI 生成的内容可能不正确。">
+            <a:extLst>
+              <a:ext uri="{FF2B5EF4-FFF2-40B4-BE49-F238E27FC236}">
+                <a16:creationId xmlns:a16="http://schemas.microsoft.com/office/drawing/2014/main" id="{8005A4DC-A2AC-C42B-B61E-70A5FECDED9E}"/>
+              </a:ext>
+            </a:extLst>
+          </p:cNvPr>
+          <p:cNvPicPr>
+            <a:picLocks noChangeAspect="1"/>
+          </p:cNvPicPr>
+          <p:nvPr/>
+        </p:nvPicPr>
+        <p:blipFill>
+          <a:blip r:embed="rId2"/>
+          <a:stretch>
+            <a:fillRect/>
+          </a:stretch>
+        </p:blipFill>
+        <p:spPr>
+          <a:xfrm>
+            <a:off x="7840133" y="1823154"/>
+            <a:ext cx="970845" cy="970845"/>
+          </a:xfrm>
+          <a:prstGeom prst="rect">
+            <a:avLst/>
+          </a:prstGeom>
+        </p:spPr>
+      </p:pic>
+      <p:pic>
+        <p:nvPicPr>
+          <p:cNvPr id="12" name="图片 11" descr="图标&#10;&#10;AI 生成的内容可能不正确。">
+            <a:extLst>
+              <a:ext uri="{FF2B5EF4-FFF2-40B4-BE49-F238E27FC236}">
+                <a16:creationId xmlns:a16="http://schemas.microsoft.com/office/drawing/2014/main" id="{E67CCEC3-71E0-11ED-C98A-644C71C458D6}"/>
+              </a:ext>
+            </a:extLst>
+          </p:cNvPr>
+          <p:cNvPicPr>
+            <a:picLocks noChangeAspect="1"/>
+          </p:cNvPicPr>
+          <p:nvPr/>
+        </p:nvPicPr>
+        <p:blipFill>
+          <a:blip r:embed="rId3"/>
+          <a:stretch>
+            <a:fillRect/>
+          </a:stretch>
+        </p:blipFill>
+        <p:spPr>
+          <a:xfrm>
+            <a:off x="6364111" y="4699002"/>
+            <a:ext cx="572911" cy="572911"/>
+          </a:xfrm>
+          <a:prstGeom prst="rect">
+            <a:avLst/>
+          </a:prstGeom>
+        </p:spPr>
+      </p:pic>
+      <p:pic>
+        <p:nvPicPr>
+          <p:cNvPr id="14" name="图片 13" descr="图标&#10;&#10;AI 生成的内容可能不正确。">
+            <a:extLst>
+              <a:ext uri="{FF2B5EF4-FFF2-40B4-BE49-F238E27FC236}">
+                <a16:creationId xmlns:a16="http://schemas.microsoft.com/office/drawing/2014/main" id="{5FBFEE40-1DFB-85F1-D0BB-2913B9243AD1}"/>
+              </a:ext>
+            </a:extLst>
+          </p:cNvPr>
+          <p:cNvPicPr>
+            <a:picLocks noChangeAspect="1"/>
+          </p:cNvPicPr>
+          <p:nvPr/>
+        </p:nvPicPr>
+        <p:blipFill>
+          <a:blip r:embed="rId4"/>
+          <a:stretch>
+            <a:fillRect/>
+          </a:stretch>
+        </p:blipFill>
+        <p:spPr>
+          <a:xfrm>
+            <a:off x="5192890" y="4064002"/>
+            <a:ext cx="1270000" cy="1270000"/>
+          </a:xfrm>
+          <a:prstGeom prst="rect">
+            <a:avLst/>
+          </a:prstGeom>
+        </p:spPr>
+      </p:pic>
+      <p:cxnSp>
+        <p:nvCxnSpPr>
+          <p:cNvPr id="16" name="直线箭头连接符 15">
+            <a:extLst>
+              <a:ext uri="{FF2B5EF4-FFF2-40B4-BE49-F238E27FC236}">
+                <a16:creationId xmlns:a16="http://schemas.microsoft.com/office/drawing/2014/main" id="{2E64A39F-3740-A0AD-AEEA-9AD7FD26B8D9}"/>
+              </a:ext>
+            </a:extLst>
+          </p:cNvPr>
+          <p:cNvCxnSpPr>
+            <a:cxnSpLocks/>
+          </p:cNvCxnSpPr>
+          <p:nvPr/>
+        </p:nvCxnSpPr>
+        <p:spPr>
+          <a:xfrm>
+            <a:off x="3894667" y="2793998"/>
+            <a:ext cx="1718734" cy="1270004"/>
+          </a:xfrm>
+          <a:prstGeom prst="straightConnector1">
             <a:avLst/>
           </a:prstGeom>
           <a:ln>
-            <a:solidFill>
-              <a:schemeClr val="tx1"/>
-            </a:solidFill>
+            <a:tailEnd type="triangle"/>
           </a:ln>
         </p:spPr>
         <p:style>
           <a:lnRef idx="2">
-            <a:schemeClr val="accent6"/>
+            <a:schemeClr val="dk1"/>
           </a:lnRef>
-          <a:fillRef idx="1">
-            <a:schemeClr val="lt1"/>
+          <a:fillRef idx="0">
+            <a:schemeClr val="dk1"/>
           </a:fillRef>
-          <a:effectRef idx="0">
-            <a:schemeClr val="accent6"/>
+          <a:effectRef idx="1">
+            <a:schemeClr val="dk1"/>
           </a:effectRef>
           <a:fontRef idx="minor">
-            <a:schemeClr val="dk1"/>
+            <a:schemeClr val="tx1"/>
           </a:fontRef>
         </p:style>
-        <p:txBody>
-          <a:bodyPr rtlCol="0" anchor="ctr"/>
-          <a:lstStyle/>
-          <a:p>
-            <a:pPr algn="ctr"/>
-            <a:endParaRPr kumimoji="1" lang="zh-CN" altLang="en-US"/>
-          </a:p>
-        </p:txBody>
-      </p:sp>
-      <p:sp>
-        <p:nvSpPr>
-          <p:cNvPr id="32" name="下箭头 31">
-            <a:extLst>
-              <a:ext uri="{FF2B5EF4-FFF2-40B4-BE49-F238E27FC236}">
-                <a16:creationId xmlns:a16="http://schemas.microsoft.com/office/drawing/2014/main" id="{B4C29DC9-2279-888B-C996-08EFDCDFEB28}"/>
-              </a:ext>
-            </a:extLst>
-          </p:cNvPr>
-          <p:cNvSpPr/>
+      </p:cxnSp>
+      <p:cxnSp>
+        <p:nvCxnSpPr>
+          <p:cNvPr id="18" name="直线箭头连接符 17">
+            <a:extLst>
+              <a:ext uri="{FF2B5EF4-FFF2-40B4-BE49-F238E27FC236}">
+                <a16:creationId xmlns:a16="http://schemas.microsoft.com/office/drawing/2014/main" id="{91A919C5-C434-9CF5-604F-FDE9CD6FF929}"/>
+              </a:ext>
+            </a:extLst>
+          </p:cNvPr>
+          <p:cNvCxnSpPr>
+            <a:cxnSpLocks/>
+          </p:cNvCxnSpPr>
           <p:nvPr/>
-        </p:nvSpPr>
+        </p:nvCxnSpPr>
         <p:spPr>
-          <a:xfrm>
-            <a:off x="7217618" y="1333781"/>
-            <a:ext cx="157978" cy="205806"/>
+          <a:xfrm flipH="1">
+            <a:off x="5994400" y="2383365"/>
+            <a:ext cx="584201" cy="1618548"/>
           </a:xfrm>
-          <a:prstGeom prst="downArrow">
+          <a:prstGeom prst="straightConnector1">
             <a:avLst/>
           </a:prstGeom>
           <a:ln>
-            <a:solidFill>
-              <a:schemeClr val="tx1"/>
-            </a:solidFill>
+            <a:tailEnd type="triangle"/>
           </a:ln>
         </p:spPr>
         <p:style>
           <a:lnRef idx="2">
-            <a:schemeClr val="accent6"/>
+            <a:schemeClr val="dk1"/>
           </a:lnRef>
-          <a:fillRef idx="1">
-            <a:schemeClr val="lt1"/>
+          <a:fillRef idx="0">
+            <a:schemeClr val="dk1"/>
           </a:fillRef>
-          <a:effectRef idx="0">
-            <a:schemeClr val="accent6"/>
+          <a:effectRef idx="1">
+            <a:schemeClr val="dk1"/>
           </a:effectRef>
           <a:fontRef idx="minor">
-            <a:schemeClr val="dk1"/>
+            <a:schemeClr val="tx1"/>
           </a:fontRef>
         </p:style>
-        <p:txBody>
-          <a:bodyPr rtlCol="0" anchor="ctr"/>
-          <a:lstStyle/>
-          <a:p>
-            <a:pPr algn="ctr"/>
-            <a:endParaRPr kumimoji="1" lang="zh-CN" altLang="en-US"/>
-          </a:p>
-        </p:txBody>
-      </p:sp>
-      <p:sp>
-        <p:nvSpPr>
-          <p:cNvPr id="33" name="下箭头 32">
-            <a:extLst>
-              <a:ext uri="{FF2B5EF4-FFF2-40B4-BE49-F238E27FC236}">
-                <a16:creationId xmlns:a16="http://schemas.microsoft.com/office/drawing/2014/main" id="{CFD6C499-89EE-5ACF-E2F3-9C1376EEB77E}"/>
-              </a:ext>
-            </a:extLst>
-          </p:cNvPr>
-          <p:cNvSpPr/>
+      </p:cxnSp>
+      <p:cxnSp>
+        <p:nvCxnSpPr>
+          <p:cNvPr id="25" name="直线箭头连接符 24">
+            <a:extLst>
+              <a:ext uri="{FF2B5EF4-FFF2-40B4-BE49-F238E27FC236}">
+                <a16:creationId xmlns:a16="http://schemas.microsoft.com/office/drawing/2014/main" id="{A93A6F5F-D361-02ED-E044-A6B51E9CA002}"/>
+              </a:ext>
+            </a:extLst>
+          </p:cNvPr>
+          <p:cNvCxnSpPr>
+            <a:cxnSpLocks/>
+            <a:endCxn id="14" idx="0"/>
+          </p:cNvCxnSpPr>
           <p:nvPr/>
-        </p:nvSpPr>
+        </p:nvCxnSpPr>
         <p:spPr>
           <a:xfrm>
-            <a:off x="5727076" y="2642452"/>
-            <a:ext cx="157978" cy="205806"/>
+            <a:off x="5192890" y="2447778"/>
+            <a:ext cx="635000" cy="1616224"/>
           </a:xfrm>
-          <a:prstGeom prst="downArrow">
+          <a:prstGeom prst="straightConnector1">
             <a:avLst/>
           </a:prstGeom>
           <a:ln>
-            <a:solidFill>
-              <a:schemeClr val="tx1"/>
-            </a:solidFill>
+            <a:tailEnd type="triangle"/>
           </a:ln>
         </p:spPr>
         <p:style>
           <a:lnRef idx="2">
-            <a:schemeClr val="accent6"/>
+            <a:schemeClr val="dk1"/>
           </a:lnRef>
-          <a:fillRef idx="1">
-            <a:schemeClr val="lt1"/>
+          <a:fillRef idx="0">
+            <a:schemeClr val="dk1"/>
           </a:fillRef>
-          <a:effectRef idx="0">
-            <a:schemeClr val="accent6"/>
+          <a:effectRef idx="1">
+            <a:schemeClr val="dk1"/>
           </a:effectRef>
           <a:fontRef idx="minor">
-            <a:schemeClr val="dk1"/>
+            <a:schemeClr val="tx1"/>
           </a:fontRef>
         </p:style>
-        <p:txBody>
-          <a:bodyPr rtlCol="0" anchor="ctr"/>
-          <a:lstStyle/>
-          <a:p>
-            <a:pPr algn="ctr"/>
-            <a:endParaRPr kumimoji="1" lang="zh-CN" altLang="en-US"/>
-          </a:p>
-        </p:txBody>
-      </p:sp>
-      <p:sp>
-        <p:nvSpPr>
-          <p:cNvPr id="34" name="右箭头 33">
-            <a:extLst>
-              <a:ext uri="{FF2B5EF4-FFF2-40B4-BE49-F238E27FC236}">
-                <a16:creationId xmlns:a16="http://schemas.microsoft.com/office/drawing/2014/main" id="{140B7E63-5D25-4148-94D4-09C9DB399554}"/>
-              </a:ext>
-            </a:extLst>
-          </p:cNvPr>
-          <p:cNvSpPr/>
+      </p:cxnSp>
+      <p:cxnSp>
+        <p:nvCxnSpPr>
+          <p:cNvPr id="27" name="直线箭头连接符 26">
+            <a:extLst>
+              <a:ext uri="{FF2B5EF4-FFF2-40B4-BE49-F238E27FC236}">
+                <a16:creationId xmlns:a16="http://schemas.microsoft.com/office/drawing/2014/main" id="{76D85DA4-4E49-9682-1D9B-220593052047}"/>
+              </a:ext>
+            </a:extLst>
+          </p:cNvPr>
+          <p:cNvCxnSpPr/>
           <p:nvPr/>
-        </p:nvSpPr>
+        </p:nvCxnSpPr>
         <p:spPr>
-          <a:xfrm>
-            <a:off x="5291710" y="4078931"/>
-            <a:ext cx="897210" cy="168319"/>
+          <a:xfrm flipH="1">
+            <a:off x="6096000" y="2940148"/>
+            <a:ext cx="2229555" cy="1123854"/>
           </a:xfrm>
-          <a:prstGeom prst="rightArrow">
+          <a:prstGeom prst="straightConnector1">
             <a:avLst/>
           </a:prstGeom>
           <a:ln>
-            <a:solidFill>
-              <a:schemeClr val="tx1"/>
-            </a:solidFill>
+            <a:tailEnd type="triangle"/>
           </a:ln>
         </p:spPr>
         <p:style>
           <a:lnRef idx="2">
-            <a:schemeClr val="accent6"/>
+            <a:schemeClr val="dk1"/>
           </a:lnRef>
-          <a:fillRef idx="1">
-            <a:schemeClr val="lt1"/>
+          <a:fillRef idx="0">
+            <a:schemeClr val="dk1"/>
           </a:fillRef>
-          <a:effectRef idx="0">
-            <a:schemeClr val="accent6"/>
+          <a:effectRef idx="1">
+            <a:schemeClr val="dk1"/>
           </a:effectRef>
           <a:fontRef idx="minor">
-            <a:schemeClr val="dk1"/>
+            <a:schemeClr val="tx1"/>
           </a:fontRef>
         </p:style>
-        <p:txBody>
-          <a:bodyPr rtlCol="0" anchor="ctr"/>
-          <a:lstStyle/>
-          <a:p>
-            <a:pPr algn="ctr"/>
-            <a:endParaRPr kumimoji="1" lang="zh-CN" altLang="en-US"/>
-          </a:p>
-        </p:txBody>
-      </p:sp>
+      </p:cxnSp>
+      <mc:AlternateContent xmlns:mc="http://schemas.openxmlformats.org/markup-compatibility/2006">
+        <mc:Choice xmlns:a14="http://schemas.microsoft.com/office/drawing/2010/main" Requires="a14">
+          <p:sp>
+            <p:nvSpPr>
+              <p:cNvPr id="31" name="文本框 30">
+                <a:extLst>
+                  <a:ext uri="{FF2B5EF4-FFF2-40B4-BE49-F238E27FC236}">
+                    <a16:creationId xmlns:a16="http://schemas.microsoft.com/office/drawing/2014/main" id="{A2CCC389-1E44-EAA8-7DB6-ED552E693DB5}"/>
+                  </a:ext>
+                </a:extLst>
+              </p:cNvPr>
+              <p:cNvSpPr txBox="1"/>
+              <p:nvPr/>
+            </p:nvSpPr>
+            <p:spPr>
+              <a:xfrm>
+                <a:off x="8046326" y="4737677"/>
+                <a:ext cx="1693812" cy="609462"/>
+              </a:xfrm>
+              <a:prstGeom prst="rect">
+                <a:avLst/>
+              </a:prstGeom>
+              <a:noFill/>
+            </p:spPr>
+            <p:txBody>
+              <a:bodyPr wrap="square" lIns="0" tIns="0" rIns="0" bIns="0" rtlCol="0">
+                <a:spAutoFit/>
+              </a:bodyPr>
+              <a:lstStyle/>
+              <a:p>
+                <a14:m>
+                  <m:oMathPara xmlns:m="http://schemas.openxmlformats.org/officeDocument/2006/math">
+                    <m:oMathParaPr>
+                      <m:jc m:val="centerGroup"/>
+                    </m:oMathParaPr>
+                    <m:oMath xmlns:m="http://schemas.openxmlformats.org/officeDocument/2006/math">
+                      <m:r>
+                        <m:rPr>
+                          <m:lit/>
+                        </m:rPr>
+                        <a:rPr kumimoji="1" lang="en-US" altLang="zh-CN" b="0" i="1" smtClean="0">
+                          <a:latin typeface="Cambria Math" panose="02040503050406030204" pitchFamily="18" charset="0"/>
+                        </a:rPr>
+                        <m:t>{</m:t>
+                      </m:r>
+                      <m:sSubSup>
+                        <m:sSubSupPr>
+                          <m:ctrlPr>
+                            <a:rPr kumimoji="1" lang="en-US" altLang="zh-CN" b="0" i="1" smtClean="0">
+                              <a:latin typeface="Cambria Math" panose="02040503050406030204" pitchFamily="18" charset="0"/>
+                            </a:rPr>
+                          </m:ctrlPr>
+                        </m:sSubSupPr>
+                        <m:e>
+                          <m:sSub>
+                            <m:sSubPr>
+                              <m:ctrlPr>
+                                <a:rPr kumimoji="1" lang="en-US" altLang="zh-CN" b="0" i="1" smtClean="0">
+                                  <a:latin typeface="Cambria Math" panose="02040503050406030204" pitchFamily="18" charset="0"/>
+                                </a:rPr>
+                              </m:ctrlPr>
+                            </m:sSubPr>
+                            <m:e>
+                              <m:r>
+                                <a:rPr kumimoji="1" lang="en-US" altLang="zh-CN" b="0" i="1" smtClean="0">
+                                  <a:latin typeface="Cambria Math" panose="02040503050406030204" pitchFamily="18" charset="0"/>
+                                </a:rPr>
+                                <m:t>𝑋</m:t>
+                              </m:r>
+                            </m:e>
+                            <m:sub>
+                              <m:r>
+                                <a:rPr kumimoji="1" lang="en-US" altLang="zh-CN" b="0" i="1" smtClean="0">
+                                  <a:latin typeface="Cambria Math" panose="02040503050406030204" pitchFamily="18" charset="0"/>
+                                </a:rPr>
+                                <m:t>𝑖</m:t>
+                              </m:r>
+                            </m:sub>
+                          </m:sSub>
+                          <m:r>
+                            <m:rPr>
+                              <m:lit/>
+                            </m:rPr>
+                            <a:rPr kumimoji="1" lang="en-US" altLang="zh-CN" b="0" i="1" smtClean="0">
+                              <a:latin typeface="Cambria Math" panose="02040503050406030204" pitchFamily="18" charset="0"/>
+                            </a:rPr>
+                            <m:t>}</m:t>
+                          </m:r>
+                        </m:e>
+                        <m:sub>
+                          <m:d>
+                            <m:dPr>
+                              <m:begChr m:val="{"/>
+                              <m:endChr m:val="}"/>
+                              <m:ctrlPr>
+                                <a:rPr kumimoji="1" lang="en-US" altLang="zh-CN" b="0" i="1" smtClean="0">
+                                  <a:latin typeface="Cambria Math" panose="02040503050406030204" pitchFamily="18" charset="0"/>
+                                </a:rPr>
+                              </m:ctrlPr>
+                            </m:dPr>
+                            <m:e>
+                              <m:r>
+                                <a:rPr kumimoji="1" lang="en-US" altLang="zh-CN" b="0" i="1" smtClean="0">
+                                  <a:latin typeface="Cambria Math" panose="02040503050406030204" pitchFamily="18" charset="0"/>
+                                </a:rPr>
+                                <m:t>𝑖</m:t>
+                              </m:r>
+                              <m:r>
+                                <a:rPr kumimoji="1" lang="en-US" altLang="zh-CN" b="0" i="1" smtClean="0">
+                                  <a:latin typeface="Cambria Math" panose="02040503050406030204" pitchFamily="18" charset="0"/>
+                                </a:rPr>
+                                <m:t>=1</m:t>
+                              </m:r>
+                            </m:e>
+                          </m:d>
+                        </m:sub>
+                        <m:sup>
+                          <m:r>
+                            <a:rPr kumimoji="1" lang="en-US" altLang="zh-CN" b="0" i="1" smtClean="0">
+                              <a:latin typeface="Cambria Math" panose="02040503050406030204" pitchFamily="18" charset="0"/>
+                            </a:rPr>
+                            <m:t>3</m:t>
+                          </m:r>
+                        </m:sup>
+                      </m:sSubSup>
+                    </m:oMath>
+                  </m:oMathPara>
+                </a14:m>
+                <a:endParaRPr kumimoji="1" lang="en-US" altLang="zh-CN" b="0" dirty="0"/>
+              </a:p>
+              <a:p>
+                <a:endParaRPr kumimoji="1" lang="zh-CN" altLang="en-US" dirty="0"/>
+              </a:p>
+            </p:txBody>
+          </p:sp>
+        </mc:Choice>
+        <mc:Fallback>
+          <p:sp>
+            <p:nvSpPr>
+              <p:cNvPr id="31" name="文本框 30">
+                <a:extLst>
+                  <a:ext uri="{FF2B5EF4-FFF2-40B4-BE49-F238E27FC236}">
+                    <a16:creationId xmlns:a16="http://schemas.microsoft.com/office/drawing/2014/main" id="{A2CCC389-1E44-EAA8-7DB6-ED552E693DB5}"/>
+                  </a:ext>
+                </a:extLst>
+              </p:cNvPr>
+              <p:cNvSpPr txBox="1">
+                <a:spLocks noRot="1" noChangeAspect="1" noMove="1" noResize="1" noEditPoints="1" noAdjustHandles="1" noChangeArrowheads="1" noChangeShapeType="1" noTextEdit="1"/>
+              </p:cNvSpPr>
+              <p:nvPr/>
+            </p:nvSpPr>
+            <p:spPr>
+              <a:xfrm>
+                <a:off x="8046326" y="4737677"/>
+                <a:ext cx="1693812" cy="609462"/>
+              </a:xfrm>
+              <a:prstGeom prst="rect">
+                <a:avLst/>
+              </a:prstGeom>
+              <a:blipFill>
+                <a:blip r:embed="rId5"/>
+                <a:stretch>
+                  <a:fillRect/>
+                </a:stretch>
+              </a:blipFill>
+            </p:spPr>
+            <p:txBody>
+              <a:bodyPr/>
+              <a:lstStyle/>
+              <a:p>
+                <a:r>
+                  <a:rPr lang="zh-CN" altLang="en-US">
+                    <a:noFill/>
+                  </a:rPr>
+                  <a:t> </a:t>
+                </a:r>
+              </a:p>
+            </p:txBody>
+          </p:sp>
+        </mc:Fallback>
+      </mc:AlternateContent>
+      <mc:AlternateContent xmlns:mc="http://schemas.openxmlformats.org/markup-compatibility/2006">
+        <mc:Choice xmlns:a14="http://schemas.microsoft.com/office/drawing/2010/main" Requires="a14">
+          <p:sp>
+            <p:nvSpPr>
+              <p:cNvPr id="32" name="文本框 31">
+                <a:extLst>
+                  <a:ext uri="{FF2B5EF4-FFF2-40B4-BE49-F238E27FC236}">
+                    <a16:creationId xmlns:a16="http://schemas.microsoft.com/office/drawing/2014/main" id="{7D021E2A-D8C3-606D-2162-F05E007CD474}"/>
+                  </a:ext>
+                </a:extLst>
+              </p:cNvPr>
+              <p:cNvSpPr txBox="1"/>
+              <p:nvPr/>
+            </p:nvSpPr>
+            <p:spPr>
+              <a:xfrm>
+                <a:off x="3340837" y="1269156"/>
+                <a:ext cx="665247" cy="553998"/>
+              </a:xfrm>
+              <a:prstGeom prst="rect">
+                <a:avLst/>
+              </a:prstGeom>
+              <a:noFill/>
+            </p:spPr>
+            <p:txBody>
+              <a:bodyPr wrap="none" lIns="0" tIns="0" rIns="0" bIns="0" rtlCol="0">
+                <a:spAutoFit/>
+              </a:bodyPr>
+              <a:lstStyle/>
+              <a:p>
+                <a:r>
+                  <a:rPr kumimoji="1" lang="zh-CN" altLang="en-US" b="0" dirty="0">
+                    <a:latin typeface="SimSun" panose="02010600030101010101" pitchFamily="2" charset="-122"/>
+                    <a:ea typeface="SimSun" panose="02010600030101010101" pitchFamily="2" charset="-122"/>
+                  </a:rPr>
+                  <a:t>计算</a:t>
+                </a:r>
+                <a14:m>
+                  <m:oMath xmlns:m="http://schemas.openxmlformats.org/officeDocument/2006/math">
+                    <m:sSub>
+                      <m:sSubPr>
+                        <m:ctrlPr>
+                          <a:rPr kumimoji="1" lang="en-US" altLang="zh-CN" b="0" i="1" smtClean="0">
+                            <a:latin typeface="Cambria Math" panose="02040503050406030204" pitchFamily="18" charset="0"/>
+                          </a:rPr>
+                        </m:ctrlPr>
+                      </m:sSubPr>
+                      <m:e>
+                        <m:r>
+                          <a:rPr kumimoji="1" lang="en-US" altLang="zh-CN" b="0" i="1" smtClean="0">
+                            <a:latin typeface="Cambria Math" panose="02040503050406030204" pitchFamily="18" charset="0"/>
+                          </a:rPr>
+                          <m:t>𝑌</m:t>
+                        </m:r>
+                      </m:e>
+                      <m:sub>
+                        <m:r>
+                          <a:rPr kumimoji="1" lang="en-US" altLang="zh-CN" b="0" i="1" smtClean="0">
+                            <a:latin typeface="Cambria Math" panose="02040503050406030204" pitchFamily="18" charset="0"/>
+                          </a:rPr>
+                          <m:t>1</m:t>
+                        </m:r>
+                      </m:sub>
+                    </m:sSub>
+                  </m:oMath>
+                </a14:m>
+                <a:endParaRPr kumimoji="1" lang="en-US" altLang="zh-CN" b="0" dirty="0"/>
+              </a:p>
+              <a:p>
+                <a:endParaRPr kumimoji="1" lang="zh-CN" altLang="en-US" dirty="0"/>
+              </a:p>
+            </p:txBody>
+          </p:sp>
+        </mc:Choice>
+        <mc:Fallback>
+          <p:sp>
+            <p:nvSpPr>
+              <p:cNvPr id="32" name="文本框 31">
+                <a:extLst>
+                  <a:ext uri="{FF2B5EF4-FFF2-40B4-BE49-F238E27FC236}">
+                    <a16:creationId xmlns:a16="http://schemas.microsoft.com/office/drawing/2014/main" id="{7D021E2A-D8C3-606D-2162-F05E007CD474}"/>
+                  </a:ext>
+                </a:extLst>
+              </p:cNvPr>
+              <p:cNvSpPr txBox="1">
+                <a:spLocks noRot="1" noChangeAspect="1" noMove="1" noResize="1" noEditPoints="1" noAdjustHandles="1" noChangeArrowheads="1" noChangeShapeType="1" noTextEdit="1"/>
+              </p:cNvSpPr>
+              <p:nvPr/>
+            </p:nvSpPr>
+            <p:spPr>
+              <a:xfrm>
+                <a:off x="3340837" y="1269156"/>
+                <a:ext cx="665247" cy="553998"/>
+              </a:xfrm>
+              <a:prstGeom prst="rect">
+                <a:avLst/>
+              </a:prstGeom>
+              <a:blipFill>
+                <a:blip r:embed="rId6"/>
+                <a:stretch>
+                  <a:fillRect l="-20755" t="-15556" r="-5660"/>
+                </a:stretch>
+              </a:blipFill>
+            </p:spPr>
+            <p:txBody>
+              <a:bodyPr/>
+              <a:lstStyle/>
+              <a:p>
+                <a:r>
+                  <a:rPr lang="zh-CN" altLang="en-US">
+                    <a:noFill/>
+                  </a:rPr>
+                  <a:t> </a:t>
+                </a:r>
+              </a:p>
+            </p:txBody>
+          </p:sp>
+        </mc:Fallback>
+      </mc:AlternateContent>
+      <mc:AlternateContent xmlns:mc="http://schemas.openxmlformats.org/markup-compatibility/2006">
+        <mc:Choice xmlns:a14="http://schemas.microsoft.com/office/drawing/2010/main" Requires="a14">
+          <p:sp>
+            <p:nvSpPr>
+              <p:cNvPr id="33" name="文本框 32">
+                <a:extLst>
+                  <a:ext uri="{FF2B5EF4-FFF2-40B4-BE49-F238E27FC236}">
+                    <a16:creationId xmlns:a16="http://schemas.microsoft.com/office/drawing/2014/main" id="{53AE6C3E-CF1B-CDE7-29FC-D9ADD6D266A4}"/>
+                  </a:ext>
+                </a:extLst>
+              </p:cNvPr>
+              <p:cNvSpPr txBox="1"/>
+              <p:nvPr/>
+            </p:nvSpPr>
+            <p:spPr>
+              <a:xfrm>
+                <a:off x="4754034" y="915206"/>
+                <a:ext cx="670568" cy="553998"/>
+              </a:xfrm>
+              <a:prstGeom prst="rect">
+                <a:avLst/>
+              </a:prstGeom>
+              <a:noFill/>
+            </p:spPr>
+            <p:txBody>
+              <a:bodyPr wrap="none" lIns="0" tIns="0" rIns="0" bIns="0" rtlCol="0">
+                <a:spAutoFit/>
+              </a:bodyPr>
+              <a:lstStyle/>
+              <a:p>
+                <a:r>
+                  <a:rPr kumimoji="1" lang="zh-CN" altLang="en-US" b="0" dirty="0">
+                    <a:latin typeface="SimSun" panose="02010600030101010101" pitchFamily="2" charset="-122"/>
+                    <a:ea typeface="SimSun" panose="02010600030101010101" pitchFamily="2" charset="-122"/>
+                  </a:rPr>
+                  <a:t>计算</a:t>
+                </a:r>
+                <a14:m>
+                  <m:oMath xmlns:m="http://schemas.openxmlformats.org/officeDocument/2006/math">
+                    <m:sSub>
+                      <m:sSubPr>
+                        <m:ctrlPr>
+                          <a:rPr kumimoji="1" lang="en-US" altLang="zh-CN" b="0" i="1" smtClean="0">
+                            <a:latin typeface="Cambria Math" panose="02040503050406030204" pitchFamily="18" charset="0"/>
+                          </a:rPr>
+                        </m:ctrlPr>
+                      </m:sSubPr>
+                      <m:e>
+                        <m:r>
+                          <a:rPr kumimoji="1" lang="en-US" altLang="zh-CN" b="0" i="1" smtClean="0">
+                            <a:latin typeface="Cambria Math" panose="02040503050406030204" pitchFamily="18" charset="0"/>
+                          </a:rPr>
+                          <m:t>𝑌</m:t>
+                        </m:r>
+                      </m:e>
+                      <m:sub>
+                        <m:r>
+                          <a:rPr kumimoji="1" lang="en-US" altLang="zh-CN" b="0" i="1" smtClean="0">
+                            <a:latin typeface="Cambria Math" panose="02040503050406030204" pitchFamily="18" charset="0"/>
+                          </a:rPr>
+                          <m:t>2</m:t>
+                        </m:r>
+                      </m:sub>
+                    </m:sSub>
+                  </m:oMath>
+                </a14:m>
+                <a:endParaRPr kumimoji="1" lang="en-US" altLang="zh-CN" b="0" dirty="0"/>
+              </a:p>
+              <a:p>
+                <a:endParaRPr kumimoji="1" lang="zh-CN" altLang="en-US" dirty="0"/>
+              </a:p>
+            </p:txBody>
+          </p:sp>
+        </mc:Choice>
+        <mc:Fallback>
+          <p:sp>
+            <p:nvSpPr>
+              <p:cNvPr id="33" name="文本框 32">
+                <a:extLst>
+                  <a:ext uri="{FF2B5EF4-FFF2-40B4-BE49-F238E27FC236}">
+                    <a16:creationId xmlns:a16="http://schemas.microsoft.com/office/drawing/2014/main" id="{53AE6C3E-CF1B-CDE7-29FC-D9ADD6D266A4}"/>
+                  </a:ext>
+                </a:extLst>
+              </p:cNvPr>
+              <p:cNvSpPr txBox="1">
+                <a:spLocks noRot="1" noChangeAspect="1" noMove="1" noResize="1" noEditPoints="1" noAdjustHandles="1" noChangeArrowheads="1" noChangeShapeType="1" noTextEdit="1"/>
+              </p:cNvSpPr>
+              <p:nvPr/>
+            </p:nvSpPr>
+            <p:spPr>
+              <a:xfrm>
+                <a:off x="4754034" y="915206"/>
+                <a:ext cx="670568" cy="553998"/>
+              </a:xfrm>
+              <a:prstGeom prst="rect">
+                <a:avLst/>
+              </a:prstGeom>
+              <a:blipFill>
+                <a:blip r:embed="rId7"/>
+                <a:stretch>
+                  <a:fillRect l="-22222" t="-18182" r="-5556"/>
+                </a:stretch>
+              </a:blipFill>
+            </p:spPr>
+            <p:txBody>
+              <a:bodyPr/>
+              <a:lstStyle/>
+              <a:p>
+                <a:r>
+                  <a:rPr lang="zh-CN" altLang="en-US">
+                    <a:noFill/>
+                  </a:rPr>
+                  <a:t> </a:t>
+                </a:r>
+              </a:p>
+            </p:txBody>
+          </p:sp>
+        </mc:Fallback>
+      </mc:AlternateContent>
+      <mc:AlternateContent xmlns:mc="http://schemas.openxmlformats.org/markup-compatibility/2006">
+        <mc:Choice xmlns:a14="http://schemas.microsoft.com/office/drawing/2010/main" Requires="a14">
+          <p:sp>
+            <p:nvSpPr>
+              <p:cNvPr id="34" name="文本框 33">
+                <a:extLst>
+                  <a:ext uri="{FF2B5EF4-FFF2-40B4-BE49-F238E27FC236}">
+                    <a16:creationId xmlns:a16="http://schemas.microsoft.com/office/drawing/2014/main" id="{7367A93A-5793-4215-EBB1-B5762642B11D}"/>
+                  </a:ext>
+                </a:extLst>
+              </p:cNvPr>
+              <p:cNvSpPr txBox="1"/>
+              <p:nvPr/>
+            </p:nvSpPr>
+            <p:spPr>
+              <a:xfrm>
+                <a:off x="6534314" y="856867"/>
+                <a:ext cx="670568" cy="553998"/>
+              </a:xfrm>
+              <a:prstGeom prst="rect">
+                <a:avLst/>
+              </a:prstGeom>
+              <a:noFill/>
+            </p:spPr>
+            <p:txBody>
+              <a:bodyPr wrap="none" lIns="0" tIns="0" rIns="0" bIns="0" rtlCol="0">
+                <a:spAutoFit/>
+              </a:bodyPr>
+              <a:lstStyle/>
+              <a:p>
+                <a:r>
+                  <a:rPr kumimoji="1" lang="zh-CN" altLang="en-US" b="0" dirty="0">
+                    <a:latin typeface="SimSun" panose="02010600030101010101" pitchFamily="2" charset="-122"/>
+                    <a:ea typeface="SimSun" panose="02010600030101010101" pitchFamily="2" charset="-122"/>
+                  </a:rPr>
+                  <a:t>计算</a:t>
+                </a:r>
+                <a14:m>
+                  <m:oMath xmlns:m="http://schemas.openxmlformats.org/officeDocument/2006/math">
+                    <m:sSub>
+                      <m:sSubPr>
+                        <m:ctrlPr>
+                          <a:rPr kumimoji="1" lang="en-US" altLang="zh-CN" b="0" i="1" smtClean="0">
+                            <a:latin typeface="Cambria Math" panose="02040503050406030204" pitchFamily="18" charset="0"/>
+                          </a:rPr>
+                        </m:ctrlPr>
+                      </m:sSubPr>
+                      <m:e>
+                        <m:r>
+                          <a:rPr kumimoji="1" lang="en-US" altLang="zh-CN" b="0" i="1" smtClean="0">
+                            <a:latin typeface="Cambria Math" panose="02040503050406030204" pitchFamily="18" charset="0"/>
+                          </a:rPr>
+                          <m:t>𝑌</m:t>
+                        </m:r>
+                      </m:e>
+                      <m:sub>
+                        <m:r>
+                          <a:rPr kumimoji="1" lang="en-US" altLang="zh-CN" b="0" i="1" smtClean="0">
+                            <a:latin typeface="Cambria Math" panose="02040503050406030204" pitchFamily="18" charset="0"/>
+                          </a:rPr>
+                          <m:t>3</m:t>
+                        </m:r>
+                      </m:sub>
+                    </m:sSub>
+                  </m:oMath>
+                </a14:m>
+                <a:endParaRPr kumimoji="1" lang="en-US" altLang="zh-CN" b="0" dirty="0"/>
+              </a:p>
+              <a:p>
+                <a:endParaRPr kumimoji="1" lang="zh-CN" altLang="en-US" dirty="0"/>
+              </a:p>
+            </p:txBody>
+          </p:sp>
+        </mc:Choice>
+        <mc:Fallback>
+          <p:sp>
+            <p:nvSpPr>
+              <p:cNvPr id="34" name="文本框 33">
+                <a:extLst>
+                  <a:ext uri="{FF2B5EF4-FFF2-40B4-BE49-F238E27FC236}">
+                    <a16:creationId xmlns:a16="http://schemas.microsoft.com/office/drawing/2014/main" id="{7367A93A-5793-4215-EBB1-B5762642B11D}"/>
+                  </a:ext>
+                </a:extLst>
+              </p:cNvPr>
+              <p:cNvSpPr txBox="1">
+                <a:spLocks noRot="1" noChangeAspect="1" noMove="1" noResize="1" noEditPoints="1" noAdjustHandles="1" noChangeArrowheads="1" noChangeShapeType="1" noTextEdit="1"/>
+              </p:cNvSpPr>
+              <p:nvPr/>
+            </p:nvSpPr>
+            <p:spPr>
+              <a:xfrm>
+                <a:off x="6534314" y="856867"/>
+                <a:ext cx="670568" cy="553998"/>
+              </a:xfrm>
+              <a:prstGeom prst="rect">
+                <a:avLst/>
+              </a:prstGeom>
+              <a:blipFill>
+                <a:blip r:embed="rId8"/>
+                <a:stretch>
+                  <a:fillRect l="-20370" t="-18182" r="-5556"/>
+                </a:stretch>
+              </a:blipFill>
+            </p:spPr>
+            <p:txBody>
+              <a:bodyPr/>
+              <a:lstStyle/>
+              <a:p>
+                <a:r>
+                  <a:rPr lang="zh-CN" altLang="en-US">
+                    <a:noFill/>
+                  </a:rPr>
+                  <a:t> </a:t>
+                </a:r>
+              </a:p>
+            </p:txBody>
+          </p:sp>
+        </mc:Fallback>
+      </mc:AlternateContent>
+      <mc:AlternateContent xmlns:mc="http://schemas.openxmlformats.org/markup-compatibility/2006">
+        <mc:Choice xmlns:a14="http://schemas.microsoft.com/office/drawing/2010/main" Requires="a14">
+          <p:sp>
+            <p:nvSpPr>
+              <p:cNvPr id="35" name="文本框 34">
+                <a:extLst>
+                  <a:ext uri="{FF2B5EF4-FFF2-40B4-BE49-F238E27FC236}">
+                    <a16:creationId xmlns:a16="http://schemas.microsoft.com/office/drawing/2014/main" id="{B775CABB-D7C2-02F0-6779-BA509AB0A705}"/>
+                  </a:ext>
+                </a:extLst>
+              </p:cNvPr>
+              <p:cNvSpPr txBox="1"/>
+              <p:nvPr/>
+            </p:nvSpPr>
+            <p:spPr>
+              <a:xfrm>
+                <a:off x="8011754" y="1337732"/>
+                <a:ext cx="670568" cy="553998"/>
+              </a:xfrm>
+              <a:prstGeom prst="rect">
+                <a:avLst/>
+              </a:prstGeom>
+              <a:noFill/>
+            </p:spPr>
+            <p:txBody>
+              <a:bodyPr wrap="none" lIns="0" tIns="0" rIns="0" bIns="0" rtlCol="0">
+                <a:spAutoFit/>
+              </a:bodyPr>
+              <a:lstStyle/>
+              <a:p>
+                <a:r>
+                  <a:rPr kumimoji="1" lang="zh-CN" altLang="en-US" b="0" dirty="0">
+                    <a:latin typeface="SimSun" panose="02010600030101010101" pitchFamily="2" charset="-122"/>
+                    <a:ea typeface="SimSun" panose="02010600030101010101" pitchFamily="2" charset="-122"/>
+                  </a:rPr>
+                  <a:t>计算</a:t>
+                </a:r>
+                <a14:m>
+                  <m:oMath xmlns:m="http://schemas.openxmlformats.org/officeDocument/2006/math">
+                    <m:sSub>
+                      <m:sSubPr>
+                        <m:ctrlPr>
+                          <a:rPr kumimoji="1" lang="en-US" altLang="zh-CN" b="0" i="1" smtClean="0">
+                            <a:latin typeface="Cambria Math" panose="02040503050406030204" pitchFamily="18" charset="0"/>
+                          </a:rPr>
+                        </m:ctrlPr>
+                      </m:sSubPr>
+                      <m:e>
+                        <m:r>
+                          <a:rPr kumimoji="1" lang="en-US" altLang="zh-CN" b="0" i="1" smtClean="0">
+                            <a:latin typeface="Cambria Math" panose="02040503050406030204" pitchFamily="18" charset="0"/>
+                          </a:rPr>
+                          <m:t>𝑌</m:t>
+                        </m:r>
+                      </m:e>
+                      <m:sub>
+                        <m:r>
+                          <a:rPr kumimoji="1" lang="en-US" altLang="zh-CN" b="0" i="1" smtClean="0">
+                            <a:latin typeface="Cambria Math" panose="02040503050406030204" pitchFamily="18" charset="0"/>
+                          </a:rPr>
+                          <m:t>4</m:t>
+                        </m:r>
+                      </m:sub>
+                    </m:sSub>
+                  </m:oMath>
+                </a14:m>
+                <a:endParaRPr kumimoji="1" lang="en-US" altLang="zh-CN" b="0" dirty="0"/>
+              </a:p>
+              <a:p>
+                <a:endParaRPr kumimoji="1" lang="zh-CN" altLang="en-US" dirty="0"/>
+              </a:p>
+            </p:txBody>
+          </p:sp>
+        </mc:Choice>
+        <mc:Fallback>
+          <p:sp>
+            <p:nvSpPr>
+              <p:cNvPr id="35" name="文本框 34">
+                <a:extLst>
+                  <a:ext uri="{FF2B5EF4-FFF2-40B4-BE49-F238E27FC236}">
+                    <a16:creationId xmlns:a16="http://schemas.microsoft.com/office/drawing/2014/main" id="{B775CABB-D7C2-02F0-6779-BA509AB0A705}"/>
+                  </a:ext>
+                </a:extLst>
+              </p:cNvPr>
+              <p:cNvSpPr txBox="1">
+                <a:spLocks noRot="1" noChangeAspect="1" noMove="1" noResize="1" noEditPoints="1" noAdjustHandles="1" noChangeArrowheads="1" noChangeShapeType="1" noTextEdit="1"/>
+              </p:cNvSpPr>
+              <p:nvPr/>
+            </p:nvSpPr>
+            <p:spPr>
+              <a:xfrm>
+                <a:off x="8011754" y="1337732"/>
+                <a:ext cx="670568" cy="553998"/>
+              </a:xfrm>
+              <a:prstGeom prst="rect">
+                <a:avLst/>
+              </a:prstGeom>
+              <a:blipFill>
+                <a:blip r:embed="rId9"/>
+                <a:stretch>
+                  <a:fillRect l="-20370" t="-18182" r="-5556"/>
+                </a:stretch>
+              </a:blipFill>
+            </p:spPr>
+            <p:txBody>
+              <a:bodyPr/>
+              <a:lstStyle/>
+              <a:p>
+                <a:r>
+                  <a:rPr lang="zh-CN" altLang="en-US">
+                    <a:noFill/>
+                  </a:rPr>
+                  <a:t> </a:t>
+                </a:r>
+              </a:p>
+            </p:txBody>
+          </p:sp>
+        </mc:Fallback>
+      </mc:AlternateContent>
       <p:sp>
         <p:nvSpPr>
-          <p:cNvPr id="35" name="文本框 34">
-            <a:extLst>
-              <a:ext uri="{FF2B5EF4-FFF2-40B4-BE49-F238E27FC236}">
-                <a16:creationId xmlns:a16="http://schemas.microsoft.com/office/drawing/2014/main" id="{1E1568DD-A82C-E3A6-229B-FE7F9FAA70DC}"/>
+          <p:cNvPr id="36" name="文本框 35">
+            <a:extLst>
+              <a:ext uri="{FF2B5EF4-FFF2-40B4-BE49-F238E27FC236}">
+                <a16:creationId xmlns:a16="http://schemas.microsoft.com/office/drawing/2014/main" id="{087D4E98-7986-11AB-913B-313F5DC77BBA}"/>
               </a:ext>
             </a:extLst>
           </p:cNvPr>
@@ -4756,8 +6191,8 @@
         </p:nvSpPr>
         <p:spPr>
           <a:xfrm>
-            <a:off x="5336337" y="3252797"/>
-            <a:ext cx="806821" cy="830997"/>
+            <a:off x="3090336" y="2910088"/>
+            <a:ext cx="841022" cy="369332"/>
           </a:xfrm>
           <a:prstGeom prst="rect">
             <a:avLst/>
@@ -4771,76 +6206,32 @@
           <a:lstStyle/>
           <a:p>
             <a:r>
-              <a:rPr kumimoji="1" lang="zh-CN" altLang="en-US" sz="1200" dirty="0"/>
-              <a:t>恢复独立信源</a:t>
+              <a:rPr kumimoji="1" lang="zh-CN" altLang="en-US" dirty="0">
+                <a:latin typeface="SimSun" panose="02010600030101010101" pitchFamily="2" charset="-122"/>
+                <a:ea typeface="SimSun" panose="02010600030101010101" pitchFamily="2" charset="-122"/>
+              </a:rPr>
+              <a:t>节点</a:t>
             </a:r>
             <a:r>
-              <a:rPr kumimoji="1" lang="en-US" altLang="zh-CN" sz="1200" dirty="0"/>
-              <a:t>→</a:t>
+              <a:rPr kumimoji="1" lang="en-US" altLang="zh-CN" dirty="0">
+                <a:latin typeface="SimSun" panose="02010600030101010101" pitchFamily="2" charset="-122"/>
+                <a:ea typeface="SimSun" panose="02010600030101010101" pitchFamily="2" charset="-122"/>
+              </a:rPr>
+              <a:t>1</a:t>
             </a:r>
-            <a:r>
-              <a:rPr kumimoji="1" lang="zh-CN" altLang="en-US" sz="1200" dirty="0"/>
-              <a:t>恢复信源线性函数</a:t>
-            </a:r>
+            <a:endParaRPr kumimoji="1" lang="zh-CN" altLang="en-US" dirty="0">
+              <a:latin typeface="SimSun" panose="02010600030101010101" pitchFamily="2" charset="-122"/>
+              <a:ea typeface="SimSun" panose="02010600030101010101" pitchFamily="2" charset="-122"/>
+            </a:endParaRPr>
           </a:p>
         </p:txBody>
       </p:sp>
       <p:sp>
         <p:nvSpPr>
-          <p:cNvPr id="39" name="矩形 38">
-            <a:extLst>
-              <a:ext uri="{FF2B5EF4-FFF2-40B4-BE49-F238E27FC236}">
-                <a16:creationId xmlns:a16="http://schemas.microsoft.com/office/drawing/2014/main" id="{E7120628-BCB0-0AEE-6C62-D4D5A79E4412}"/>
-              </a:ext>
-            </a:extLst>
-          </p:cNvPr>
-          <p:cNvSpPr/>
-          <p:nvPr/>
-        </p:nvSpPr>
-        <p:spPr>
-          <a:xfrm>
-            <a:off x="2996889" y="5574532"/>
-            <a:ext cx="5645305" cy="386761"/>
-          </a:xfrm>
-          <a:prstGeom prst="rect">
-            <a:avLst/>
-          </a:prstGeom>
-          <a:ln>
-            <a:solidFill>
-              <a:schemeClr val="tx1"/>
-            </a:solidFill>
-            <a:prstDash val="sysDash"/>
-          </a:ln>
-        </p:spPr>
-        <p:style>
-          <a:lnRef idx="2">
-            <a:schemeClr val="accent6"/>
-          </a:lnRef>
-          <a:fillRef idx="1">
-            <a:schemeClr val="lt1"/>
-          </a:fillRef>
-          <a:effectRef idx="0">
-            <a:schemeClr val="accent6"/>
-          </a:effectRef>
-          <a:fontRef idx="minor">
-            <a:schemeClr val="dk1"/>
-          </a:fontRef>
-        </p:style>
-        <p:txBody>
-          <a:bodyPr rtlCol="0" anchor="ctr"/>
-          <a:lstStyle/>
-          <a:p>
-            <a:pPr algn="ctr"/>
-            <a:endParaRPr kumimoji="1" lang="zh-CN" altLang="en-US"/>
-          </a:p>
-        </p:txBody>
-      </p:sp>
-      <p:sp>
-        <p:nvSpPr>
-          <p:cNvPr id="40" name="文本框 39">
-            <a:extLst>
-              <a:ext uri="{FF2B5EF4-FFF2-40B4-BE49-F238E27FC236}">
-                <a16:creationId xmlns:a16="http://schemas.microsoft.com/office/drawing/2014/main" id="{E469F641-EF95-735F-6A17-04CED5C556CC}"/>
+          <p:cNvPr id="37" name="文本框 36">
+            <a:extLst>
+              <a:ext uri="{FF2B5EF4-FFF2-40B4-BE49-F238E27FC236}">
+                <a16:creationId xmlns:a16="http://schemas.microsoft.com/office/drawing/2014/main" id="{57947D6B-8182-3E3D-B7C1-DD25E49EBEA8}"/>
               </a:ext>
             </a:extLst>
           </p:cNvPr>
@@ -4849,8 +6240,8 @@
         </p:nvSpPr>
         <p:spPr>
           <a:xfrm>
-            <a:off x="2996889" y="5642309"/>
-            <a:ext cx="5645305" cy="307777"/>
+            <a:off x="4408310" y="2403508"/>
+            <a:ext cx="841022" cy="369332"/>
           </a:xfrm>
           <a:prstGeom prst="rect">
             <a:avLst/>
@@ -4864,181 +6255,32 @@
           <a:lstStyle/>
           <a:p>
             <a:r>
-              <a:rPr kumimoji="1" lang="zh-CN" altLang="en-US" sz="1400" dirty="0"/>
-              <a:t>结合编码计算与</a:t>
+              <a:rPr kumimoji="1" lang="zh-CN" altLang="en-US" dirty="0">
+                <a:latin typeface="SimSun" panose="02010600030101010101" pitchFamily="2" charset="-122"/>
+                <a:ea typeface="SimSun" panose="02010600030101010101" pitchFamily="2" charset="-122"/>
+              </a:rPr>
+              <a:t>节点</a:t>
             </a:r>
             <a:r>
-              <a:rPr kumimoji="1" lang="en-US" altLang="zh-CN" sz="1400" dirty="0"/>
-              <a:t>DSC</a:t>
+              <a:rPr kumimoji="1" lang="en-US" altLang="zh-CN" dirty="0">
+                <a:latin typeface="SimSun" panose="02010600030101010101" pitchFamily="2" charset="-122"/>
+                <a:ea typeface="SimSun" panose="02010600030101010101" pitchFamily="2" charset="-122"/>
+              </a:rPr>
+              <a:t>2</a:t>
             </a:r>
-            <a:r>
-              <a:rPr kumimoji="1" lang="zh-CN" altLang="en-US" sz="1400" dirty="0"/>
-              <a:t>技术，利用</a:t>
-            </a:r>
-            <a:r>
-              <a:rPr kumimoji="1" lang="en-US" altLang="zh-CN" sz="1400" dirty="0"/>
-              <a:t>DSC</a:t>
-            </a:r>
-            <a:r>
-              <a:rPr kumimoji="1" lang="zh-CN" altLang="en-US" sz="1400" dirty="0"/>
-              <a:t>技术进行编码计算的传输负载压缩</a:t>
-            </a:r>
+            <a:endParaRPr kumimoji="1" lang="zh-CN" altLang="en-US" dirty="0">
+              <a:latin typeface="SimSun" panose="02010600030101010101" pitchFamily="2" charset="-122"/>
+              <a:ea typeface="SimSun" panose="02010600030101010101" pitchFamily="2" charset="-122"/>
+            </a:endParaRPr>
           </a:p>
         </p:txBody>
       </p:sp>
       <p:sp>
         <p:nvSpPr>
-          <p:cNvPr id="41" name="下箭头 40">
-            <a:extLst>
-              <a:ext uri="{FF2B5EF4-FFF2-40B4-BE49-F238E27FC236}">
-                <a16:creationId xmlns:a16="http://schemas.microsoft.com/office/drawing/2014/main" id="{244776AE-AC0E-8089-459A-E669B995B2F5}"/>
-              </a:ext>
-            </a:extLst>
-          </p:cNvPr>
-          <p:cNvSpPr/>
-          <p:nvPr/>
-        </p:nvSpPr>
-        <p:spPr>
-          <a:xfrm>
-            <a:off x="3953570" y="5204556"/>
-            <a:ext cx="183531" cy="324948"/>
-          </a:xfrm>
-          <a:prstGeom prst="downArrow">
-            <a:avLst/>
-          </a:prstGeom>
-          <a:ln>
-            <a:solidFill>
-              <a:schemeClr val="tx1"/>
-            </a:solidFill>
-          </a:ln>
-        </p:spPr>
-        <p:style>
-          <a:lnRef idx="2">
-            <a:schemeClr val="accent6"/>
-          </a:lnRef>
-          <a:fillRef idx="1">
-            <a:schemeClr val="lt1"/>
-          </a:fillRef>
-          <a:effectRef idx="0">
-            <a:schemeClr val="accent6"/>
-          </a:effectRef>
-          <a:fontRef idx="minor">
-            <a:schemeClr val="dk1"/>
-          </a:fontRef>
-        </p:style>
-        <p:txBody>
-          <a:bodyPr rtlCol="0" anchor="ctr"/>
-          <a:lstStyle/>
-          <a:p>
-            <a:pPr algn="ctr"/>
-            <a:endParaRPr kumimoji="1" lang="zh-CN" altLang="en-US"/>
-          </a:p>
-        </p:txBody>
-      </p:sp>
-      <p:sp>
-        <p:nvSpPr>
-          <p:cNvPr id="42" name="下箭头 41">
-            <a:extLst>
-              <a:ext uri="{FF2B5EF4-FFF2-40B4-BE49-F238E27FC236}">
-                <a16:creationId xmlns:a16="http://schemas.microsoft.com/office/drawing/2014/main" id="{93898745-C80D-2FB5-69EB-E9421EB21E8A}"/>
-              </a:ext>
-            </a:extLst>
-          </p:cNvPr>
-          <p:cNvSpPr/>
-          <p:nvPr/>
-        </p:nvSpPr>
-        <p:spPr>
-          <a:xfrm>
-            <a:off x="7318909" y="5182331"/>
-            <a:ext cx="183531" cy="380994"/>
-          </a:xfrm>
-          <a:prstGeom prst="downArrow">
-            <a:avLst/>
-          </a:prstGeom>
-          <a:ln>
-            <a:solidFill>
-              <a:schemeClr val="tx1"/>
-            </a:solidFill>
-          </a:ln>
-        </p:spPr>
-        <p:style>
-          <a:lnRef idx="2">
-            <a:schemeClr val="accent6"/>
-          </a:lnRef>
-          <a:fillRef idx="1">
-            <a:schemeClr val="lt1"/>
-          </a:fillRef>
-          <a:effectRef idx="0">
-            <a:schemeClr val="accent6"/>
-          </a:effectRef>
-          <a:fontRef idx="minor">
-            <a:schemeClr val="dk1"/>
-          </a:fontRef>
-        </p:style>
-        <p:txBody>
-          <a:bodyPr rtlCol="0" anchor="ctr"/>
-          <a:lstStyle/>
-          <a:p>
-            <a:pPr algn="ctr"/>
-            <a:endParaRPr kumimoji="1" lang="zh-CN" altLang="en-US"/>
-          </a:p>
-        </p:txBody>
-      </p:sp>
-      <p:sp>
-        <p:nvSpPr>
-          <p:cNvPr id="43" name="矩形 42">
-            <a:extLst>
-              <a:ext uri="{FF2B5EF4-FFF2-40B4-BE49-F238E27FC236}">
-                <a16:creationId xmlns:a16="http://schemas.microsoft.com/office/drawing/2014/main" id="{D89081E1-3BF5-FBED-AD3C-F1238E54CB08}"/>
-              </a:ext>
-            </a:extLst>
-          </p:cNvPr>
-          <p:cNvSpPr/>
-          <p:nvPr/>
-        </p:nvSpPr>
-        <p:spPr>
-          <a:xfrm>
-            <a:off x="2174485" y="6405943"/>
-            <a:ext cx="7270593" cy="369331"/>
-          </a:xfrm>
-          <a:prstGeom prst="rect">
-            <a:avLst/>
-          </a:prstGeom>
-          <a:ln>
-            <a:solidFill>
-              <a:schemeClr val="tx1"/>
-            </a:solidFill>
-          </a:ln>
-        </p:spPr>
-        <p:style>
-          <a:lnRef idx="2">
-            <a:schemeClr val="accent6"/>
-          </a:lnRef>
-          <a:fillRef idx="1">
-            <a:schemeClr val="lt1"/>
-          </a:fillRef>
-          <a:effectRef idx="0">
-            <a:schemeClr val="accent6"/>
-          </a:effectRef>
-          <a:fontRef idx="minor">
-            <a:schemeClr val="dk1"/>
-          </a:fontRef>
-        </p:style>
-        <p:txBody>
-          <a:bodyPr rtlCol="0" anchor="ctr"/>
-          <a:lstStyle/>
-          <a:p>
-            <a:pPr algn="ctr"/>
-            <a:endParaRPr kumimoji="1" lang="zh-CN" altLang="en-US"/>
-          </a:p>
-        </p:txBody>
-      </p:sp>
-      <p:sp>
-        <p:nvSpPr>
-          <p:cNvPr id="44" name="文本框 43">
-            <a:extLst>
-              <a:ext uri="{FF2B5EF4-FFF2-40B4-BE49-F238E27FC236}">
-                <a16:creationId xmlns:a16="http://schemas.microsoft.com/office/drawing/2014/main" id="{00050065-EBB5-8F6A-15B2-4D53745E16A3}"/>
+          <p:cNvPr id="38" name="文本框 37">
+            <a:extLst>
+              <a:ext uri="{FF2B5EF4-FFF2-40B4-BE49-F238E27FC236}">
+                <a16:creationId xmlns:a16="http://schemas.microsoft.com/office/drawing/2014/main" id="{05C90AC0-61E2-D43D-5B1A-913B696FD62E}"/>
               </a:ext>
             </a:extLst>
           </p:cNvPr>
@@ -5047,8 +6289,8 @@
         </p:nvSpPr>
         <p:spPr>
           <a:xfrm>
-            <a:off x="4660606" y="6435468"/>
-            <a:ext cx="5005180" cy="307777"/>
+            <a:off x="6572958" y="2366151"/>
+            <a:ext cx="841022" cy="369332"/>
           </a:xfrm>
           <a:prstGeom prst="rect">
             <a:avLst/>
@@ -5062,26 +6304,715 @@
           <a:lstStyle/>
           <a:p>
             <a:r>
-              <a:rPr kumimoji="1" lang="zh-CN" altLang="en-US" sz="1400" dirty="0"/>
-              <a:t>第六章</a:t>
+              <a:rPr kumimoji="1" lang="zh-CN" altLang="en-US" dirty="0">
+                <a:latin typeface="SimSun" panose="02010600030101010101" pitchFamily="2" charset="-122"/>
+                <a:ea typeface="SimSun" panose="02010600030101010101" pitchFamily="2" charset="-122"/>
+              </a:rPr>
+              <a:t>节点</a:t>
             </a:r>
             <a:r>
-              <a:rPr kumimoji="1" lang="en-US" altLang="zh-CN" sz="1400" dirty="0"/>
-              <a:t>	</a:t>
+              <a:rPr kumimoji="1" lang="en-US" altLang="zh-CN" dirty="0">
+                <a:latin typeface="SimSun" panose="02010600030101010101" pitchFamily="2" charset="-122"/>
+                <a:ea typeface="SimSun" panose="02010600030101010101" pitchFamily="2" charset="-122"/>
+              </a:rPr>
+              <a:t>3</a:t>
             </a:r>
-            <a:r>
-              <a:rPr kumimoji="1" lang="zh-CN" altLang="en-US" sz="1400" dirty="0"/>
-              <a:t>总结与展望</a:t>
-            </a:r>
+            <a:endParaRPr kumimoji="1" lang="zh-CN" altLang="en-US" dirty="0">
+              <a:latin typeface="SimSun" panose="02010600030101010101" pitchFamily="2" charset="-122"/>
+              <a:ea typeface="SimSun" panose="02010600030101010101" pitchFamily="2" charset="-122"/>
+            </a:endParaRPr>
           </a:p>
         </p:txBody>
       </p:sp>
       <p:sp>
         <p:nvSpPr>
-          <p:cNvPr id="45" name="下箭头 44">
-            <a:extLst>
-              <a:ext uri="{FF2B5EF4-FFF2-40B4-BE49-F238E27FC236}">
-                <a16:creationId xmlns:a16="http://schemas.microsoft.com/office/drawing/2014/main" id="{7EC38CC6-B210-7F1A-A529-DAE537F45385}"/>
+          <p:cNvPr id="39" name="文本框 38">
+            <a:extLst>
+              <a:ext uri="{FF2B5EF4-FFF2-40B4-BE49-F238E27FC236}">
+                <a16:creationId xmlns:a16="http://schemas.microsoft.com/office/drawing/2014/main" id="{2E8028A8-E3A9-67C9-6DDA-A100BCF58648}"/>
+              </a:ext>
+            </a:extLst>
+          </p:cNvPr>
+          <p:cNvSpPr txBox="1"/>
+          <p:nvPr/>
+        </p:nvSpPr>
+        <p:spPr>
+          <a:xfrm>
+            <a:off x="8261810" y="2910088"/>
+            <a:ext cx="1543371" cy="369332"/>
+          </a:xfrm>
+          <a:prstGeom prst="rect">
+            <a:avLst/>
+          </a:prstGeom>
+          <a:noFill/>
+        </p:spPr>
+        <p:txBody>
+          <a:bodyPr wrap="square" rtlCol="0">
+            <a:spAutoFit/>
+          </a:bodyPr>
+          <a:lstStyle/>
+          <a:p>
+            <a:r>
+              <a:rPr kumimoji="1" lang="zh-CN" altLang="en-US" dirty="0">
+                <a:latin typeface="SimSun" panose="02010600030101010101" pitchFamily="2" charset="-122"/>
+                <a:ea typeface="SimSun" panose="02010600030101010101" pitchFamily="2" charset="-122"/>
+              </a:rPr>
+              <a:t>节点</a:t>
+            </a:r>
+            <a:r>
+              <a:rPr kumimoji="1" lang="en-US" altLang="zh-CN" dirty="0">
+                <a:latin typeface="SimSun" panose="02010600030101010101" pitchFamily="2" charset="-122"/>
+                <a:ea typeface="SimSun" panose="02010600030101010101" pitchFamily="2" charset="-122"/>
+              </a:rPr>
+              <a:t>4</a:t>
+            </a:r>
+            <a:r>
+              <a:rPr kumimoji="1" lang="zh-CN" altLang="en-US" dirty="0">
+                <a:latin typeface="SimSun" panose="02010600030101010101" pitchFamily="2" charset="-122"/>
+                <a:ea typeface="SimSun" panose="02010600030101010101" pitchFamily="2" charset="-122"/>
+              </a:rPr>
+              <a:t>（迟滞）</a:t>
+            </a:r>
+          </a:p>
+        </p:txBody>
+      </p:sp>
+      <mc:AlternateContent xmlns:mc="http://schemas.openxmlformats.org/markup-compatibility/2006">
+        <mc:Choice xmlns:a14="http://schemas.microsoft.com/office/drawing/2010/main" Requires="a14">
+          <p:sp>
+            <p:nvSpPr>
+              <p:cNvPr id="41" name="文本框 40">
+                <a:extLst>
+                  <a:ext uri="{FF2B5EF4-FFF2-40B4-BE49-F238E27FC236}">
+                    <a16:creationId xmlns:a16="http://schemas.microsoft.com/office/drawing/2014/main" id="{1E57A092-4847-D661-FAD8-70D75924602E}"/>
+                  </a:ext>
+                </a:extLst>
+              </p:cNvPr>
+              <p:cNvSpPr txBox="1"/>
+              <p:nvPr/>
+            </p:nvSpPr>
+            <p:spPr>
+              <a:xfrm flipH="1">
+                <a:off x="4006084" y="3459432"/>
+                <a:ext cx="1105009" cy="369332"/>
+              </a:xfrm>
+              <a:prstGeom prst="rect">
+                <a:avLst/>
+              </a:prstGeom>
+              <a:noFill/>
+            </p:spPr>
+            <p:txBody>
+              <a:bodyPr wrap="square">
+                <a:spAutoFit/>
+              </a:bodyPr>
+              <a:lstStyle/>
+              <a:p>
+                <a:pPr/>
+                <a:r>
+                  <a:rPr kumimoji="1" lang="zh-CN" altLang="en-US" b="0" dirty="0">
+                    <a:latin typeface="SimSun" panose="02010600030101010101" pitchFamily="2" charset="-122"/>
+                    <a:ea typeface="SimSun" panose="02010600030101010101" pitchFamily="2" charset="-122"/>
+                  </a:rPr>
+                  <a:t>传输</a:t>
+                </a:r>
+                <a14:m>
+                  <m:oMath xmlns:m="http://schemas.openxmlformats.org/officeDocument/2006/math">
+                    <m:sSub>
+                      <m:sSubPr>
+                        <m:ctrlPr>
+                          <a:rPr kumimoji="1" lang="en-US" altLang="zh-CN" b="0" i="1" smtClean="0">
+                            <a:latin typeface="Cambria Math" panose="02040503050406030204" pitchFamily="18" charset="0"/>
+                          </a:rPr>
+                        </m:ctrlPr>
+                      </m:sSubPr>
+                      <m:e>
+                        <m:r>
+                          <a:rPr kumimoji="1" lang="en-US" altLang="zh-CN" b="0" i="1" smtClean="0">
+                            <a:latin typeface="Cambria Math" panose="02040503050406030204" pitchFamily="18" charset="0"/>
+                          </a:rPr>
+                          <m:t>𝑌</m:t>
+                        </m:r>
+                      </m:e>
+                      <m:sub>
+                        <m:r>
+                          <a:rPr kumimoji="1" lang="en-US" altLang="zh-CN" b="0" i="1" smtClean="0">
+                            <a:latin typeface="Cambria Math" panose="02040503050406030204" pitchFamily="18" charset="0"/>
+                          </a:rPr>
+                          <m:t>1</m:t>
+                        </m:r>
+                      </m:sub>
+                    </m:sSub>
+                  </m:oMath>
+                </a14:m>
+                <a:endParaRPr lang="zh-CN" altLang="en-US" dirty="0"/>
+              </a:p>
+            </p:txBody>
+          </p:sp>
+        </mc:Choice>
+        <mc:Fallback>
+          <p:sp>
+            <p:nvSpPr>
+              <p:cNvPr id="41" name="文本框 40">
+                <a:extLst>
+                  <a:ext uri="{FF2B5EF4-FFF2-40B4-BE49-F238E27FC236}">
+                    <a16:creationId xmlns:a16="http://schemas.microsoft.com/office/drawing/2014/main" id="{1E57A092-4847-D661-FAD8-70D75924602E}"/>
+                  </a:ext>
+                </a:extLst>
+              </p:cNvPr>
+              <p:cNvSpPr txBox="1">
+                <a:spLocks noRot="1" noChangeAspect="1" noMove="1" noResize="1" noEditPoints="1" noAdjustHandles="1" noChangeArrowheads="1" noChangeShapeType="1" noTextEdit="1"/>
+              </p:cNvSpPr>
+              <p:nvPr/>
+            </p:nvSpPr>
+            <p:spPr>
+              <a:xfrm flipH="1">
+                <a:off x="4006084" y="3459432"/>
+                <a:ext cx="1105009" cy="369332"/>
+              </a:xfrm>
+              <a:prstGeom prst="rect">
+                <a:avLst/>
+              </a:prstGeom>
+              <a:blipFill>
+                <a:blip r:embed="rId10"/>
+                <a:stretch>
+                  <a:fillRect l="-4545" t="-13333" b="-20000"/>
+                </a:stretch>
+              </a:blipFill>
+            </p:spPr>
+            <p:txBody>
+              <a:bodyPr/>
+              <a:lstStyle/>
+              <a:p>
+                <a:r>
+                  <a:rPr lang="zh-CN" altLang="en-US">
+                    <a:noFill/>
+                  </a:rPr>
+                  <a:t> </a:t>
+                </a:r>
+              </a:p>
+            </p:txBody>
+          </p:sp>
+        </mc:Fallback>
+      </mc:AlternateContent>
+      <mc:AlternateContent xmlns:mc="http://schemas.openxmlformats.org/markup-compatibility/2006">
+        <mc:Choice xmlns:a14="http://schemas.microsoft.com/office/drawing/2010/main" Requires="a14">
+          <p:sp>
+            <p:nvSpPr>
+              <p:cNvPr id="43" name="文本框 42">
+                <a:extLst>
+                  <a:ext uri="{FF2B5EF4-FFF2-40B4-BE49-F238E27FC236}">
+                    <a16:creationId xmlns:a16="http://schemas.microsoft.com/office/drawing/2014/main" id="{4AEB1C61-D07F-C999-E55B-5ACCF1590AE2}"/>
+                  </a:ext>
+                </a:extLst>
+              </p:cNvPr>
+              <p:cNvSpPr txBox="1"/>
+              <p:nvPr/>
+            </p:nvSpPr>
+            <p:spPr>
+              <a:xfrm>
+                <a:off x="4616374" y="2949619"/>
+                <a:ext cx="876928" cy="369332"/>
+              </a:xfrm>
+              <a:prstGeom prst="rect">
+                <a:avLst/>
+              </a:prstGeom>
+              <a:noFill/>
+            </p:spPr>
+            <p:txBody>
+              <a:bodyPr wrap="square">
+                <a:spAutoFit/>
+              </a:bodyPr>
+              <a:lstStyle/>
+              <a:p>
+                <a:pPr/>
+                <a:r>
+                  <a:rPr kumimoji="1" lang="zh-CN" altLang="en-US" b="0" dirty="0">
+                    <a:latin typeface="SimSun" panose="02010600030101010101" pitchFamily="2" charset="-122"/>
+                    <a:ea typeface="SimSun" panose="02010600030101010101" pitchFamily="2" charset="-122"/>
+                  </a:rPr>
+                  <a:t>传输</a:t>
+                </a:r>
+                <a14:m>
+                  <m:oMath xmlns:m="http://schemas.openxmlformats.org/officeDocument/2006/math">
+                    <m:sSub>
+                      <m:sSubPr>
+                        <m:ctrlPr>
+                          <a:rPr kumimoji="1" lang="en-US" altLang="zh-CN" b="0" i="1" smtClean="0">
+                            <a:latin typeface="Cambria Math" panose="02040503050406030204" pitchFamily="18" charset="0"/>
+                          </a:rPr>
+                        </m:ctrlPr>
+                      </m:sSubPr>
+                      <m:e>
+                        <m:r>
+                          <a:rPr kumimoji="1" lang="en-US" altLang="zh-CN" b="0" i="1" smtClean="0">
+                            <a:latin typeface="Cambria Math" panose="02040503050406030204" pitchFamily="18" charset="0"/>
+                          </a:rPr>
+                          <m:t>𝑌</m:t>
+                        </m:r>
+                      </m:e>
+                      <m:sub>
+                        <m:r>
+                          <a:rPr kumimoji="1" lang="en-US" altLang="zh-CN" b="0" i="1" smtClean="0">
+                            <a:latin typeface="Cambria Math" panose="02040503050406030204" pitchFamily="18" charset="0"/>
+                          </a:rPr>
+                          <m:t>2</m:t>
+                        </m:r>
+                      </m:sub>
+                    </m:sSub>
+                  </m:oMath>
+                </a14:m>
+                <a:endParaRPr lang="zh-CN" altLang="en-US" dirty="0"/>
+              </a:p>
+            </p:txBody>
+          </p:sp>
+        </mc:Choice>
+        <mc:Fallback>
+          <p:sp>
+            <p:nvSpPr>
+              <p:cNvPr id="43" name="文本框 42">
+                <a:extLst>
+                  <a:ext uri="{FF2B5EF4-FFF2-40B4-BE49-F238E27FC236}">
+                    <a16:creationId xmlns:a16="http://schemas.microsoft.com/office/drawing/2014/main" id="{4AEB1C61-D07F-C999-E55B-5ACCF1590AE2}"/>
+                  </a:ext>
+                </a:extLst>
+              </p:cNvPr>
+              <p:cNvSpPr txBox="1">
+                <a:spLocks noRot="1" noChangeAspect="1" noMove="1" noResize="1" noEditPoints="1" noAdjustHandles="1" noChangeArrowheads="1" noChangeShapeType="1" noTextEdit="1"/>
+              </p:cNvSpPr>
+              <p:nvPr/>
+            </p:nvSpPr>
+            <p:spPr>
+              <a:xfrm>
+                <a:off x="4616374" y="2949619"/>
+                <a:ext cx="876928" cy="369332"/>
+              </a:xfrm>
+              <a:prstGeom prst="rect">
+                <a:avLst/>
+              </a:prstGeom>
+              <a:blipFill>
+                <a:blip r:embed="rId11"/>
+                <a:stretch>
+                  <a:fillRect l="-5714" t="-13333" b="-16667"/>
+                </a:stretch>
+              </a:blipFill>
+            </p:spPr>
+            <p:txBody>
+              <a:bodyPr/>
+              <a:lstStyle/>
+              <a:p>
+                <a:r>
+                  <a:rPr lang="zh-CN" altLang="en-US">
+                    <a:noFill/>
+                  </a:rPr>
+                  <a:t> </a:t>
+                </a:r>
+              </a:p>
+            </p:txBody>
+          </p:sp>
+        </mc:Fallback>
+      </mc:AlternateContent>
+      <mc:AlternateContent xmlns:mc="http://schemas.openxmlformats.org/markup-compatibility/2006">
+        <mc:Choice xmlns:a14="http://schemas.microsoft.com/office/drawing/2010/main" Requires="a14">
+          <p:sp>
+            <p:nvSpPr>
+              <p:cNvPr id="44" name="文本框 43">
+                <a:extLst>
+                  <a:ext uri="{FF2B5EF4-FFF2-40B4-BE49-F238E27FC236}">
+                    <a16:creationId xmlns:a16="http://schemas.microsoft.com/office/drawing/2014/main" id="{F2FC09B5-BBA0-35A6-7E90-05849A8B8741}"/>
+                  </a:ext>
+                </a:extLst>
+              </p:cNvPr>
+              <p:cNvSpPr txBox="1"/>
+              <p:nvPr/>
+            </p:nvSpPr>
+            <p:spPr>
+              <a:xfrm>
+                <a:off x="6371667" y="2957336"/>
+                <a:ext cx="1078094" cy="369332"/>
+              </a:xfrm>
+              <a:prstGeom prst="rect">
+                <a:avLst/>
+              </a:prstGeom>
+              <a:noFill/>
+            </p:spPr>
+            <p:txBody>
+              <a:bodyPr wrap="square">
+                <a:spAutoFit/>
+              </a:bodyPr>
+              <a:lstStyle/>
+              <a:p>
+                <a:pPr/>
+                <a:r>
+                  <a:rPr kumimoji="1" lang="zh-CN" altLang="en-US" b="0" dirty="0">
+                    <a:latin typeface="SimSun" panose="02010600030101010101" pitchFamily="2" charset="-122"/>
+                    <a:ea typeface="SimSun" panose="02010600030101010101" pitchFamily="2" charset="-122"/>
+                  </a:rPr>
+                  <a:t>传输</a:t>
+                </a:r>
+                <a14:m>
+                  <m:oMath xmlns:m="http://schemas.openxmlformats.org/officeDocument/2006/math">
+                    <m:sSub>
+                      <m:sSubPr>
+                        <m:ctrlPr>
+                          <a:rPr kumimoji="1" lang="en-US" altLang="zh-CN" b="0" i="1" smtClean="0">
+                            <a:latin typeface="Cambria Math" panose="02040503050406030204" pitchFamily="18" charset="0"/>
+                          </a:rPr>
+                        </m:ctrlPr>
+                      </m:sSubPr>
+                      <m:e>
+                        <m:r>
+                          <a:rPr kumimoji="1" lang="en-US" altLang="zh-CN" b="0" i="1" smtClean="0">
+                            <a:latin typeface="Cambria Math" panose="02040503050406030204" pitchFamily="18" charset="0"/>
+                          </a:rPr>
+                          <m:t>𝑌</m:t>
+                        </m:r>
+                      </m:e>
+                      <m:sub>
+                        <m:r>
+                          <a:rPr kumimoji="1" lang="en-US" altLang="zh-CN" b="0" i="1" smtClean="0">
+                            <a:latin typeface="Cambria Math" panose="02040503050406030204" pitchFamily="18" charset="0"/>
+                          </a:rPr>
+                          <m:t>3</m:t>
+                        </m:r>
+                      </m:sub>
+                    </m:sSub>
+                  </m:oMath>
+                </a14:m>
+                <a:endParaRPr lang="zh-CN" altLang="en-US" dirty="0"/>
+              </a:p>
+            </p:txBody>
+          </p:sp>
+        </mc:Choice>
+        <mc:Fallback>
+          <p:sp>
+            <p:nvSpPr>
+              <p:cNvPr id="44" name="文本框 43">
+                <a:extLst>
+                  <a:ext uri="{FF2B5EF4-FFF2-40B4-BE49-F238E27FC236}">
+                    <a16:creationId xmlns:a16="http://schemas.microsoft.com/office/drawing/2014/main" id="{F2FC09B5-BBA0-35A6-7E90-05849A8B8741}"/>
+                  </a:ext>
+                </a:extLst>
+              </p:cNvPr>
+              <p:cNvSpPr txBox="1">
+                <a:spLocks noRot="1" noChangeAspect="1" noMove="1" noResize="1" noEditPoints="1" noAdjustHandles="1" noChangeArrowheads="1" noChangeShapeType="1" noTextEdit="1"/>
+              </p:cNvSpPr>
+              <p:nvPr/>
+            </p:nvSpPr>
+            <p:spPr>
+              <a:xfrm>
+                <a:off x="6371667" y="2957336"/>
+                <a:ext cx="1078094" cy="369332"/>
+              </a:xfrm>
+              <a:prstGeom prst="rect">
+                <a:avLst/>
+              </a:prstGeom>
+              <a:blipFill>
+                <a:blip r:embed="rId12"/>
+                <a:stretch>
+                  <a:fillRect l="-4651" t="-12903" b="-16129"/>
+                </a:stretch>
+              </a:blipFill>
+            </p:spPr>
+            <p:txBody>
+              <a:bodyPr/>
+              <a:lstStyle/>
+              <a:p>
+                <a:r>
+                  <a:rPr lang="zh-CN" altLang="en-US">
+                    <a:noFill/>
+                  </a:rPr>
+                  <a:t> </a:t>
+                </a:r>
+              </a:p>
+            </p:txBody>
+          </p:sp>
+        </mc:Fallback>
+      </mc:AlternateContent>
+      <mc:AlternateContent xmlns:mc="http://schemas.openxmlformats.org/markup-compatibility/2006">
+        <mc:Choice xmlns:a14="http://schemas.microsoft.com/office/drawing/2010/main" Requires="a14">
+          <p:sp>
+            <p:nvSpPr>
+              <p:cNvPr id="46" name="文本框 45">
+                <a:extLst>
+                  <a:ext uri="{FF2B5EF4-FFF2-40B4-BE49-F238E27FC236}">
+                    <a16:creationId xmlns:a16="http://schemas.microsoft.com/office/drawing/2014/main" id="{72CB83AE-DCE1-1F21-8456-7DE5D1036196}"/>
+                  </a:ext>
+                </a:extLst>
+              </p:cNvPr>
+              <p:cNvSpPr txBox="1"/>
+              <p:nvPr/>
+            </p:nvSpPr>
+            <p:spPr>
+              <a:xfrm>
+                <a:off x="6534314" y="4750588"/>
+                <a:ext cx="1693812" cy="609462"/>
+              </a:xfrm>
+              <a:prstGeom prst="rect">
+                <a:avLst/>
+              </a:prstGeom>
+              <a:noFill/>
+            </p:spPr>
+            <p:txBody>
+              <a:bodyPr wrap="square" lIns="0" tIns="0" rIns="0" bIns="0" rtlCol="0">
+                <a:spAutoFit/>
+              </a:bodyPr>
+              <a:lstStyle/>
+              <a:p>
+                <a14:m>
+                  <m:oMathPara xmlns:m="http://schemas.openxmlformats.org/officeDocument/2006/math">
+                    <m:oMathParaPr>
+                      <m:jc m:val="centerGroup"/>
+                    </m:oMathParaPr>
+                    <m:oMath xmlns:m="http://schemas.openxmlformats.org/officeDocument/2006/math">
+                      <m:r>
+                        <m:rPr>
+                          <m:lit/>
+                        </m:rPr>
+                        <a:rPr kumimoji="1" lang="en-US" altLang="zh-CN" b="0" i="1" smtClean="0">
+                          <a:latin typeface="Cambria Math" panose="02040503050406030204" pitchFamily="18" charset="0"/>
+                        </a:rPr>
+                        <m:t>{</m:t>
+                      </m:r>
+                      <m:sSubSup>
+                        <m:sSubSupPr>
+                          <m:ctrlPr>
+                            <a:rPr kumimoji="1" lang="en-US" altLang="zh-CN" b="0" i="1" smtClean="0">
+                              <a:latin typeface="Cambria Math" panose="02040503050406030204" pitchFamily="18" charset="0"/>
+                            </a:rPr>
+                          </m:ctrlPr>
+                        </m:sSubSupPr>
+                        <m:e>
+                          <m:sSub>
+                            <m:sSubPr>
+                              <m:ctrlPr>
+                                <a:rPr kumimoji="1" lang="en-US" altLang="zh-CN" b="0" i="1" smtClean="0">
+                                  <a:latin typeface="Cambria Math" panose="02040503050406030204" pitchFamily="18" charset="0"/>
+                                </a:rPr>
+                              </m:ctrlPr>
+                            </m:sSubPr>
+                            <m:e>
+                              <m:r>
+                                <m:rPr>
+                                  <m:sty m:val="p"/>
+                                </m:rPr>
+                                <a:rPr kumimoji="1" lang="en-US" altLang="zh-CN" i="1">
+                                  <a:latin typeface="Cambria Math" panose="02040503050406030204" pitchFamily="18" charset="0"/>
+                                </a:rPr>
+                                <m:t>Y</m:t>
+                              </m:r>
+                            </m:e>
+                            <m:sub>
+                              <m:r>
+                                <a:rPr kumimoji="1" lang="en-US" altLang="zh-CN" b="0" i="1" smtClean="0">
+                                  <a:latin typeface="Cambria Math" panose="02040503050406030204" pitchFamily="18" charset="0"/>
+                                </a:rPr>
+                                <m:t>𝑖</m:t>
+                              </m:r>
+                            </m:sub>
+                          </m:sSub>
+                          <m:r>
+                            <m:rPr>
+                              <m:lit/>
+                            </m:rPr>
+                            <a:rPr kumimoji="1" lang="en-US" altLang="zh-CN" b="0" i="1" smtClean="0">
+                              <a:latin typeface="Cambria Math" panose="02040503050406030204" pitchFamily="18" charset="0"/>
+                            </a:rPr>
+                            <m:t>}</m:t>
+                          </m:r>
+                        </m:e>
+                        <m:sub>
+                          <m:d>
+                            <m:dPr>
+                              <m:begChr m:val="{"/>
+                              <m:endChr m:val="}"/>
+                              <m:ctrlPr>
+                                <a:rPr kumimoji="1" lang="en-US" altLang="zh-CN" b="0" i="1" smtClean="0">
+                                  <a:latin typeface="Cambria Math" panose="02040503050406030204" pitchFamily="18" charset="0"/>
+                                </a:rPr>
+                              </m:ctrlPr>
+                            </m:dPr>
+                            <m:e>
+                              <m:r>
+                                <a:rPr kumimoji="1" lang="en-US" altLang="zh-CN" b="0" i="1" smtClean="0">
+                                  <a:latin typeface="Cambria Math" panose="02040503050406030204" pitchFamily="18" charset="0"/>
+                                </a:rPr>
+                                <m:t>𝑖</m:t>
+                              </m:r>
+                              <m:r>
+                                <a:rPr kumimoji="1" lang="en-US" altLang="zh-CN" b="0" i="1" smtClean="0">
+                                  <a:latin typeface="Cambria Math" panose="02040503050406030204" pitchFamily="18" charset="0"/>
+                                </a:rPr>
+                                <m:t>=1</m:t>
+                              </m:r>
+                            </m:e>
+                          </m:d>
+                        </m:sub>
+                        <m:sup>
+                          <m:r>
+                            <a:rPr kumimoji="1" lang="en-US" altLang="zh-CN" b="0" i="1" smtClean="0">
+                              <a:latin typeface="Cambria Math" panose="02040503050406030204" pitchFamily="18" charset="0"/>
+                            </a:rPr>
+                            <m:t>3</m:t>
+                          </m:r>
+                        </m:sup>
+                      </m:sSubSup>
+                    </m:oMath>
+                  </m:oMathPara>
+                </a14:m>
+                <a:endParaRPr kumimoji="1" lang="en-US" altLang="zh-CN" b="0" dirty="0"/>
+              </a:p>
+              <a:p>
+                <a:endParaRPr kumimoji="1" lang="zh-CN" altLang="en-US" dirty="0"/>
+              </a:p>
+            </p:txBody>
+          </p:sp>
+        </mc:Choice>
+        <mc:Fallback>
+          <p:sp>
+            <p:nvSpPr>
+              <p:cNvPr id="46" name="文本框 45">
+                <a:extLst>
+                  <a:ext uri="{FF2B5EF4-FFF2-40B4-BE49-F238E27FC236}">
+                    <a16:creationId xmlns:a16="http://schemas.microsoft.com/office/drawing/2014/main" id="{72CB83AE-DCE1-1F21-8456-7DE5D1036196}"/>
+                  </a:ext>
+                </a:extLst>
+              </p:cNvPr>
+              <p:cNvSpPr txBox="1">
+                <a:spLocks noRot="1" noChangeAspect="1" noMove="1" noResize="1" noEditPoints="1" noAdjustHandles="1" noChangeArrowheads="1" noChangeShapeType="1" noTextEdit="1"/>
+              </p:cNvSpPr>
+              <p:nvPr/>
+            </p:nvSpPr>
+            <p:spPr>
+              <a:xfrm>
+                <a:off x="6534314" y="4750588"/>
+                <a:ext cx="1693812" cy="609462"/>
+              </a:xfrm>
+              <a:prstGeom prst="rect">
+                <a:avLst/>
+              </a:prstGeom>
+              <a:blipFill>
+                <a:blip r:embed="rId13"/>
+                <a:stretch>
+                  <a:fillRect/>
+                </a:stretch>
+              </a:blipFill>
+            </p:spPr>
+            <p:txBody>
+              <a:bodyPr/>
+              <a:lstStyle/>
+              <a:p>
+                <a:r>
+                  <a:rPr lang="zh-CN" altLang="en-US">
+                    <a:noFill/>
+                  </a:rPr>
+                  <a:t> </a:t>
+                </a:r>
+              </a:p>
+            </p:txBody>
+          </p:sp>
+        </mc:Fallback>
+      </mc:AlternateContent>
+      <mc:AlternateContent xmlns:mc="http://schemas.openxmlformats.org/markup-compatibility/2006">
+        <mc:Choice xmlns:a14="http://schemas.microsoft.com/office/drawing/2010/main" Requires="a14">
+          <p:sp>
+            <p:nvSpPr>
+              <p:cNvPr id="48" name="文本框 47">
+                <a:extLst>
+                  <a:ext uri="{FF2B5EF4-FFF2-40B4-BE49-F238E27FC236}">
+                    <a16:creationId xmlns:a16="http://schemas.microsoft.com/office/drawing/2014/main" id="{338DFF49-D0A2-3300-2311-EF9041F1A3FB}"/>
+                  </a:ext>
+                </a:extLst>
+              </p:cNvPr>
+              <p:cNvSpPr txBox="1"/>
+              <p:nvPr/>
+            </p:nvSpPr>
+            <p:spPr>
+              <a:xfrm>
+                <a:off x="9558158" y="4719915"/>
+                <a:ext cx="795386" cy="369332"/>
+              </a:xfrm>
+              <a:prstGeom prst="rect">
+                <a:avLst/>
+              </a:prstGeom>
+              <a:noFill/>
+            </p:spPr>
+            <p:txBody>
+              <a:bodyPr wrap="square">
+                <a:spAutoFit/>
+              </a:bodyPr>
+              <a:lstStyle/>
+              <a:p>
+                <a:pPr/>
+                <a14:m>
+                  <m:oMathPara xmlns:m="http://schemas.openxmlformats.org/officeDocument/2006/math">
+                    <m:oMathParaPr>
+                      <m:jc m:val="centerGroup"/>
+                    </m:oMathParaPr>
+                    <m:oMath xmlns:m="http://schemas.openxmlformats.org/officeDocument/2006/math">
+                      <m:r>
+                        <a:rPr kumimoji="1" lang="en-US" altLang="zh-CN" b="0" i="1" smtClean="0">
+                          <a:latin typeface="Cambria Math" panose="02040503050406030204" pitchFamily="18" charset="0"/>
+                        </a:rPr>
+                        <m:t>𝑋</m:t>
+                      </m:r>
+                    </m:oMath>
+                  </m:oMathPara>
+                </a14:m>
+                <a:endParaRPr lang="zh-CN" altLang="en-US" dirty="0"/>
+              </a:p>
+            </p:txBody>
+          </p:sp>
+        </mc:Choice>
+        <mc:Fallback>
+          <p:sp>
+            <p:nvSpPr>
+              <p:cNvPr id="48" name="文本框 47">
+                <a:extLst>
+                  <a:ext uri="{FF2B5EF4-FFF2-40B4-BE49-F238E27FC236}">
+                    <a16:creationId xmlns:a16="http://schemas.microsoft.com/office/drawing/2014/main" id="{338DFF49-D0A2-3300-2311-EF9041F1A3FB}"/>
+                  </a:ext>
+                </a:extLst>
+              </p:cNvPr>
+              <p:cNvSpPr txBox="1">
+                <a:spLocks noRot="1" noChangeAspect="1" noMove="1" noResize="1" noEditPoints="1" noAdjustHandles="1" noChangeArrowheads="1" noChangeShapeType="1" noTextEdit="1"/>
+              </p:cNvSpPr>
+              <p:nvPr/>
+            </p:nvSpPr>
+            <p:spPr>
+              <a:xfrm>
+                <a:off x="9558158" y="4719915"/>
+                <a:ext cx="795386" cy="369332"/>
+              </a:xfrm>
+              <a:prstGeom prst="rect">
+                <a:avLst/>
+              </a:prstGeom>
+              <a:blipFill>
+                <a:blip r:embed="rId14"/>
+                <a:stretch>
+                  <a:fillRect/>
+                </a:stretch>
+              </a:blipFill>
+            </p:spPr>
+            <p:txBody>
+              <a:bodyPr/>
+              <a:lstStyle/>
+              <a:p>
+                <a:r>
+                  <a:rPr lang="zh-CN" altLang="en-US">
+                    <a:noFill/>
+                  </a:rPr>
+                  <a:t> </a:t>
+                </a:r>
+              </a:p>
+            </p:txBody>
+          </p:sp>
+        </mc:Fallback>
+      </mc:AlternateContent>
+      <p:sp>
+        <p:nvSpPr>
+          <p:cNvPr id="50" name="乘 49">
+            <a:extLst>
+              <a:ext uri="{FF2B5EF4-FFF2-40B4-BE49-F238E27FC236}">
+                <a16:creationId xmlns:a16="http://schemas.microsoft.com/office/drawing/2014/main" id="{CDA8F05B-11F3-1C8F-2CBD-8AFEC22EEDE8}"/>
               </a:ext>
             </a:extLst>
           </p:cNvPr>
@@ -5090,30 +7021,35 @@
         </p:nvSpPr>
         <p:spPr>
           <a:xfrm>
-            <a:off x="5609752" y="6080311"/>
-            <a:ext cx="183531" cy="324948"/>
+            <a:off x="7449761" y="3075620"/>
+            <a:ext cx="385655" cy="404965"/>
           </a:xfrm>
-          <a:prstGeom prst="downArrow">
+          <a:prstGeom prst="mathMultiply">
             <a:avLst/>
           </a:prstGeom>
+          <a:solidFill>
+            <a:srgbClr val="FF0000"/>
+          </a:solidFill>
           <a:ln>
             <a:solidFill>
-              <a:schemeClr val="tx1"/>
+              <a:srgbClr val="FF0000"/>
             </a:solidFill>
           </a:ln>
         </p:spPr>
         <p:style>
           <a:lnRef idx="2">
-            <a:schemeClr val="accent6"/>
+            <a:schemeClr val="dk1">
+              <a:shade val="15000"/>
+            </a:schemeClr>
           </a:lnRef>
           <a:fillRef idx="1">
-            <a:schemeClr val="lt1"/>
+            <a:schemeClr val="dk1"/>
           </a:fillRef>
           <a:effectRef idx="0">
-            <a:schemeClr val="accent6"/>
+            <a:schemeClr val="dk1"/>
           </a:effectRef>
           <a:fontRef idx="minor">
-            <a:schemeClr val="dk1"/>
+            <a:schemeClr val="lt1"/>
           </a:fontRef>
         </p:style>
         <p:txBody>
@@ -5125,10 +7061,128 @@
           </a:p>
         </p:txBody>
       </p:sp>
+      <p:cxnSp>
+        <p:nvCxnSpPr>
+          <p:cNvPr id="53" name="直线箭头连接符 52">
+            <a:extLst>
+              <a:ext uri="{FF2B5EF4-FFF2-40B4-BE49-F238E27FC236}">
+                <a16:creationId xmlns:a16="http://schemas.microsoft.com/office/drawing/2014/main" id="{FE13F295-623F-1597-A2FB-D704BB0A5871}"/>
+              </a:ext>
+            </a:extLst>
+          </p:cNvPr>
+          <p:cNvCxnSpPr/>
+          <p:nvPr/>
+        </p:nvCxnSpPr>
+        <p:spPr>
+          <a:xfrm>
+            <a:off x="7835416" y="4922343"/>
+            <a:ext cx="647402" cy="0"/>
+          </a:xfrm>
+          <a:prstGeom prst="straightConnector1">
+            <a:avLst/>
+          </a:prstGeom>
+          <a:ln>
+            <a:tailEnd type="triangle"/>
+          </a:ln>
+        </p:spPr>
+        <p:style>
+          <a:lnRef idx="2">
+            <a:schemeClr val="dk1"/>
+          </a:lnRef>
+          <a:fillRef idx="0">
+            <a:schemeClr val="dk1"/>
+          </a:fillRef>
+          <a:effectRef idx="1">
+            <a:schemeClr val="dk1"/>
+          </a:effectRef>
+          <a:fontRef idx="minor">
+            <a:schemeClr val="tx1"/>
+          </a:fontRef>
+        </p:style>
+      </p:cxnSp>
+      <p:sp>
+        <p:nvSpPr>
+          <p:cNvPr id="54" name="文本框 53">
+            <a:extLst>
+              <a:ext uri="{FF2B5EF4-FFF2-40B4-BE49-F238E27FC236}">
+                <a16:creationId xmlns:a16="http://schemas.microsoft.com/office/drawing/2014/main" id="{D2237E1B-4EFF-55BC-FC5E-C46B182441C2}"/>
+              </a:ext>
+            </a:extLst>
+          </p:cNvPr>
+          <p:cNvSpPr txBox="1"/>
+          <p:nvPr/>
+        </p:nvSpPr>
+        <p:spPr>
+          <a:xfrm>
+            <a:off x="7792922" y="4497548"/>
+            <a:ext cx="672775" cy="369332"/>
+          </a:xfrm>
+          <a:prstGeom prst="rect">
+            <a:avLst/>
+          </a:prstGeom>
+          <a:noFill/>
+        </p:spPr>
+        <p:txBody>
+          <a:bodyPr wrap="square" rtlCol="0">
+            <a:spAutoFit/>
+          </a:bodyPr>
+          <a:lstStyle/>
+          <a:p>
+            <a:r>
+              <a:rPr kumimoji="1" lang="zh-CN" altLang="en-US" dirty="0">
+                <a:latin typeface="SimSun" panose="02010600030101010101" pitchFamily="2" charset="-122"/>
+                <a:ea typeface="SimSun" panose="02010600030101010101" pitchFamily="2" charset="-122"/>
+              </a:rPr>
+              <a:t>译码</a:t>
+            </a:r>
+          </a:p>
+        </p:txBody>
+      </p:sp>
+      <p:cxnSp>
+        <p:nvCxnSpPr>
+          <p:cNvPr id="55" name="直线箭头连接符 54">
+            <a:extLst>
+              <a:ext uri="{FF2B5EF4-FFF2-40B4-BE49-F238E27FC236}">
+                <a16:creationId xmlns:a16="http://schemas.microsoft.com/office/drawing/2014/main" id="{57FB7056-2A60-9344-9E8D-13FF6A5E9F57}"/>
+              </a:ext>
+            </a:extLst>
+          </p:cNvPr>
+          <p:cNvCxnSpPr>
+            <a:cxnSpLocks/>
+          </p:cNvCxnSpPr>
+          <p:nvPr/>
+        </p:nvCxnSpPr>
+        <p:spPr>
+          <a:xfrm>
+            <a:off x="9337430" y="4904581"/>
+            <a:ext cx="397693" cy="0"/>
+          </a:xfrm>
+          <a:prstGeom prst="straightConnector1">
+            <a:avLst/>
+          </a:prstGeom>
+          <a:ln>
+            <a:tailEnd type="triangle"/>
+          </a:ln>
+        </p:spPr>
+        <p:style>
+          <a:lnRef idx="2">
+            <a:schemeClr val="dk1"/>
+          </a:lnRef>
+          <a:fillRef idx="0">
+            <a:schemeClr val="dk1"/>
+          </a:fillRef>
+          <a:effectRef idx="1">
+            <a:schemeClr val="dk1"/>
+          </a:effectRef>
+          <a:fontRef idx="minor">
+            <a:schemeClr val="tx1"/>
+          </a:fontRef>
+        </p:style>
+      </p:cxnSp>
     </p:spTree>
     <p:extLst>
       <p:ext uri="{BB962C8B-B14F-4D97-AF65-F5344CB8AC3E}">
-        <p14:creationId xmlns:p14="http://schemas.microsoft.com/office/powerpoint/2010/main" val="151063987"/>
+        <p14:creationId xmlns:p14="http://schemas.microsoft.com/office/powerpoint/2010/main" val="1328046401"/>
       </p:ext>
     </p:extLst>
   </p:cSld>

--- a/毕业论文draw.pptx
+++ b/毕业论文draw.pptx
@@ -7,6 +7,7 @@
   <p:sldIdLst>
     <p:sldId id="256" r:id="rId2"/>
     <p:sldId id="257" r:id="rId3"/>
+    <p:sldId id="258" r:id="rId4"/>
   </p:sldIdLst>
   <p:sldSz cx="12192000" cy="6858000"/>
   <p:notesSz cx="6858000" cy="9144000"/>
@@ -105,6 +106,11 @@
       </a:defRPr>
     </a:lvl9pPr>
   </p:defaultTextStyle>
+  <p:extLst>
+    <p:ext uri="{EFAFB233-063F-42B5-8137-9DF3F51BA10A}">
+      <p15:sldGuideLst xmlns:p15="http://schemas.microsoft.com/office/powerpoint/2012/main"/>
+    </p:ext>
+  </p:extLst>
 </p:presentation>
 </file>
 
@@ -255,7 +261,7 @@
           <a:p>
             <a:fld id="{74ADC0D0-B9B3-6A40-88E8-A1B75264887A}" type="datetimeFigureOut">
               <a:rPr kumimoji="1" lang="zh-CN" altLang="en-US" smtClean="0"/>
-              <a:t>2026/3/2</a:t>
+              <a:t>2026/3/30</a:t>
             </a:fld>
             <a:endParaRPr kumimoji="1" lang="zh-CN" altLang="en-US"/>
           </a:p>
@@ -453,7 +459,7 @@
           <a:p>
             <a:fld id="{74ADC0D0-B9B3-6A40-88E8-A1B75264887A}" type="datetimeFigureOut">
               <a:rPr kumimoji="1" lang="zh-CN" altLang="en-US" smtClean="0"/>
-              <a:t>2026/3/2</a:t>
+              <a:t>2026/3/30</a:t>
             </a:fld>
             <a:endParaRPr kumimoji="1" lang="zh-CN" altLang="en-US"/>
           </a:p>
@@ -661,7 +667,7 @@
           <a:p>
             <a:fld id="{74ADC0D0-B9B3-6A40-88E8-A1B75264887A}" type="datetimeFigureOut">
               <a:rPr kumimoji="1" lang="zh-CN" altLang="en-US" smtClean="0"/>
-              <a:t>2026/3/2</a:t>
+              <a:t>2026/3/30</a:t>
             </a:fld>
             <a:endParaRPr kumimoji="1" lang="zh-CN" altLang="en-US"/>
           </a:p>
@@ -859,7 +865,7 @@
           <a:p>
             <a:fld id="{74ADC0D0-B9B3-6A40-88E8-A1B75264887A}" type="datetimeFigureOut">
               <a:rPr kumimoji="1" lang="zh-CN" altLang="en-US" smtClean="0"/>
-              <a:t>2026/3/2</a:t>
+              <a:t>2026/3/30</a:t>
             </a:fld>
             <a:endParaRPr kumimoji="1" lang="zh-CN" altLang="en-US"/>
           </a:p>
@@ -1134,7 +1140,7 @@
           <a:p>
             <a:fld id="{74ADC0D0-B9B3-6A40-88E8-A1B75264887A}" type="datetimeFigureOut">
               <a:rPr kumimoji="1" lang="zh-CN" altLang="en-US" smtClean="0"/>
-              <a:t>2026/3/2</a:t>
+              <a:t>2026/3/30</a:t>
             </a:fld>
             <a:endParaRPr kumimoji="1" lang="zh-CN" altLang="en-US"/>
           </a:p>
@@ -1399,7 +1405,7 @@
           <a:p>
             <a:fld id="{74ADC0D0-B9B3-6A40-88E8-A1B75264887A}" type="datetimeFigureOut">
               <a:rPr kumimoji="1" lang="zh-CN" altLang="en-US" smtClean="0"/>
-              <a:t>2026/3/2</a:t>
+              <a:t>2026/3/30</a:t>
             </a:fld>
             <a:endParaRPr kumimoji="1" lang="zh-CN" altLang="en-US"/>
           </a:p>
@@ -1811,7 +1817,7 @@
           <a:p>
             <a:fld id="{74ADC0D0-B9B3-6A40-88E8-A1B75264887A}" type="datetimeFigureOut">
               <a:rPr kumimoji="1" lang="zh-CN" altLang="en-US" smtClean="0"/>
-              <a:t>2026/3/2</a:t>
+              <a:t>2026/3/30</a:t>
             </a:fld>
             <a:endParaRPr kumimoji="1" lang="zh-CN" altLang="en-US"/>
           </a:p>
@@ -1952,7 +1958,7 @@
           <a:p>
             <a:fld id="{74ADC0D0-B9B3-6A40-88E8-A1B75264887A}" type="datetimeFigureOut">
               <a:rPr kumimoji="1" lang="zh-CN" altLang="en-US" smtClean="0"/>
-              <a:t>2026/3/2</a:t>
+              <a:t>2026/3/30</a:t>
             </a:fld>
             <a:endParaRPr kumimoji="1" lang="zh-CN" altLang="en-US"/>
           </a:p>
@@ -2065,7 +2071,7 @@
           <a:p>
             <a:fld id="{74ADC0D0-B9B3-6A40-88E8-A1B75264887A}" type="datetimeFigureOut">
               <a:rPr kumimoji="1" lang="zh-CN" altLang="en-US" smtClean="0"/>
-              <a:t>2026/3/2</a:t>
+              <a:t>2026/3/30</a:t>
             </a:fld>
             <a:endParaRPr kumimoji="1" lang="zh-CN" altLang="en-US"/>
           </a:p>
@@ -2376,7 +2382,7 @@
           <a:p>
             <a:fld id="{74ADC0D0-B9B3-6A40-88E8-A1B75264887A}" type="datetimeFigureOut">
               <a:rPr kumimoji="1" lang="zh-CN" altLang="en-US" smtClean="0"/>
-              <a:t>2026/3/2</a:t>
+              <a:t>2026/3/30</a:t>
             </a:fld>
             <a:endParaRPr kumimoji="1" lang="zh-CN" altLang="en-US"/>
           </a:p>
@@ -2664,7 +2670,7 @@
           <a:p>
             <a:fld id="{74ADC0D0-B9B3-6A40-88E8-A1B75264887A}" type="datetimeFigureOut">
               <a:rPr kumimoji="1" lang="zh-CN" altLang="en-US" smtClean="0"/>
-              <a:t>2026/3/2</a:t>
+              <a:t>2026/3/30</a:t>
             </a:fld>
             <a:endParaRPr kumimoji="1" lang="zh-CN" altLang="en-US"/>
           </a:p>
@@ -2905,7 +2911,7 @@
           <a:p>
             <a:fld id="{74ADC0D0-B9B3-6A40-88E8-A1B75264887A}" type="datetimeFigureOut">
               <a:rPr kumimoji="1" lang="zh-CN" altLang="en-US" smtClean="0"/>
-              <a:t>2026/3/2</a:t>
+              <a:t>2026/3/30</a:t>
             </a:fld>
             <a:endParaRPr kumimoji="1" lang="zh-CN" altLang="en-US"/>
           </a:p>
@@ -5520,8 +5526,8 @@
           </a:fontRef>
         </p:style>
       </p:cxnSp>
-      <mc:AlternateContent xmlns:mc="http://schemas.openxmlformats.org/markup-compatibility/2006">
-        <mc:Choice xmlns:a14="http://schemas.microsoft.com/office/drawing/2010/main" Requires="a14">
+      <mc:AlternateContent xmlns:mc="http://schemas.openxmlformats.org/markup-compatibility/2006" xmlns:a14="http://schemas.microsoft.com/office/drawing/2010/main">
+        <mc:Choice Requires="a14">
           <p:sp>
             <p:nvSpPr>
               <p:cNvPr id="31" name="文本框 30">
@@ -5550,6 +5556,7 @@
               </a:bodyPr>
               <a:lstStyle/>
               <a:p>
+                <a:pPr/>
                 <a14:m>
                   <m:oMathPara xmlns:m="http://schemas.openxmlformats.org/officeDocument/2006/math">
                     <m:oMathParaPr>
@@ -5656,7 +5663,7 @@
             </p:txBody>
           </p:sp>
         </mc:Choice>
-        <mc:Fallback>
+        <mc:Fallback xmlns="">
           <p:sp>
             <p:nvSpPr>
               <p:cNvPr id="31" name="文本框 30">
@@ -5701,8 +5708,8 @@
           </p:sp>
         </mc:Fallback>
       </mc:AlternateContent>
-      <mc:AlternateContent xmlns:mc="http://schemas.openxmlformats.org/markup-compatibility/2006">
-        <mc:Choice xmlns:a14="http://schemas.microsoft.com/office/drawing/2010/main" Requires="a14">
+      <mc:AlternateContent xmlns:mc="http://schemas.openxmlformats.org/markup-compatibility/2006" xmlns:a14="http://schemas.microsoft.com/office/drawing/2010/main">
+        <mc:Choice Requires="a14">
           <p:sp>
             <p:nvSpPr>
               <p:cNvPr id="32" name="文本框 31">
@@ -5775,7 +5782,7 @@
             </p:txBody>
           </p:sp>
         </mc:Choice>
-        <mc:Fallback>
+        <mc:Fallback xmlns="">
           <p:sp>
             <p:nvSpPr>
               <p:cNvPr id="32" name="文本框 31">
@@ -5820,8 +5827,8 @@
           </p:sp>
         </mc:Fallback>
       </mc:AlternateContent>
-      <mc:AlternateContent xmlns:mc="http://schemas.openxmlformats.org/markup-compatibility/2006">
-        <mc:Choice xmlns:a14="http://schemas.microsoft.com/office/drawing/2010/main" Requires="a14">
+      <mc:AlternateContent xmlns:mc="http://schemas.openxmlformats.org/markup-compatibility/2006" xmlns:a14="http://schemas.microsoft.com/office/drawing/2010/main">
+        <mc:Choice Requires="a14">
           <p:sp>
             <p:nvSpPr>
               <p:cNvPr id="33" name="文本框 32">
@@ -5894,7 +5901,7 @@
             </p:txBody>
           </p:sp>
         </mc:Choice>
-        <mc:Fallback>
+        <mc:Fallback xmlns="">
           <p:sp>
             <p:nvSpPr>
               <p:cNvPr id="33" name="文本框 32">
@@ -5939,8 +5946,8 @@
           </p:sp>
         </mc:Fallback>
       </mc:AlternateContent>
-      <mc:AlternateContent xmlns:mc="http://schemas.openxmlformats.org/markup-compatibility/2006">
-        <mc:Choice xmlns:a14="http://schemas.microsoft.com/office/drawing/2010/main" Requires="a14">
+      <mc:AlternateContent xmlns:mc="http://schemas.openxmlformats.org/markup-compatibility/2006" xmlns:a14="http://schemas.microsoft.com/office/drawing/2010/main">
+        <mc:Choice Requires="a14">
           <p:sp>
             <p:nvSpPr>
               <p:cNvPr id="34" name="文本框 33">
@@ -6013,7 +6020,7 @@
             </p:txBody>
           </p:sp>
         </mc:Choice>
-        <mc:Fallback>
+        <mc:Fallback xmlns="">
           <p:sp>
             <p:nvSpPr>
               <p:cNvPr id="34" name="文本框 33">
@@ -6058,8 +6065,8 @@
           </p:sp>
         </mc:Fallback>
       </mc:AlternateContent>
-      <mc:AlternateContent xmlns:mc="http://schemas.openxmlformats.org/markup-compatibility/2006">
-        <mc:Choice xmlns:a14="http://schemas.microsoft.com/office/drawing/2010/main" Requires="a14">
+      <mc:AlternateContent xmlns:mc="http://schemas.openxmlformats.org/markup-compatibility/2006" xmlns:a14="http://schemas.microsoft.com/office/drawing/2010/main">
+        <mc:Choice Requires="a14">
           <p:sp>
             <p:nvSpPr>
               <p:cNvPr id="35" name="文本框 34">
@@ -6132,7 +6139,7 @@
             </p:txBody>
           </p:sp>
         </mc:Choice>
-        <mc:Fallback>
+        <mc:Fallback xmlns="">
           <p:sp>
             <p:nvSpPr>
               <p:cNvPr id="35" name="文本框 34">
@@ -6376,8 +6383,8 @@
           </a:p>
         </p:txBody>
       </p:sp>
-      <mc:AlternateContent xmlns:mc="http://schemas.openxmlformats.org/markup-compatibility/2006">
-        <mc:Choice xmlns:a14="http://schemas.microsoft.com/office/drawing/2010/main" Requires="a14">
+      <mc:AlternateContent xmlns:mc="http://schemas.openxmlformats.org/markup-compatibility/2006" xmlns:a14="http://schemas.microsoft.com/office/drawing/2010/main">
+        <mc:Choice Requires="a14">
           <p:sp>
             <p:nvSpPr>
               <p:cNvPr id="41" name="文本框 40">
@@ -6406,7 +6413,6 @@
               </a:bodyPr>
               <a:lstStyle/>
               <a:p>
-                <a:pPr/>
                 <a:r>
                   <a:rPr kumimoji="1" lang="zh-CN" altLang="en-US" b="0" dirty="0">
                     <a:latin typeface="SimSun" panose="02010600030101010101" pitchFamily="2" charset="-122"/>
@@ -6448,7 +6454,7 @@
             </p:txBody>
           </p:sp>
         </mc:Choice>
-        <mc:Fallback>
+        <mc:Fallback xmlns="">
           <p:sp>
             <p:nvSpPr>
               <p:cNvPr id="41" name="文本框 40">
@@ -6493,8 +6499,8 @@
           </p:sp>
         </mc:Fallback>
       </mc:AlternateContent>
-      <mc:AlternateContent xmlns:mc="http://schemas.openxmlformats.org/markup-compatibility/2006">
-        <mc:Choice xmlns:a14="http://schemas.microsoft.com/office/drawing/2010/main" Requires="a14">
+      <mc:AlternateContent xmlns:mc="http://schemas.openxmlformats.org/markup-compatibility/2006" xmlns:a14="http://schemas.microsoft.com/office/drawing/2010/main">
+        <mc:Choice Requires="a14">
           <p:sp>
             <p:nvSpPr>
               <p:cNvPr id="43" name="文本框 42">
@@ -6523,7 +6529,6 @@
               </a:bodyPr>
               <a:lstStyle/>
               <a:p>
-                <a:pPr/>
                 <a:r>
                   <a:rPr kumimoji="1" lang="zh-CN" altLang="en-US" b="0" dirty="0">
                     <a:latin typeface="SimSun" panose="02010600030101010101" pitchFamily="2" charset="-122"/>
@@ -6565,7 +6570,7 @@
             </p:txBody>
           </p:sp>
         </mc:Choice>
-        <mc:Fallback>
+        <mc:Fallback xmlns="">
           <p:sp>
             <p:nvSpPr>
               <p:cNvPr id="43" name="文本框 42">
@@ -6610,8 +6615,8 @@
           </p:sp>
         </mc:Fallback>
       </mc:AlternateContent>
-      <mc:AlternateContent xmlns:mc="http://schemas.openxmlformats.org/markup-compatibility/2006">
-        <mc:Choice xmlns:a14="http://schemas.microsoft.com/office/drawing/2010/main" Requires="a14">
+      <mc:AlternateContent xmlns:mc="http://schemas.openxmlformats.org/markup-compatibility/2006" xmlns:a14="http://schemas.microsoft.com/office/drawing/2010/main">
+        <mc:Choice Requires="a14">
           <p:sp>
             <p:nvSpPr>
               <p:cNvPr id="44" name="文本框 43">
@@ -6640,7 +6645,6 @@
               </a:bodyPr>
               <a:lstStyle/>
               <a:p>
-                <a:pPr/>
                 <a:r>
                   <a:rPr kumimoji="1" lang="zh-CN" altLang="en-US" b="0" dirty="0">
                     <a:latin typeface="SimSun" panose="02010600030101010101" pitchFamily="2" charset="-122"/>
@@ -6682,7 +6686,7 @@
             </p:txBody>
           </p:sp>
         </mc:Choice>
-        <mc:Fallback>
+        <mc:Fallback xmlns="">
           <p:sp>
             <p:nvSpPr>
               <p:cNvPr id="44" name="文本框 43">
@@ -6727,8 +6731,8 @@
           </p:sp>
         </mc:Fallback>
       </mc:AlternateContent>
-      <mc:AlternateContent xmlns:mc="http://schemas.openxmlformats.org/markup-compatibility/2006">
-        <mc:Choice xmlns:a14="http://schemas.microsoft.com/office/drawing/2010/main" Requires="a14">
+      <mc:AlternateContent xmlns:mc="http://schemas.openxmlformats.org/markup-compatibility/2006" xmlns:a14="http://schemas.microsoft.com/office/drawing/2010/main">
+        <mc:Choice Requires="a14">
           <p:sp>
             <p:nvSpPr>
               <p:cNvPr id="46" name="文本框 45">
@@ -6757,6 +6761,7 @@
               </a:bodyPr>
               <a:lstStyle/>
               <a:p>
+                <a:pPr/>
                 <a14:m>
                   <m:oMathPara xmlns:m="http://schemas.openxmlformats.org/officeDocument/2006/math">
                     <m:oMathParaPr>
@@ -6866,7 +6871,7 @@
             </p:txBody>
           </p:sp>
         </mc:Choice>
-        <mc:Fallback>
+        <mc:Fallback xmlns="">
           <p:sp>
             <p:nvSpPr>
               <p:cNvPr id="46" name="文本框 45">
@@ -6911,8 +6916,8 @@
           </p:sp>
         </mc:Fallback>
       </mc:AlternateContent>
-      <mc:AlternateContent xmlns:mc="http://schemas.openxmlformats.org/markup-compatibility/2006">
-        <mc:Choice xmlns:a14="http://schemas.microsoft.com/office/drawing/2010/main" Requires="a14">
+      <mc:AlternateContent xmlns:mc="http://schemas.openxmlformats.org/markup-compatibility/2006" xmlns:a14="http://schemas.microsoft.com/office/drawing/2010/main">
+        <mc:Choice Requires="a14">
           <p:sp>
             <p:nvSpPr>
               <p:cNvPr id="48" name="文本框 47">
@@ -6962,7 +6967,7 @@
             </p:txBody>
           </p:sp>
         </mc:Choice>
-        <mc:Fallback>
+        <mc:Fallback xmlns="">
           <p:sp>
             <p:nvSpPr>
               <p:cNvPr id="48" name="文本框 47">
@@ -7183,6 +7188,2550 @@
     <p:extLst>
       <p:ext uri="{BB962C8B-B14F-4D97-AF65-F5344CB8AC3E}">
         <p14:creationId xmlns:p14="http://schemas.microsoft.com/office/powerpoint/2010/main" val="1328046401"/>
+      </p:ext>
+    </p:extLst>
+  </p:cSld>
+  <p:clrMapOvr>
+    <a:masterClrMapping/>
+  </p:clrMapOvr>
+</p:sld>
+</file>
+
+<file path=ppt/slides/slide3.xml><?xml version="1.0" encoding="utf-8"?>
+<p:sld xmlns:a="http://schemas.openxmlformats.org/drawingml/2006/main" xmlns:r="http://schemas.openxmlformats.org/officeDocument/2006/relationships" xmlns:p="http://schemas.openxmlformats.org/presentationml/2006/main">
+  <p:cSld>
+    <p:spTree>
+      <p:nvGrpSpPr>
+        <p:cNvPr id="1" name="">
+          <a:extLst>
+            <a:ext uri="{FF2B5EF4-FFF2-40B4-BE49-F238E27FC236}">
+              <a16:creationId xmlns:a16="http://schemas.microsoft.com/office/drawing/2014/main" id="{624412FC-BCD3-7C29-5D06-96C0D6B6CDAD}"/>
+            </a:ext>
+          </a:extLst>
+        </p:cNvPr>
+        <p:cNvGrpSpPr/>
+        <p:nvPr/>
+      </p:nvGrpSpPr>
+      <p:grpSpPr>
+        <a:xfrm>
+          <a:off x="0" y="0"/>
+          <a:ext cx="0" cy="0"/>
+          <a:chOff x="0" y="0"/>
+          <a:chExt cx="0" cy="0"/>
+        </a:xfrm>
+      </p:grpSpPr>
+      <p:grpSp>
+        <p:nvGrpSpPr>
+          <p:cNvPr id="52" name="组合 51">
+            <a:extLst>
+              <a:ext uri="{FF2B5EF4-FFF2-40B4-BE49-F238E27FC236}">
+                <a16:creationId xmlns:a16="http://schemas.microsoft.com/office/drawing/2014/main" id="{67FEF53A-71A4-D072-22CE-85AA9189338A}"/>
+              </a:ext>
+            </a:extLst>
+          </p:cNvPr>
+          <p:cNvGrpSpPr/>
+          <p:nvPr/>
+        </p:nvGrpSpPr>
+        <p:grpSpPr>
+          <a:xfrm>
+            <a:off x="3053645" y="363402"/>
+            <a:ext cx="7863773" cy="5413955"/>
+            <a:chOff x="3053645" y="363402"/>
+            <a:chExt cx="7863773" cy="5413955"/>
+          </a:xfrm>
+        </p:grpSpPr>
+        <p:pic>
+          <p:nvPicPr>
+            <p:cNvPr id="7" name="图片 6" descr="图标&#10;&#10;AI 生成的内容可能不正确。">
+              <a:extLst>
+                <a:ext uri="{FF2B5EF4-FFF2-40B4-BE49-F238E27FC236}">
+                  <a16:creationId xmlns:a16="http://schemas.microsoft.com/office/drawing/2014/main" id="{FD97EC4F-0B2A-3895-5650-463F0EA7BC70}"/>
+                </a:ext>
+              </a:extLst>
+            </p:cNvPr>
+            <p:cNvPicPr>
+              <a:picLocks noChangeAspect="1"/>
+            </p:cNvPicPr>
+            <p:nvPr/>
+          </p:nvPicPr>
+          <p:blipFill>
+            <a:blip r:embed="rId2"/>
+            <a:stretch>
+              <a:fillRect/>
+            </a:stretch>
+          </p:blipFill>
+          <p:spPr>
+            <a:xfrm>
+              <a:off x="3053645" y="1823154"/>
+              <a:ext cx="970845" cy="970845"/>
+            </a:xfrm>
+            <a:prstGeom prst="rect">
+              <a:avLst/>
+            </a:prstGeom>
+          </p:spPr>
+        </p:pic>
+        <p:pic>
+          <p:nvPicPr>
+            <p:cNvPr id="8" name="图片 7" descr="图标&#10;&#10;AI 生成的内容可能不正确。">
+              <a:extLst>
+                <a:ext uri="{FF2B5EF4-FFF2-40B4-BE49-F238E27FC236}">
+                  <a16:creationId xmlns:a16="http://schemas.microsoft.com/office/drawing/2014/main" id="{DFDAE7B1-8E15-BC27-99EF-5CA4B963467E}"/>
+                </a:ext>
+              </a:extLst>
+            </p:cNvPr>
+            <p:cNvPicPr>
+              <a:picLocks noChangeAspect="1"/>
+            </p:cNvPicPr>
+            <p:nvPr/>
+          </p:nvPicPr>
+          <p:blipFill>
+            <a:blip r:embed="rId2"/>
+            <a:stretch>
+              <a:fillRect/>
+            </a:stretch>
+          </p:blipFill>
+          <p:spPr>
+            <a:xfrm>
+              <a:off x="5235222" y="1506314"/>
+              <a:ext cx="970845" cy="970845"/>
+            </a:xfrm>
+            <a:prstGeom prst="rect">
+              <a:avLst/>
+            </a:prstGeom>
+          </p:spPr>
+        </p:pic>
+        <p:pic>
+          <p:nvPicPr>
+            <p:cNvPr id="9" name="图片 8" descr="图标&#10;&#10;AI 生成的内容可能不正确。">
+              <a:extLst>
+                <a:ext uri="{FF2B5EF4-FFF2-40B4-BE49-F238E27FC236}">
+                  <a16:creationId xmlns:a16="http://schemas.microsoft.com/office/drawing/2014/main" id="{70A452E4-3BA6-72F5-C35B-DCEDBDB4C04F}"/>
+                </a:ext>
+              </a:extLst>
+            </p:cNvPr>
+            <p:cNvPicPr>
+              <a:picLocks noChangeAspect="1"/>
+            </p:cNvPicPr>
+            <p:nvPr/>
+          </p:nvPicPr>
+          <p:blipFill>
+            <a:blip r:embed="rId2"/>
+            <a:stretch>
+              <a:fillRect/>
+            </a:stretch>
+          </p:blipFill>
+          <p:spPr>
+            <a:xfrm>
+              <a:off x="7219242" y="1754209"/>
+              <a:ext cx="970845" cy="970845"/>
+            </a:xfrm>
+            <a:prstGeom prst="rect">
+              <a:avLst/>
+            </a:prstGeom>
+          </p:spPr>
+        </p:pic>
+        <p:pic>
+          <p:nvPicPr>
+            <p:cNvPr id="12" name="图片 11" descr="图标&#10;&#10;AI 生成的内容可能不正确。">
+              <a:extLst>
+                <a:ext uri="{FF2B5EF4-FFF2-40B4-BE49-F238E27FC236}">
+                  <a16:creationId xmlns:a16="http://schemas.microsoft.com/office/drawing/2014/main" id="{7B72A99E-0811-7E27-79BC-EF2F45D98CFF}"/>
+                </a:ext>
+              </a:extLst>
+            </p:cNvPr>
+            <p:cNvPicPr>
+              <a:picLocks noChangeAspect="1"/>
+            </p:cNvPicPr>
+            <p:nvPr/>
+          </p:nvPicPr>
+          <p:blipFill>
+            <a:blip r:embed="rId3"/>
+            <a:stretch>
+              <a:fillRect/>
+            </a:stretch>
+          </p:blipFill>
+          <p:spPr>
+            <a:xfrm>
+              <a:off x="6364111" y="4699002"/>
+              <a:ext cx="572911" cy="572911"/>
+            </a:xfrm>
+            <a:prstGeom prst="rect">
+              <a:avLst/>
+            </a:prstGeom>
+          </p:spPr>
+        </p:pic>
+        <p:pic>
+          <p:nvPicPr>
+            <p:cNvPr id="14" name="图片 13" descr="图标&#10;&#10;AI 生成的内容可能不正确。">
+              <a:extLst>
+                <a:ext uri="{FF2B5EF4-FFF2-40B4-BE49-F238E27FC236}">
+                  <a16:creationId xmlns:a16="http://schemas.microsoft.com/office/drawing/2014/main" id="{C4EC47F6-16B2-4B92-7001-F968420AEDA1}"/>
+                </a:ext>
+              </a:extLst>
+            </p:cNvPr>
+            <p:cNvPicPr>
+              <a:picLocks noChangeAspect="1"/>
+            </p:cNvPicPr>
+            <p:nvPr/>
+          </p:nvPicPr>
+          <p:blipFill>
+            <a:blip r:embed="rId4"/>
+            <a:stretch>
+              <a:fillRect/>
+            </a:stretch>
+          </p:blipFill>
+          <p:spPr>
+            <a:xfrm>
+              <a:off x="5192890" y="4064002"/>
+              <a:ext cx="1270000" cy="1270000"/>
+            </a:xfrm>
+            <a:prstGeom prst="rect">
+              <a:avLst/>
+            </a:prstGeom>
+          </p:spPr>
+        </p:pic>
+        <p:cxnSp>
+          <p:nvCxnSpPr>
+            <p:cNvPr id="16" name="直线箭头连接符 15">
+              <a:extLst>
+                <a:ext uri="{FF2B5EF4-FFF2-40B4-BE49-F238E27FC236}">
+                  <a16:creationId xmlns:a16="http://schemas.microsoft.com/office/drawing/2014/main" id="{E68292BB-3B17-602F-F6AA-007ABDB24479}"/>
+                </a:ext>
+              </a:extLst>
+            </p:cNvPr>
+            <p:cNvCxnSpPr>
+              <a:cxnSpLocks/>
+            </p:cNvCxnSpPr>
+            <p:nvPr/>
+          </p:nvCxnSpPr>
+          <p:spPr>
+            <a:xfrm>
+              <a:off x="3894667" y="2793998"/>
+              <a:ext cx="1718734" cy="1270004"/>
+            </a:xfrm>
+            <a:prstGeom prst="straightConnector1">
+              <a:avLst/>
+            </a:prstGeom>
+            <a:ln>
+              <a:tailEnd type="triangle"/>
+            </a:ln>
+          </p:spPr>
+          <p:style>
+            <a:lnRef idx="2">
+              <a:schemeClr val="dk1"/>
+            </a:lnRef>
+            <a:fillRef idx="0">
+              <a:schemeClr val="dk1"/>
+            </a:fillRef>
+            <a:effectRef idx="1">
+              <a:schemeClr val="dk1"/>
+            </a:effectRef>
+            <a:fontRef idx="minor">
+              <a:schemeClr val="tx1"/>
+            </a:fontRef>
+          </p:style>
+        </p:cxnSp>
+        <p:cxnSp>
+          <p:nvCxnSpPr>
+            <p:cNvPr id="18" name="直线箭头连接符 17">
+              <a:extLst>
+                <a:ext uri="{FF2B5EF4-FFF2-40B4-BE49-F238E27FC236}">
+                  <a16:creationId xmlns:a16="http://schemas.microsoft.com/office/drawing/2014/main" id="{DED90E74-B890-519C-90C8-AD81DDE66041}"/>
+                </a:ext>
+              </a:extLst>
+            </p:cNvPr>
+            <p:cNvCxnSpPr>
+              <a:cxnSpLocks/>
+            </p:cNvCxnSpPr>
+            <p:nvPr/>
+          </p:nvCxnSpPr>
+          <p:spPr>
+            <a:xfrm flipH="1">
+              <a:off x="5994400" y="2744939"/>
+              <a:ext cx="1329269" cy="1256974"/>
+            </a:xfrm>
+            <a:prstGeom prst="straightConnector1">
+              <a:avLst/>
+            </a:prstGeom>
+            <a:ln>
+              <a:tailEnd type="triangle"/>
+            </a:ln>
+          </p:spPr>
+          <p:style>
+            <a:lnRef idx="2">
+              <a:schemeClr val="dk1"/>
+            </a:lnRef>
+            <a:fillRef idx="0">
+              <a:schemeClr val="dk1"/>
+            </a:fillRef>
+            <a:effectRef idx="1">
+              <a:schemeClr val="dk1"/>
+            </a:effectRef>
+            <a:fontRef idx="minor">
+              <a:schemeClr val="tx1"/>
+            </a:fontRef>
+          </p:style>
+        </p:cxnSp>
+        <p:cxnSp>
+          <p:nvCxnSpPr>
+            <p:cNvPr id="25" name="直线箭头连接符 24">
+              <a:extLst>
+                <a:ext uri="{FF2B5EF4-FFF2-40B4-BE49-F238E27FC236}">
+                  <a16:creationId xmlns:a16="http://schemas.microsoft.com/office/drawing/2014/main" id="{8CA2F959-DC95-62F4-7C32-529FFC33AE05}"/>
+                </a:ext>
+              </a:extLst>
+            </p:cNvPr>
+            <p:cNvCxnSpPr>
+              <a:cxnSpLocks/>
+              <a:endCxn id="14" idx="0"/>
+            </p:cNvCxnSpPr>
+            <p:nvPr/>
+          </p:nvCxnSpPr>
+          <p:spPr>
+            <a:xfrm>
+              <a:off x="5750278" y="2588174"/>
+              <a:ext cx="77612" cy="1475828"/>
+            </a:xfrm>
+            <a:prstGeom prst="straightConnector1">
+              <a:avLst/>
+            </a:prstGeom>
+            <a:ln>
+              <a:tailEnd type="triangle"/>
+            </a:ln>
+          </p:spPr>
+          <p:style>
+            <a:lnRef idx="2">
+              <a:schemeClr val="dk1"/>
+            </a:lnRef>
+            <a:fillRef idx="0">
+              <a:schemeClr val="dk1"/>
+            </a:fillRef>
+            <a:effectRef idx="1">
+              <a:schemeClr val="dk1"/>
+            </a:effectRef>
+            <a:fontRef idx="minor">
+              <a:schemeClr val="tx1"/>
+            </a:fontRef>
+          </p:style>
+        </p:cxnSp>
+        <p:sp>
+          <p:nvSpPr>
+            <p:cNvPr id="36" name="文本框 35">
+              <a:extLst>
+                <a:ext uri="{FF2B5EF4-FFF2-40B4-BE49-F238E27FC236}">
+                  <a16:creationId xmlns:a16="http://schemas.microsoft.com/office/drawing/2014/main" id="{4BF0939D-DE71-49C2-927D-C130DD8FECD6}"/>
+                </a:ext>
+              </a:extLst>
+            </p:cNvPr>
+            <p:cNvSpPr txBox="1"/>
+            <p:nvPr/>
+          </p:nvSpPr>
+          <p:spPr>
+            <a:xfrm>
+              <a:off x="3090336" y="2910088"/>
+              <a:ext cx="841022" cy="369332"/>
+            </a:xfrm>
+            <a:prstGeom prst="rect">
+              <a:avLst/>
+            </a:prstGeom>
+            <a:noFill/>
+          </p:spPr>
+          <p:txBody>
+            <a:bodyPr wrap="square" rtlCol="0">
+              <a:spAutoFit/>
+            </a:bodyPr>
+            <a:lstStyle/>
+            <a:p>
+              <a:r>
+                <a:rPr kumimoji="1" lang="zh-CN" altLang="en-US" dirty="0">
+                  <a:latin typeface="SimSun" panose="02010600030101010101" pitchFamily="2" charset="-122"/>
+                  <a:ea typeface="SimSun" panose="02010600030101010101" pitchFamily="2" charset="-122"/>
+                </a:rPr>
+                <a:t>节点</a:t>
+              </a:r>
+              <a:r>
+                <a:rPr kumimoji="1" lang="en-US" altLang="zh-CN" dirty="0">
+                  <a:latin typeface="SimSun" panose="02010600030101010101" pitchFamily="2" charset="-122"/>
+                  <a:ea typeface="SimSun" panose="02010600030101010101" pitchFamily="2" charset="-122"/>
+                </a:rPr>
+                <a:t>1</a:t>
+              </a:r>
+              <a:endParaRPr kumimoji="1" lang="zh-CN" altLang="en-US" dirty="0">
+                <a:latin typeface="SimSun" panose="02010600030101010101" pitchFamily="2" charset="-122"/>
+                <a:ea typeface="SimSun" panose="02010600030101010101" pitchFamily="2" charset="-122"/>
+              </a:endParaRPr>
+            </a:p>
+          </p:txBody>
+        </p:sp>
+        <p:sp>
+          <p:nvSpPr>
+            <p:cNvPr id="37" name="文本框 36">
+              <a:extLst>
+                <a:ext uri="{FF2B5EF4-FFF2-40B4-BE49-F238E27FC236}">
+                  <a16:creationId xmlns:a16="http://schemas.microsoft.com/office/drawing/2014/main" id="{FCA02694-3595-8A62-DA76-1D815B07B587}"/>
+                </a:ext>
+              </a:extLst>
+            </p:cNvPr>
+            <p:cNvSpPr txBox="1"/>
+            <p:nvPr/>
+          </p:nvSpPr>
+          <p:spPr>
+            <a:xfrm>
+              <a:off x="5789084" y="2490458"/>
+              <a:ext cx="841022" cy="369332"/>
+            </a:xfrm>
+            <a:prstGeom prst="rect">
+              <a:avLst/>
+            </a:prstGeom>
+            <a:noFill/>
+          </p:spPr>
+          <p:txBody>
+            <a:bodyPr wrap="square" rtlCol="0">
+              <a:spAutoFit/>
+            </a:bodyPr>
+            <a:lstStyle/>
+            <a:p>
+              <a:r>
+                <a:rPr kumimoji="1" lang="zh-CN" altLang="en-US" dirty="0">
+                  <a:latin typeface="SimSun" panose="02010600030101010101" pitchFamily="2" charset="-122"/>
+                  <a:ea typeface="SimSun" panose="02010600030101010101" pitchFamily="2" charset="-122"/>
+                </a:rPr>
+                <a:t>节点</a:t>
+              </a:r>
+              <a:r>
+                <a:rPr kumimoji="1" lang="en-US" altLang="zh-CN" dirty="0">
+                  <a:latin typeface="SimSun" panose="02010600030101010101" pitchFamily="2" charset="-122"/>
+                  <a:ea typeface="SimSun" panose="02010600030101010101" pitchFamily="2" charset="-122"/>
+                </a:rPr>
+                <a:t>2</a:t>
+              </a:r>
+              <a:endParaRPr kumimoji="1" lang="zh-CN" altLang="en-US" dirty="0">
+                <a:latin typeface="SimSun" panose="02010600030101010101" pitchFamily="2" charset="-122"/>
+                <a:ea typeface="SimSun" panose="02010600030101010101" pitchFamily="2" charset="-122"/>
+              </a:endParaRPr>
+            </a:p>
+          </p:txBody>
+        </p:sp>
+        <p:sp>
+          <p:nvSpPr>
+            <p:cNvPr id="38" name="文本框 37">
+              <a:extLst>
+                <a:ext uri="{FF2B5EF4-FFF2-40B4-BE49-F238E27FC236}">
+                  <a16:creationId xmlns:a16="http://schemas.microsoft.com/office/drawing/2014/main" id="{B6EC7B2D-8F3D-2B6C-CEB8-5F26223F5526}"/>
+                </a:ext>
+              </a:extLst>
+            </p:cNvPr>
+            <p:cNvSpPr txBox="1"/>
+            <p:nvPr/>
+          </p:nvSpPr>
+          <p:spPr>
+            <a:xfrm>
+              <a:off x="7323669" y="2744939"/>
+              <a:ext cx="1975553" cy="369332"/>
+            </a:xfrm>
+            <a:prstGeom prst="rect">
+              <a:avLst/>
+            </a:prstGeom>
+            <a:noFill/>
+          </p:spPr>
+          <p:txBody>
+            <a:bodyPr wrap="square" rtlCol="0">
+              <a:spAutoFit/>
+            </a:bodyPr>
+            <a:lstStyle/>
+            <a:p>
+              <a:r>
+                <a:rPr kumimoji="1" lang="zh-CN" altLang="en-US" dirty="0">
+                  <a:latin typeface="SimSun" panose="02010600030101010101" pitchFamily="2" charset="-122"/>
+                  <a:ea typeface="SimSun" panose="02010600030101010101" pitchFamily="2" charset="-122"/>
+                </a:rPr>
+                <a:t>节点</a:t>
+              </a:r>
+              <a:r>
+                <a:rPr kumimoji="1" lang="en-US" altLang="zh-CN" dirty="0">
+                  <a:latin typeface="SimSun" panose="02010600030101010101" pitchFamily="2" charset="-122"/>
+                  <a:ea typeface="SimSun" panose="02010600030101010101" pitchFamily="2" charset="-122"/>
+                </a:rPr>
+                <a:t>3</a:t>
+              </a:r>
+              <a:r>
+                <a:rPr kumimoji="1" lang="zh-CN" altLang="en-US" dirty="0">
+                  <a:latin typeface="SimSun" panose="02010600030101010101" pitchFamily="2" charset="-122"/>
+                  <a:ea typeface="SimSun" panose="02010600030101010101" pitchFamily="2" charset="-122"/>
+                </a:rPr>
+                <a:t> （迟滞）</a:t>
+              </a:r>
+            </a:p>
+          </p:txBody>
+        </p:sp>
+        <p:sp>
+          <p:nvSpPr>
+            <p:cNvPr id="50" name="乘 49">
+              <a:extLst>
+                <a:ext uri="{FF2B5EF4-FFF2-40B4-BE49-F238E27FC236}">
+                  <a16:creationId xmlns:a16="http://schemas.microsoft.com/office/drawing/2014/main" id="{C28C07F7-89E6-4024-72EC-D8D5BC0B2028}"/>
+                </a:ext>
+              </a:extLst>
+            </p:cNvPr>
+            <p:cNvSpPr/>
+            <p:nvPr/>
+          </p:nvSpPr>
+          <p:spPr>
+            <a:xfrm>
+              <a:off x="6551367" y="3062140"/>
+              <a:ext cx="385655" cy="404965"/>
+            </a:xfrm>
+            <a:prstGeom prst="mathMultiply">
+              <a:avLst/>
+            </a:prstGeom>
+            <a:solidFill>
+              <a:srgbClr val="FF0000"/>
+            </a:solidFill>
+            <a:ln>
+              <a:solidFill>
+                <a:srgbClr val="FF0000"/>
+              </a:solidFill>
+            </a:ln>
+          </p:spPr>
+          <p:style>
+            <a:lnRef idx="2">
+              <a:schemeClr val="dk1">
+                <a:shade val="15000"/>
+              </a:schemeClr>
+            </a:lnRef>
+            <a:fillRef idx="1">
+              <a:schemeClr val="dk1"/>
+            </a:fillRef>
+            <a:effectRef idx="0">
+              <a:schemeClr val="dk1"/>
+            </a:effectRef>
+            <a:fontRef idx="minor">
+              <a:schemeClr val="lt1"/>
+            </a:fontRef>
+          </p:style>
+          <p:txBody>
+            <a:bodyPr rtlCol="0" anchor="ctr"/>
+            <a:lstStyle/>
+            <a:p>
+              <a:pPr algn="ctr"/>
+              <a:endParaRPr kumimoji="1" lang="zh-CN" altLang="en-US"/>
+            </a:p>
+          </p:txBody>
+        </p:sp>
+        <mc:AlternateContent xmlns:mc="http://schemas.openxmlformats.org/markup-compatibility/2006">
+          <mc:Choice xmlns:a14="http://schemas.microsoft.com/office/drawing/2010/main" Requires="a14">
+            <p:sp>
+              <p:nvSpPr>
+                <p:cNvPr id="6" name="文本框 5">
+                  <a:extLst>
+                    <a:ext uri="{FF2B5EF4-FFF2-40B4-BE49-F238E27FC236}">
+                      <a16:creationId xmlns:a16="http://schemas.microsoft.com/office/drawing/2014/main" id="{3EBAF16D-AB18-BDF2-778E-DD683B12BC74}"/>
+                    </a:ext>
+                  </a:extLst>
+                </p:cNvPr>
+                <p:cNvSpPr txBox="1"/>
+                <p:nvPr/>
+              </p:nvSpPr>
+              <p:spPr>
+                <a:xfrm>
+                  <a:off x="3483117" y="3395509"/>
+                  <a:ext cx="1431289" cy="749564"/>
+                </a:xfrm>
+                <a:prstGeom prst="rect">
+                  <a:avLst/>
+                </a:prstGeom>
+                <a:noFill/>
+              </p:spPr>
+              <p:txBody>
+                <a:bodyPr wrap="none" lIns="0" tIns="0" rIns="0" bIns="0" rtlCol="0">
+                  <a:spAutoFit/>
+                </a:bodyPr>
+                <a:lstStyle/>
+                <a:p>
+                  <a14:m>
+                    <m:oMathPara xmlns:m="http://schemas.openxmlformats.org/officeDocument/2006/math">
+                      <m:oMathParaPr>
+                        <m:jc m:val="centerGroup"/>
+                      </m:oMathParaPr>
+                      <m:oMath xmlns:m="http://schemas.openxmlformats.org/officeDocument/2006/math">
+                        <m:f>
+                          <m:fPr>
+                            <m:ctrlPr>
+                              <a:rPr kumimoji="1" lang="en-US" altLang="zh-CN" b="0" i="1" smtClean="0">
+                                <a:latin typeface="Cambria Math" panose="02040503050406030204" pitchFamily="18" charset="0"/>
+                              </a:rPr>
+                            </m:ctrlPr>
+                          </m:fPr>
+                          <m:num>
+                            <m:sSub>
+                              <m:sSubPr>
+                                <m:ctrlPr>
+                                  <a:rPr kumimoji="1" lang="en-US" altLang="zh-CN" b="0" i="1" smtClean="0">
+                                    <a:latin typeface="Cambria Math" panose="02040503050406030204" pitchFamily="18" charset="0"/>
+                                  </a:rPr>
+                                </m:ctrlPr>
+                              </m:sSubPr>
+                              <m:e>
+                                <m:r>
+                                  <a:rPr kumimoji="1" lang="en-US" altLang="zh-CN" b="0" i="1" smtClean="0">
+                                    <a:latin typeface="Cambria Math" panose="02040503050406030204" pitchFamily="18" charset="0"/>
+                                  </a:rPr>
+                                  <m:t>𝑔</m:t>
+                                </m:r>
+                              </m:e>
+                              <m:sub>
+                                <m:r>
+                                  <a:rPr kumimoji="1" lang="en-US" altLang="zh-CN" b="0" i="1" smtClean="0">
+                                    <a:latin typeface="Cambria Math" panose="02040503050406030204" pitchFamily="18" charset="0"/>
+                                  </a:rPr>
+                                  <m:t>1</m:t>
+                                </m:r>
+                              </m:sub>
+                            </m:sSub>
+                          </m:num>
+                          <m:den>
+                            <m:r>
+                              <a:rPr kumimoji="1" lang="en-US" altLang="zh-CN" b="0" i="1" smtClean="0">
+                                <a:latin typeface="Cambria Math" panose="02040503050406030204" pitchFamily="18" charset="0"/>
+                              </a:rPr>
+                              <m:t>2</m:t>
+                            </m:r>
+                          </m:den>
+                        </m:f>
+                        <m:r>
+                          <a:rPr kumimoji="1" lang="en-US" altLang="zh-CN" b="0" i="1" smtClean="0">
+                            <a:latin typeface="Cambria Math" panose="02040503050406030204" pitchFamily="18" charset="0"/>
+                          </a:rPr>
+                          <m:t>+</m:t>
+                        </m:r>
+                        <m:sSub>
+                          <m:sSubPr>
+                            <m:ctrlPr>
+                              <a:rPr kumimoji="1" lang="en-US" altLang="zh-CN" b="0" i="1" smtClean="0">
+                                <a:latin typeface="Cambria Math" panose="02040503050406030204" pitchFamily="18" charset="0"/>
+                              </a:rPr>
+                            </m:ctrlPr>
+                          </m:sSubPr>
+                          <m:e>
+                            <m:r>
+                              <a:rPr kumimoji="1" lang="en-US" altLang="zh-CN" b="0" i="1" smtClean="0">
+                                <a:latin typeface="Cambria Math" panose="02040503050406030204" pitchFamily="18" charset="0"/>
+                              </a:rPr>
+                              <m:t>𝑔</m:t>
+                            </m:r>
+                          </m:e>
+                          <m:sub>
+                            <m:r>
+                              <a:rPr kumimoji="1" lang="en-US" altLang="zh-CN" b="0" i="1" smtClean="0">
+                                <a:latin typeface="Cambria Math" panose="02040503050406030204" pitchFamily="18" charset="0"/>
+                              </a:rPr>
+                              <m:t>2</m:t>
+                            </m:r>
+                          </m:sub>
+                        </m:sSub>
+                      </m:oMath>
+                    </m:oMathPara>
+                  </a14:m>
+                  <a:endParaRPr kumimoji="1" lang="en-US" altLang="zh-CN" b="0" dirty="0"/>
+                </a:p>
+                <a:p>
+                  <a:endParaRPr kumimoji="1" lang="zh-CN" altLang="en-US" dirty="0"/>
+                </a:p>
+              </p:txBody>
+            </p:sp>
+          </mc:Choice>
+          <mc:Fallback>
+            <p:sp>
+              <p:nvSpPr>
+                <p:cNvPr id="6" name="文本框 5">
+                  <a:extLst>
+                    <a:ext uri="{FF2B5EF4-FFF2-40B4-BE49-F238E27FC236}">
+                      <a16:creationId xmlns:a16="http://schemas.microsoft.com/office/drawing/2014/main" id="{3EBAF16D-AB18-BDF2-778E-DD683B12BC74}"/>
+                    </a:ext>
+                  </a:extLst>
+                </p:cNvPr>
+                <p:cNvSpPr txBox="1">
+                  <a:spLocks noRot="1" noChangeAspect="1" noMove="1" noResize="1" noEditPoints="1" noAdjustHandles="1" noChangeArrowheads="1" noChangeShapeType="1" noTextEdit="1"/>
+                </p:cNvSpPr>
+                <p:nvPr/>
+              </p:nvSpPr>
+              <p:spPr>
+                <a:xfrm>
+                  <a:off x="3483117" y="3395509"/>
+                  <a:ext cx="1431289" cy="749564"/>
+                </a:xfrm>
+                <a:prstGeom prst="rect">
+                  <a:avLst/>
+                </a:prstGeom>
+                <a:blipFill>
+                  <a:blip r:embed="rId5"/>
+                  <a:stretch>
+                    <a:fillRect t="-1667"/>
+                  </a:stretch>
+                </a:blipFill>
+              </p:spPr>
+              <p:txBody>
+                <a:bodyPr/>
+                <a:lstStyle/>
+                <a:p>
+                  <a:r>
+                    <a:rPr lang="zh-CN" altLang="en-US">
+                      <a:noFill/>
+                    </a:rPr>
+                    <a:t> </a:t>
+                  </a:r>
+                </a:p>
+              </p:txBody>
+            </p:sp>
+          </mc:Fallback>
+        </mc:AlternateContent>
+        <mc:AlternateContent xmlns:mc="http://schemas.openxmlformats.org/markup-compatibility/2006">
+          <mc:Choice xmlns:a14="http://schemas.microsoft.com/office/drawing/2010/main" Requires="a14">
+            <p:sp>
+              <p:nvSpPr>
+                <p:cNvPr id="11" name="文本框 10">
+                  <a:extLst>
+                    <a:ext uri="{FF2B5EF4-FFF2-40B4-BE49-F238E27FC236}">
+                      <a16:creationId xmlns:a16="http://schemas.microsoft.com/office/drawing/2014/main" id="{57397A6D-A6DA-E094-228D-BCB7BB70CDF9}"/>
+                    </a:ext>
+                  </a:extLst>
+                </p:cNvPr>
+                <p:cNvSpPr txBox="1"/>
+                <p:nvPr/>
+              </p:nvSpPr>
+              <p:spPr>
+                <a:xfrm>
+                  <a:off x="3182412" y="866108"/>
+                  <a:ext cx="786692" cy="276999"/>
+                </a:xfrm>
+                <a:prstGeom prst="rect">
+                  <a:avLst/>
+                </a:prstGeom>
+                <a:noFill/>
+              </p:spPr>
+              <p:txBody>
+                <a:bodyPr wrap="square" lIns="0" tIns="0" rIns="0" bIns="0" rtlCol="0">
+                  <a:spAutoFit/>
+                </a:bodyPr>
+                <a:lstStyle/>
+                <a:p>
+                  <a14:m>
+                    <m:oMathPara xmlns:m="http://schemas.openxmlformats.org/officeDocument/2006/math">
+                      <m:oMathParaPr>
+                        <m:jc m:val="centerGroup"/>
+                      </m:oMathParaPr>
+                      <m:oMath xmlns:m="http://schemas.openxmlformats.org/officeDocument/2006/math">
+                        <m:sSub>
+                          <m:sSubPr>
+                            <m:ctrlPr>
+                              <a:rPr kumimoji="1" lang="en-US" altLang="zh-CN" i="1" dirty="0" smtClean="0">
+                                <a:latin typeface="Cambria Math" panose="02040503050406030204" pitchFamily="18" charset="0"/>
+                              </a:rPr>
+                            </m:ctrlPr>
+                          </m:sSubPr>
+                          <m:e>
+                            <m:r>
+                              <a:rPr kumimoji="1" lang="en-US" altLang="zh-CN" i="1" dirty="0" smtClean="0">
+                                <a:latin typeface="Cambria Math" panose="02040503050406030204" pitchFamily="18" charset="0"/>
+                              </a:rPr>
+                              <m:t>𝒟</m:t>
+                            </m:r>
+                          </m:e>
+                          <m:sub>
+                            <m:r>
+                              <a:rPr kumimoji="1" lang="en-US" altLang="zh-CN" i="1" dirty="0" smtClean="0">
+                                <a:latin typeface="Cambria Math" panose="02040503050406030204" pitchFamily="18" charset="0"/>
+                              </a:rPr>
+                              <m:t>1</m:t>
+                            </m:r>
+                          </m:sub>
+                        </m:sSub>
+                      </m:oMath>
+                    </m:oMathPara>
+                  </a14:m>
+                </a:p>
+              </p:txBody>
+            </p:sp>
+          </mc:Choice>
+          <mc:Fallback>
+            <p:sp>
+              <p:nvSpPr>
+                <p:cNvPr id="11" name="文本框 10">
+                  <a:extLst>
+                    <a:ext uri="{FF2B5EF4-FFF2-40B4-BE49-F238E27FC236}">
+                      <a16:creationId xmlns:a16="http://schemas.microsoft.com/office/drawing/2014/main" id="{57397A6D-A6DA-E094-228D-BCB7BB70CDF9}"/>
+                    </a:ext>
+                  </a:extLst>
+                </p:cNvPr>
+                <p:cNvSpPr txBox="1">
+                  <a:spLocks noRot="1" noChangeAspect="1" noMove="1" noResize="1" noEditPoints="1" noAdjustHandles="1" noChangeArrowheads="1" noChangeShapeType="1" noTextEdit="1"/>
+                </p:cNvSpPr>
+                <p:nvPr/>
+              </p:nvSpPr>
+              <p:spPr>
+                <a:xfrm>
+                  <a:off x="3182412" y="866108"/>
+                  <a:ext cx="786692" cy="276999"/>
+                </a:xfrm>
+                <a:prstGeom prst="rect">
+                  <a:avLst/>
+                </a:prstGeom>
+                <a:blipFill>
+                  <a:blip r:embed="rId6"/>
+                  <a:stretch>
+                    <a:fillRect t="-26087" b="-47826"/>
+                  </a:stretch>
+                </a:blipFill>
+              </p:spPr>
+              <p:txBody>
+                <a:bodyPr/>
+                <a:lstStyle/>
+                <a:p>
+                  <a:r>
+                    <a:rPr lang="zh-CN" altLang="en-US">
+                      <a:noFill/>
+                    </a:rPr>
+                    <a:t> </a:t>
+                  </a:r>
+                </a:p>
+              </p:txBody>
+            </p:sp>
+          </mc:Fallback>
+        </mc:AlternateContent>
+        <p:sp>
+          <p:nvSpPr>
+            <p:cNvPr id="13" name="矩形 12">
+              <a:extLst>
+                <a:ext uri="{FF2B5EF4-FFF2-40B4-BE49-F238E27FC236}">
+                  <a16:creationId xmlns:a16="http://schemas.microsoft.com/office/drawing/2014/main" id="{C3F3F258-842D-4CA0-5F46-89ABDA75192D}"/>
+                </a:ext>
+              </a:extLst>
+            </p:cNvPr>
+            <p:cNvSpPr/>
+            <p:nvPr/>
+          </p:nvSpPr>
+          <p:spPr>
+            <a:xfrm>
+              <a:off x="3090336" y="740058"/>
+              <a:ext cx="970845" cy="501937"/>
+            </a:xfrm>
+            <a:prstGeom prst="rect">
+              <a:avLst/>
+            </a:prstGeom>
+            <a:noFill/>
+            <a:ln>
+              <a:solidFill>
+                <a:schemeClr val="tx1"/>
+              </a:solidFill>
+            </a:ln>
+          </p:spPr>
+          <p:style>
+            <a:lnRef idx="2">
+              <a:schemeClr val="accent6"/>
+            </a:lnRef>
+            <a:fillRef idx="1">
+              <a:schemeClr val="lt1"/>
+            </a:fillRef>
+            <a:effectRef idx="0">
+              <a:schemeClr val="accent6"/>
+            </a:effectRef>
+            <a:fontRef idx="minor">
+              <a:schemeClr val="dk1"/>
+            </a:fontRef>
+          </p:style>
+          <p:txBody>
+            <a:bodyPr rtlCol="0" anchor="ctr"/>
+            <a:lstStyle/>
+            <a:p>
+              <a:pPr algn="ctr"/>
+              <a:endParaRPr kumimoji="1" lang="zh-CN" altLang="en-US"/>
+            </a:p>
+          </p:txBody>
+        </p:sp>
+        <p:sp>
+          <p:nvSpPr>
+            <p:cNvPr id="15" name="矩形 14">
+              <a:extLst>
+                <a:ext uri="{FF2B5EF4-FFF2-40B4-BE49-F238E27FC236}">
+                  <a16:creationId xmlns:a16="http://schemas.microsoft.com/office/drawing/2014/main" id="{17E710D0-93CA-4F95-39E0-6696020DE3B8}"/>
+                </a:ext>
+              </a:extLst>
+            </p:cNvPr>
+            <p:cNvSpPr/>
+            <p:nvPr/>
+          </p:nvSpPr>
+          <p:spPr>
+            <a:xfrm>
+              <a:off x="3090336" y="1241995"/>
+              <a:ext cx="970845" cy="501937"/>
+            </a:xfrm>
+            <a:prstGeom prst="rect">
+              <a:avLst/>
+            </a:prstGeom>
+            <a:noFill/>
+            <a:ln>
+              <a:solidFill>
+                <a:schemeClr val="tx1"/>
+              </a:solidFill>
+            </a:ln>
+          </p:spPr>
+          <p:style>
+            <a:lnRef idx="2">
+              <a:schemeClr val="accent6"/>
+            </a:lnRef>
+            <a:fillRef idx="1">
+              <a:schemeClr val="lt1"/>
+            </a:fillRef>
+            <a:effectRef idx="0">
+              <a:schemeClr val="accent6"/>
+            </a:effectRef>
+            <a:fontRef idx="minor">
+              <a:schemeClr val="dk1"/>
+            </a:fontRef>
+          </p:style>
+          <p:txBody>
+            <a:bodyPr rtlCol="0" anchor="ctr"/>
+            <a:lstStyle/>
+            <a:p>
+              <a:pPr algn="ctr"/>
+              <a:endParaRPr kumimoji="1" lang="zh-CN" altLang="en-US"/>
+            </a:p>
+          </p:txBody>
+        </p:sp>
+        <mc:AlternateContent xmlns:mc="http://schemas.openxmlformats.org/markup-compatibility/2006">
+          <mc:Choice xmlns:a14="http://schemas.microsoft.com/office/drawing/2010/main" Requires="a14">
+            <p:sp>
+              <p:nvSpPr>
+                <p:cNvPr id="17" name="文本框 16">
+                  <a:extLst>
+                    <a:ext uri="{FF2B5EF4-FFF2-40B4-BE49-F238E27FC236}">
+                      <a16:creationId xmlns:a16="http://schemas.microsoft.com/office/drawing/2014/main" id="{D54F5D4B-AC79-2B98-A1D5-0ED453EB348C}"/>
+                    </a:ext>
+                  </a:extLst>
+                </p:cNvPr>
+                <p:cNvSpPr txBox="1"/>
+                <p:nvPr/>
+              </p:nvSpPr>
+              <p:spPr>
+                <a:xfrm>
+                  <a:off x="3179449" y="1369982"/>
+                  <a:ext cx="786692" cy="276999"/>
+                </a:xfrm>
+                <a:prstGeom prst="rect">
+                  <a:avLst/>
+                </a:prstGeom>
+                <a:noFill/>
+              </p:spPr>
+              <p:txBody>
+                <a:bodyPr wrap="square" lIns="0" tIns="0" rIns="0" bIns="0" rtlCol="0">
+                  <a:spAutoFit/>
+                </a:bodyPr>
+                <a:lstStyle/>
+                <a:p>
+                  <a14:m>
+                    <m:oMathPara xmlns:m="http://schemas.openxmlformats.org/officeDocument/2006/math">
+                      <m:oMathParaPr>
+                        <m:jc m:val="centerGroup"/>
+                      </m:oMathParaPr>
+                      <m:oMath xmlns:m="http://schemas.openxmlformats.org/officeDocument/2006/math">
+                        <m:sSub>
+                          <m:sSubPr>
+                            <m:ctrlPr>
+                              <a:rPr kumimoji="1" lang="en-US" altLang="zh-CN" i="1" dirty="0" smtClean="0">
+                                <a:latin typeface="Cambria Math" panose="02040503050406030204" pitchFamily="18" charset="0"/>
+                              </a:rPr>
+                            </m:ctrlPr>
+                          </m:sSubPr>
+                          <m:e>
+                            <m:r>
+                              <a:rPr kumimoji="1" lang="en-US" altLang="zh-CN" i="1" dirty="0" smtClean="0">
+                                <a:latin typeface="Cambria Math" panose="02040503050406030204" pitchFamily="18" charset="0"/>
+                              </a:rPr>
+                              <m:t>𝒟</m:t>
+                            </m:r>
+                          </m:e>
+                          <m:sub>
+                            <m:r>
+                              <a:rPr kumimoji="1" lang="en-US" altLang="zh-CN" b="0" i="1" dirty="0" smtClean="0">
+                                <a:latin typeface="Cambria Math" panose="02040503050406030204" pitchFamily="18" charset="0"/>
+                              </a:rPr>
+                              <m:t>2</m:t>
+                            </m:r>
+                          </m:sub>
+                        </m:sSub>
+                      </m:oMath>
+                    </m:oMathPara>
+                  </a14:m>
+                </a:p>
+              </p:txBody>
+            </p:sp>
+          </mc:Choice>
+          <mc:Fallback>
+            <p:sp>
+              <p:nvSpPr>
+                <p:cNvPr id="17" name="文本框 16">
+                  <a:extLst>
+                    <a:ext uri="{FF2B5EF4-FFF2-40B4-BE49-F238E27FC236}">
+                      <a16:creationId xmlns:a16="http://schemas.microsoft.com/office/drawing/2014/main" id="{D54F5D4B-AC79-2B98-A1D5-0ED453EB348C}"/>
+                    </a:ext>
+                  </a:extLst>
+                </p:cNvPr>
+                <p:cNvSpPr txBox="1">
+                  <a:spLocks noRot="1" noChangeAspect="1" noMove="1" noResize="1" noEditPoints="1" noAdjustHandles="1" noChangeArrowheads="1" noChangeShapeType="1" noTextEdit="1"/>
+                </p:cNvSpPr>
+                <p:nvPr/>
+              </p:nvSpPr>
+              <p:spPr>
+                <a:xfrm>
+                  <a:off x="3179449" y="1369982"/>
+                  <a:ext cx="786692" cy="276999"/>
+                </a:xfrm>
+                <a:prstGeom prst="rect">
+                  <a:avLst/>
+                </a:prstGeom>
+                <a:blipFill>
+                  <a:blip r:embed="rId7"/>
+                  <a:stretch>
+                    <a:fillRect t="-27273" b="-54545"/>
+                  </a:stretch>
+                </a:blipFill>
+              </p:spPr>
+              <p:txBody>
+                <a:bodyPr/>
+                <a:lstStyle/>
+                <a:p>
+                  <a:r>
+                    <a:rPr lang="zh-CN" altLang="en-US">
+                      <a:noFill/>
+                    </a:rPr>
+                    <a:t> </a:t>
+                  </a:r>
+                </a:p>
+              </p:txBody>
+            </p:sp>
+          </mc:Fallback>
+        </mc:AlternateContent>
+        <mc:AlternateContent xmlns:mc="http://schemas.openxmlformats.org/markup-compatibility/2006">
+          <mc:Choice xmlns:a14="http://schemas.microsoft.com/office/drawing/2010/main" Requires="a14">
+            <p:sp>
+              <p:nvSpPr>
+                <p:cNvPr id="19" name="文本框 18">
+                  <a:extLst>
+                    <a:ext uri="{FF2B5EF4-FFF2-40B4-BE49-F238E27FC236}">
+                      <a16:creationId xmlns:a16="http://schemas.microsoft.com/office/drawing/2014/main" id="{6C447D8C-2EA4-8A95-9430-F426759036FF}"/>
+                    </a:ext>
+                  </a:extLst>
+                </p:cNvPr>
+                <p:cNvSpPr txBox="1"/>
+                <p:nvPr/>
+              </p:nvSpPr>
+              <p:spPr>
+                <a:xfrm>
+                  <a:off x="5327298" y="489452"/>
+                  <a:ext cx="786692" cy="276999"/>
+                </a:xfrm>
+                <a:prstGeom prst="rect">
+                  <a:avLst/>
+                </a:prstGeom>
+                <a:noFill/>
+              </p:spPr>
+              <p:txBody>
+                <a:bodyPr wrap="square" lIns="0" tIns="0" rIns="0" bIns="0" rtlCol="0">
+                  <a:spAutoFit/>
+                </a:bodyPr>
+                <a:lstStyle/>
+                <a:p>
+                  <a14:m>
+                    <m:oMathPara xmlns:m="http://schemas.openxmlformats.org/officeDocument/2006/math">
+                      <m:oMathParaPr>
+                        <m:jc m:val="centerGroup"/>
+                      </m:oMathParaPr>
+                      <m:oMath xmlns:m="http://schemas.openxmlformats.org/officeDocument/2006/math">
+                        <m:sSub>
+                          <m:sSubPr>
+                            <m:ctrlPr>
+                              <a:rPr kumimoji="1" lang="en-US" altLang="zh-CN" i="1" dirty="0" smtClean="0">
+                                <a:latin typeface="Cambria Math" panose="02040503050406030204" pitchFamily="18" charset="0"/>
+                              </a:rPr>
+                            </m:ctrlPr>
+                          </m:sSubPr>
+                          <m:e>
+                            <m:r>
+                              <a:rPr kumimoji="1" lang="en-US" altLang="zh-CN" i="1" dirty="0" smtClean="0">
+                                <a:latin typeface="Cambria Math" panose="02040503050406030204" pitchFamily="18" charset="0"/>
+                              </a:rPr>
+                              <m:t>𝒟</m:t>
+                            </m:r>
+                          </m:e>
+                          <m:sub>
+                            <m:r>
+                              <a:rPr kumimoji="1" lang="en-US" altLang="zh-CN" b="0" i="1" dirty="0" smtClean="0">
+                                <a:latin typeface="Cambria Math" panose="02040503050406030204" pitchFamily="18" charset="0"/>
+                              </a:rPr>
+                              <m:t>2</m:t>
+                            </m:r>
+                          </m:sub>
+                        </m:sSub>
+                      </m:oMath>
+                    </m:oMathPara>
+                  </a14:m>
+                </a:p>
+              </p:txBody>
+            </p:sp>
+          </mc:Choice>
+          <mc:Fallback>
+            <p:sp>
+              <p:nvSpPr>
+                <p:cNvPr id="19" name="文本框 18">
+                  <a:extLst>
+                    <a:ext uri="{FF2B5EF4-FFF2-40B4-BE49-F238E27FC236}">
+                      <a16:creationId xmlns:a16="http://schemas.microsoft.com/office/drawing/2014/main" id="{6C447D8C-2EA4-8A95-9430-F426759036FF}"/>
+                    </a:ext>
+                  </a:extLst>
+                </p:cNvPr>
+                <p:cNvSpPr txBox="1">
+                  <a:spLocks noRot="1" noChangeAspect="1" noMove="1" noResize="1" noEditPoints="1" noAdjustHandles="1" noChangeArrowheads="1" noChangeShapeType="1" noTextEdit="1"/>
+                </p:cNvSpPr>
+                <p:nvPr/>
+              </p:nvSpPr>
+              <p:spPr>
+                <a:xfrm>
+                  <a:off x="5327298" y="489452"/>
+                  <a:ext cx="786692" cy="276999"/>
+                </a:xfrm>
+                <a:prstGeom prst="rect">
+                  <a:avLst/>
+                </a:prstGeom>
+                <a:blipFill>
+                  <a:blip r:embed="rId8"/>
+                  <a:stretch>
+                    <a:fillRect t="-26087" b="-47826"/>
+                  </a:stretch>
+                </a:blipFill>
+              </p:spPr>
+              <p:txBody>
+                <a:bodyPr/>
+                <a:lstStyle/>
+                <a:p>
+                  <a:r>
+                    <a:rPr lang="zh-CN" altLang="en-US">
+                      <a:noFill/>
+                    </a:rPr>
+                    <a:t> </a:t>
+                  </a:r>
+                </a:p>
+              </p:txBody>
+            </p:sp>
+          </mc:Fallback>
+        </mc:AlternateContent>
+        <p:sp>
+          <p:nvSpPr>
+            <p:cNvPr id="20" name="矩形 19">
+              <a:extLst>
+                <a:ext uri="{FF2B5EF4-FFF2-40B4-BE49-F238E27FC236}">
+                  <a16:creationId xmlns:a16="http://schemas.microsoft.com/office/drawing/2014/main" id="{67DD0DB8-B1F8-65A1-174A-38C3502564EB}"/>
+                </a:ext>
+              </a:extLst>
+            </p:cNvPr>
+            <p:cNvSpPr/>
+            <p:nvPr/>
+          </p:nvSpPr>
+          <p:spPr>
+            <a:xfrm>
+              <a:off x="5235222" y="363402"/>
+              <a:ext cx="970845" cy="501937"/>
+            </a:xfrm>
+            <a:prstGeom prst="rect">
+              <a:avLst/>
+            </a:prstGeom>
+            <a:noFill/>
+            <a:ln>
+              <a:solidFill>
+                <a:schemeClr val="tx1"/>
+              </a:solidFill>
+            </a:ln>
+          </p:spPr>
+          <p:style>
+            <a:lnRef idx="2">
+              <a:schemeClr val="accent6"/>
+            </a:lnRef>
+            <a:fillRef idx="1">
+              <a:schemeClr val="lt1"/>
+            </a:fillRef>
+            <a:effectRef idx="0">
+              <a:schemeClr val="accent6"/>
+            </a:effectRef>
+            <a:fontRef idx="minor">
+              <a:schemeClr val="dk1"/>
+            </a:fontRef>
+          </p:style>
+          <p:txBody>
+            <a:bodyPr rtlCol="0" anchor="ctr"/>
+            <a:lstStyle/>
+            <a:p>
+              <a:pPr algn="ctr"/>
+              <a:endParaRPr kumimoji="1" lang="zh-CN" altLang="en-US"/>
+            </a:p>
+          </p:txBody>
+        </p:sp>
+        <p:sp>
+          <p:nvSpPr>
+            <p:cNvPr id="21" name="矩形 20">
+              <a:extLst>
+                <a:ext uri="{FF2B5EF4-FFF2-40B4-BE49-F238E27FC236}">
+                  <a16:creationId xmlns:a16="http://schemas.microsoft.com/office/drawing/2014/main" id="{F23E45CD-C1F3-1A78-D96F-0F7E2251E8A7}"/>
+                </a:ext>
+              </a:extLst>
+            </p:cNvPr>
+            <p:cNvSpPr/>
+            <p:nvPr/>
+          </p:nvSpPr>
+          <p:spPr>
+            <a:xfrm>
+              <a:off x="5235222" y="865339"/>
+              <a:ext cx="970845" cy="501937"/>
+            </a:xfrm>
+            <a:prstGeom prst="rect">
+              <a:avLst/>
+            </a:prstGeom>
+            <a:noFill/>
+            <a:ln>
+              <a:solidFill>
+                <a:schemeClr val="tx1"/>
+              </a:solidFill>
+            </a:ln>
+          </p:spPr>
+          <p:style>
+            <a:lnRef idx="2">
+              <a:schemeClr val="accent6"/>
+            </a:lnRef>
+            <a:fillRef idx="1">
+              <a:schemeClr val="lt1"/>
+            </a:fillRef>
+            <a:effectRef idx="0">
+              <a:schemeClr val="accent6"/>
+            </a:effectRef>
+            <a:fontRef idx="minor">
+              <a:schemeClr val="dk1"/>
+            </a:fontRef>
+          </p:style>
+          <p:txBody>
+            <a:bodyPr rtlCol="0" anchor="ctr"/>
+            <a:lstStyle/>
+            <a:p>
+              <a:pPr algn="ctr"/>
+              <a:endParaRPr kumimoji="1" lang="zh-CN" altLang="en-US"/>
+            </a:p>
+          </p:txBody>
+        </p:sp>
+        <mc:AlternateContent xmlns:mc="http://schemas.openxmlformats.org/markup-compatibility/2006">
+          <mc:Choice xmlns:a14="http://schemas.microsoft.com/office/drawing/2010/main" Requires="a14">
+            <p:sp>
+              <p:nvSpPr>
+                <p:cNvPr id="22" name="文本框 21">
+                  <a:extLst>
+                    <a:ext uri="{FF2B5EF4-FFF2-40B4-BE49-F238E27FC236}">
+                      <a16:creationId xmlns:a16="http://schemas.microsoft.com/office/drawing/2014/main" id="{7297140E-F192-CA32-17AC-FA628F61F486}"/>
+                    </a:ext>
+                  </a:extLst>
+                </p:cNvPr>
+                <p:cNvSpPr txBox="1"/>
+                <p:nvPr/>
+              </p:nvSpPr>
+              <p:spPr>
+                <a:xfrm>
+                  <a:off x="5324335" y="993326"/>
+                  <a:ext cx="786692" cy="276999"/>
+                </a:xfrm>
+                <a:prstGeom prst="rect">
+                  <a:avLst/>
+                </a:prstGeom>
+                <a:noFill/>
+              </p:spPr>
+              <p:txBody>
+                <a:bodyPr wrap="square" lIns="0" tIns="0" rIns="0" bIns="0" rtlCol="0">
+                  <a:spAutoFit/>
+                </a:bodyPr>
+                <a:lstStyle/>
+                <a:p>
+                  <a14:m>
+                    <m:oMathPara xmlns:m="http://schemas.openxmlformats.org/officeDocument/2006/math">
+                      <m:oMathParaPr>
+                        <m:jc m:val="centerGroup"/>
+                      </m:oMathParaPr>
+                      <m:oMath xmlns:m="http://schemas.openxmlformats.org/officeDocument/2006/math">
+                        <m:sSub>
+                          <m:sSubPr>
+                            <m:ctrlPr>
+                              <a:rPr kumimoji="1" lang="en-US" altLang="zh-CN" i="1" dirty="0" smtClean="0">
+                                <a:latin typeface="Cambria Math" panose="02040503050406030204" pitchFamily="18" charset="0"/>
+                              </a:rPr>
+                            </m:ctrlPr>
+                          </m:sSubPr>
+                          <m:e>
+                            <m:r>
+                              <a:rPr kumimoji="1" lang="en-US" altLang="zh-CN" i="1" dirty="0" smtClean="0">
+                                <a:latin typeface="Cambria Math" panose="02040503050406030204" pitchFamily="18" charset="0"/>
+                              </a:rPr>
+                              <m:t>𝒟</m:t>
+                            </m:r>
+                          </m:e>
+                          <m:sub>
+                            <m:r>
+                              <a:rPr kumimoji="1" lang="en-US" altLang="zh-CN" b="0" i="1" dirty="0" smtClean="0">
+                                <a:latin typeface="Cambria Math" panose="02040503050406030204" pitchFamily="18" charset="0"/>
+                              </a:rPr>
+                              <m:t>3</m:t>
+                            </m:r>
+                          </m:sub>
+                        </m:sSub>
+                      </m:oMath>
+                    </m:oMathPara>
+                  </a14:m>
+                </a:p>
+              </p:txBody>
+            </p:sp>
+          </mc:Choice>
+          <mc:Fallback>
+            <p:sp>
+              <p:nvSpPr>
+                <p:cNvPr id="22" name="文本框 21">
+                  <a:extLst>
+                    <a:ext uri="{FF2B5EF4-FFF2-40B4-BE49-F238E27FC236}">
+                      <a16:creationId xmlns:a16="http://schemas.microsoft.com/office/drawing/2014/main" id="{7297140E-F192-CA32-17AC-FA628F61F486}"/>
+                    </a:ext>
+                  </a:extLst>
+                </p:cNvPr>
+                <p:cNvSpPr txBox="1">
+                  <a:spLocks noRot="1" noChangeAspect="1" noMove="1" noResize="1" noEditPoints="1" noAdjustHandles="1" noChangeArrowheads="1" noChangeShapeType="1" noTextEdit="1"/>
+                </p:cNvSpPr>
+                <p:nvPr/>
+              </p:nvSpPr>
+              <p:spPr>
+                <a:xfrm>
+                  <a:off x="5324335" y="993326"/>
+                  <a:ext cx="786692" cy="276999"/>
+                </a:xfrm>
+                <a:prstGeom prst="rect">
+                  <a:avLst/>
+                </a:prstGeom>
+                <a:blipFill>
+                  <a:blip r:embed="rId9"/>
+                  <a:stretch>
+                    <a:fillRect t="-27273" b="-54545"/>
+                  </a:stretch>
+                </a:blipFill>
+              </p:spPr>
+              <p:txBody>
+                <a:bodyPr/>
+                <a:lstStyle/>
+                <a:p>
+                  <a:r>
+                    <a:rPr lang="zh-CN" altLang="en-US">
+                      <a:noFill/>
+                    </a:rPr>
+                    <a:t> </a:t>
+                  </a:r>
+                </a:p>
+              </p:txBody>
+            </p:sp>
+          </mc:Fallback>
+        </mc:AlternateContent>
+        <mc:AlternateContent xmlns:mc="http://schemas.openxmlformats.org/markup-compatibility/2006">
+          <mc:Choice xmlns:a14="http://schemas.microsoft.com/office/drawing/2010/main" Requires="a14">
+            <p:sp>
+              <p:nvSpPr>
+                <p:cNvPr id="23" name="文本框 22">
+                  <a:extLst>
+                    <a:ext uri="{FF2B5EF4-FFF2-40B4-BE49-F238E27FC236}">
+                      <a16:creationId xmlns:a16="http://schemas.microsoft.com/office/drawing/2014/main" id="{9E239AC6-4611-4AC5-D5CF-F4BBEFB5EB4A}"/>
+                    </a:ext>
+                  </a:extLst>
+                </p:cNvPr>
+                <p:cNvSpPr txBox="1"/>
+                <p:nvPr/>
+              </p:nvSpPr>
+              <p:spPr>
+                <a:xfrm>
+                  <a:off x="7349357" y="647339"/>
+                  <a:ext cx="786692" cy="276999"/>
+                </a:xfrm>
+                <a:prstGeom prst="rect">
+                  <a:avLst/>
+                </a:prstGeom>
+                <a:noFill/>
+              </p:spPr>
+              <p:txBody>
+                <a:bodyPr wrap="square" lIns="0" tIns="0" rIns="0" bIns="0" rtlCol="0">
+                  <a:spAutoFit/>
+                </a:bodyPr>
+                <a:lstStyle/>
+                <a:p>
+                  <a14:m>
+                    <m:oMathPara xmlns:m="http://schemas.openxmlformats.org/officeDocument/2006/math">
+                      <m:oMathParaPr>
+                        <m:jc m:val="centerGroup"/>
+                      </m:oMathParaPr>
+                      <m:oMath xmlns:m="http://schemas.openxmlformats.org/officeDocument/2006/math">
+                        <m:sSub>
+                          <m:sSubPr>
+                            <m:ctrlPr>
+                              <a:rPr kumimoji="1" lang="en-US" altLang="zh-CN" i="1" dirty="0" smtClean="0">
+                                <a:latin typeface="Cambria Math" panose="02040503050406030204" pitchFamily="18" charset="0"/>
+                              </a:rPr>
+                            </m:ctrlPr>
+                          </m:sSubPr>
+                          <m:e>
+                            <m:r>
+                              <a:rPr kumimoji="1" lang="en-US" altLang="zh-CN" i="1" dirty="0" smtClean="0">
+                                <a:latin typeface="Cambria Math" panose="02040503050406030204" pitchFamily="18" charset="0"/>
+                              </a:rPr>
+                              <m:t>𝒟</m:t>
+                            </m:r>
+                          </m:e>
+                          <m:sub>
+                            <m:r>
+                              <a:rPr kumimoji="1" lang="en-US" altLang="zh-CN" b="0" i="1" dirty="0" smtClean="0">
+                                <a:latin typeface="Cambria Math" panose="02040503050406030204" pitchFamily="18" charset="0"/>
+                              </a:rPr>
+                              <m:t>3</m:t>
+                            </m:r>
+                          </m:sub>
+                        </m:sSub>
+                      </m:oMath>
+                    </m:oMathPara>
+                  </a14:m>
+                </a:p>
+              </p:txBody>
+            </p:sp>
+          </mc:Choice>
+          <mc:Fallback>
+            <p:sp>
+              <p:nvSpPr>
+                <p:cNvPr id="23" name="文本框 22">
+                  <a:extLst>
+                    <a:ext uri="{FF2B5EF4-FFF2-40B4-BE49-F238E27FC236}">
+                      <a16:creationId xmlns:a16="http://schemas.microsoft.com/office/drawing/2014/main" id="{9E239AC6-4611-4AC5-D5CF-F4BBEFB5EB4A}"/>
+                    </a:ext>
+                  </a:extLst>
+                </p:cNvPr>
+                <p:cNvSpPr txBox="1">
+                  <a:spLocks noRot="1" noChangeAspect="1" noMove="1" noResize="1" noEditPoints="1" noAdjustHandles="1" noChangeArrowheads="1" noChangeShapeType="1" noTextEdit="1"/>
+                </p:cNvSpPr>
+                <p:nvPr/>
+              </p:nvSpPr>
+              <p:spPr>
+                <a:xfrm>
+                  <a:off x="7349357" y="647339"/>
+                  <a:ext cx="786692" cy="276999"/>
+                </a:xfrm>
+                <a:prstGeom prst="rect">
+                  <a:avLst/>
+                </a:prstGeom>
+                <a:blipFill>
+                  <a:blip r:embed="rId10"/>
+                  <a:stretch>
+                    <a:fillRect t="-21739" b="-47826"/>
+                  </a:stretch>
+                </a:blipFill>
+              </p:spPr>
+              <p:txBody>
+                <a:bodyPr/>
+                <a:lstStyle/>
+                <a:p>
+                  <a:r>
+                    <a:rPr lang="zh-CN" altLang="en-US">
+                      <a:noFill/>
+                    </a:rPr>
+                    <a:t> </a:t>
+                  </a:r>
+                </a:p>
+              </p:txBody>
+            </p:sp>
+          </mc:Fallback>
+        </mc:AlternateContent>
+        <p:sp>
+          <p:nvSpPr>
+            <p:cNvPr id="24" name="矩形 23">
+              <a:extLst>
+                <a:ext uri="{FF2B5EF4-FFF2-40B4-BE49-F238E27FC236}">
+                  <a16:creationId xmlns:a16="http://schemas.microsoft.com/office/drawing/2014/main" id="{62AC4A2B-B808-E043-E9A7-8A4C5454B7FA}"/>
+                </a:ext>
+              </a:extLst>
+            </p:cNvPr>
+            <p:cNvSpPr/>
+            <p:nvPr/>
+          </p:nvSpPr>
+          <p:spPr>
+            <a:xfrm>
+              <a:off x="7257281" y="521289"/>
+              <a:ext cx="970845" cy="501937"/>
+            </a:xfrm>
+            <a:prstGeom prst="rect">
+              <a:avLst/>
+            </a:prstGeom>
+            <a:noFill/>
+            <a:ln>
+              <a:solidFill>
+                <a:schemeClr val="tx1"/>
+              </a:solidFill>
+            </a:ln>
+          </p:spPr>
+          <p:style>
+            <a:lnRef idx="2">
+              <a:schemeClr val="accent6"/>
+            </a:lnRef>
+            <a:fillRef idx="1">
+              <a:schemeClr val="lt1"/>
+            </a:fillRef>
+            <a:effectRef idx="0">
+              <a:schemeClr val="accent6"/>
+            </a:effectRef>
+            <a:fontRef idx="minor">
+              <a:schemeClr val="dk1"/>
+            </a:fontRef>
+          </p:style>
+          <p:txBody>
+            <a:bodyPr rtlCol="0" anchor="ctr"/>
+            <a:lstStyle/>
+            <a:p>
+              <a:pPr algn="ctr"/>
+              <a:endParaRPr kumimoji="1" lang="zh-CN" altLang="en-US"/>
+            </a:p>
+          </p:txBody>
+        </p:sp>
+        <p:sp>
+          <p:nvSpPr>
+            <p:cNvPr id="26" name="矩形 25">
+              <a:extLst>
+                <a:ext uri="{FF2B5EF4-FFF2-40B4-BE49-F238E27FC236}">
+                  <a16:creationId xmlns:a16="http://schemas.microsoft.com/office/drawing/2014/main" id="{3BDB9CDF-2244-950A-A612-F09116B9A31D}"/>
+                </a:ext>
+              </a:extLst>
+            </p:cNvPr>
+            <p:cNvSpPr/>
+            <p:nvPr/>
+          </p:nvSpPr>
+          <p:spPr>
+            <a:xfrm>
+              <a:off x="7257281" y="1023226"/>
+              <a:ext cx="970845" cy="501937"/>
+            </a:xfrm>
+            <a:prstGeom prst="rect">
+              <a:avLst/>
+            </a:prstGeom>
+            <a:noFill/>
+            <a:ln>
+              <a:solidFill>
+                <a:schemeClr val="tx1"/>
+              </a:solidFill>
+            </a:ln>
+          </p:spPr>
+          <p:style>
+            <a:lnRef idx="2">
+              <a:schemeClr val="accent6"/>
+            </a:lnRef>
+            <a:fillRef idx="1">
+              <a:schemeClr val="lt1"/>
+            </a:fillRef>
+            <a:effectRef idx="0">
+              <a:schemeClr val="accent6"/>
+            </a:effectRef>
+            <a:fontRef idx="minor">
+              <a:schemeClr val="dk1"/>
+            </a:fontRef>
+          </p:style>
+          <p:txBody>
+            <a:bodyPr rtlCol="0" anchor="ctr"/>
+            <a:lstStyle/>
+            <a:p>
+              <a:pPr algn="ctr"/>
+              <a:endParaRPr kumimoji="1" lang="zh-CN" altLang="en-US"/>
+            </a:p>
+          </p:txBody>
+        </p:sp>
+        <mc:AlternateContent xmlns:mc="http://schemas.openxmlformats.org/markup-compatibility/2006">
+          <mc:Choice xmlns:a14="http://schemas.microsoft.com/office/drawing/2010/main" Requires="a14">
+            <p:sp>
+              <p:nvSpPr>
+                <p:cNvPr id="28" name="文本框 27">
+                  <a:extLst>
+                    <a:ext uri="{FF2B5EF4-FFF2-40B4-BE49-F238E27FC236}">
+                      <a16:creationId xmlns:a16="http://schemas.microsoft.com/office/drawing/2014/main" id="{ECC18056-23B3-773F-8389-3E27CDA94384}"/>
+                    </a:ext>
+                  </a:extLst>
+                </p:cNvPr>
+                <p:cNvSpPr txBox="1"/>
+                <p:nvPr/>
+              </p:nvSpPr>
+              <p:spPr>
+                <a:xfrm>
+                  <a:off x="7346394" y="1151213"/>
+                  <a:ext cx="786692" cy="276999"/>
+                </a:xfrm>
+                <a:prstGeom prst="rect">
+                  <a:avLst/>
+                </a:prstGeom>
+                <a:noFill/>
+              </p:spPr>
+              <p:txBody>
+                <a:bodyPr wrap="square" lIns="0" tIns="0" rIns="0" bIns="0" rtlCol="0">
+                  <a:spAutoFit/>
+                </a:bodyPr>
+                <a:lstStyle/>
+                <a:p>
+                  <a14:m>
+                    <m:oMathPara xmlns:m="http://schemas.openxmlformats.org/officeDocument/2006/math">
+                      <m:oMathParaPr>
+                        <m:jc m:val="centerGroup"/>
+                      </m:oMathParaPr>
+                      <m:oMath xmlns:m="http://schemas.openxmlformats.org/officeDocument/2006/math">
+                        <m:sSub>
+                          <m:sSubPr>
+                            <m:ctrlPr>
+                              <a:rPr kumimoji="1" lang="en-US" altLang="zh-CN" i="1" dirty="0" smtClean="0">
+                                <a:latin typeface="Cambria Math" panose="02040503050406030204" pitchFamily="18" charset="0"/>
+                              </a:rPr>
+                            </m:ctrlPr>
+                          </m:sSubPr>
+                          <m:e>
+                            <m:r>
+                              <a:rPr kumimoji="1" lang="en-US" altLang="zh-CN" i="1" dirty="0" smtClean="0">
+                                <a:latin typeface="Cambria Math" panose="02040503050406030204" pitchFamily="18" charset="0"/>
+                              </a:rPr>
+                              <m:t>𝒟</m:t>
+                            </m:r>
+                          </m:e>
+                          <m:sub>
+                            <m:r>
+                              <a:rPr kumimoji="1" lang="en-US" altLang="zh-CN" b="0" i="1" dirty="0" smtClean="0">
+                                <a:latin typeface="Cambria Math" panose="02040503050406030204" pitchFamily="18" charset="0"/>
+                              </a:rPr>
+                              <m:t>1</m:t>
+                            </m:r>
+                          </m:sub>
+                        </m:sSub>
+                      </m:oMath>
+                    </m:oMathPara>
+                  </a14:m>
+                </a:p>
+              </p:txBody>
+            </p:sp>
+          </mc:Choice>
+          <mc:Fallback>
+            <p:sp>
+              <p:nvSpPr>
+                <p:cNvPr id="28" name="文本框 27">
+                  <a:extLst>
+                    <a:ext uri="{FF2B5EF4-FFF2-40B4-BE49-F238E27FC236}">
+                      <a16:creationId xmlns:a16="http://schemas.microsoft.com/office/drawing/2014/main" id="{ECC18056-23B3-773F-8389-3E27CDA94384}"/>
+                    </a:ext>
+                  </a:extLst>
+                </p:cNvPr>
+                <p:cNvSpPr txBox="1">
+                  <a:spLocks noRot="1" noChangeAspect="1" noMove="1" noResize="1" noEditPoints="1" noAdjustHandles="1" noChangeArrowheads="1" noChangeShapeType="1" noTextEdit="1"/>
+                </p:cNvSpPr>
+                <p:nvPr/>
+              </p:nvSpPr>
+              <p:spPr>
+                <a:xfrm>
+                  <a:off x="7346394" y="1151213"/>
+                  <a:ext cx="786692" cy="276999"/>
+                </a:xfrm>
+                <a:prstGeom prst="rect">
+                  <a:avLst/>
+                </a:prstGeom>
+                <a:blipFill>
+                  <a:blip r:embed="rId11"/>
+                  <a:stretch>
+                    <a:fillRect t="-26087" b="-47826"/>
+                  </a:stretch>
+                </a:blipFill>
+              </p:spPr>
+              <p:txBody>
+                <a:bodyPr/>
+                <a:lstStyle/>
+                <a:p>
+                  <a:r>
+                    <a:rPr lang="zh-CN" altLang="en-US">
+                      <a:noFill/>
+                    </a:rPr>
+                    <a:t> </a:t>
+                  </a:r>
+                </a:p>
+              </p:txBody>
+            </p:sp>
+          </mc:Fallback>
+        </mc:AlternateContent>
+        <mc:AlternateContent xmlns:mc="http://schemas.openxmlformats.org/markup-compatibility/2006">
+          <mc:Choice xmlns:a14="http://schemas.microsoft.com/office/drawing/2010/main" Requires="a14">
+            <p:sp>
+              <p:nvSpPr>
+                <p:cNvPr id="29" name="文本框 28">
+                  <a:extLst>
+                    <a:ext uri="{FF2B5EF4-FFF2-40B4-BE49-F238E27FC236}">
+                      <a16:creationId xmlns:a16="http://schemas.microsoft.com/office/drawing/2014/main" id="{92CEABFD-D3A0-00AC-3676-142D636C83EA}"/>
+                    </a:ext>
+                  </a:extLst>
+                </p:cNvPr>
+                <p:cNvSpPr txBox="1"/>
+                <p:nvPr/>
+              </p:nvSpPr>
+              <p:spPr>
+                <a:xfrm flipH="1">
+                  <a:off x="4903233" y="2966943"/>
+                  <a:ext cx="841021" cy="553998"/>
+                </a:xfrm>
+                <a:prstGeom prst="rect">
+                  <a:avLst/>
+                </a:prstGeom>
+                <a:noFill/>
+              </p:spPr>
+              <p:txBody>
+                <a:bodyPr wrap="square" lIns="0" tIns="0" rIns="0" bIns="0" rtlCol="0">
+                  <a:spAutoFit/>
+                </a:bodyPr>
+                <a:lstStyle/>
+                <a:p>
+                  <a14:m>
+                    <m:oMathPara xmlns:m="http://schemas.openxmlformats.org/officeDocument/2006/math">
+                      <m:oMathParaPr>
+                        <m:jc m:val="centerGroup"/>
+                      </m:oMathParaPr>
+                      <m:oMath xmlns:m="http://schemas.openxmlformats.org/officeDocument/2006/math">
+                        <m:sSub>
+                          <m:sSubPr>
+                            <m:ctrlPr>
+                              <a:rPr kumimoji="1" lang="en-US" altLang="zh-CN" b="0" i="1" smtClean="0">
+                                <a:latin typeface="Cambria Math" panose="02040503050406030204" pitchFamily="18" charset="0"/>
+                              </a:rPr>
+                            </m:ctrlPr>
+                          </m:sSubPr>
+                          <m:e>
+                            <m:r>
+                              <a:rPr kumimoji="1" lang="en-US" altLang="zh-CN" b="0" i="1" smtClean="0">
+                                <a:latin typeface="Cambria Math" panose="02040503050406030204" pitchFamily="18" charset="0"/>
+                              </a:rPr>
+                              <m:t>𝑔</m:t>
+                            </m:r>
+                          </m:e>
+                          <m:sub>
+                            <m:r>
+                              <a:rPr kumimoji="1" lang="en-US" altLang="zh-CN" b="0" i="1" smtClean="0">
+                                <a:latin typeface="Cambria Math" panose="02040503050406030204" pitchFamily="18" charset="0"/>
+                              </a:rPr>
+                              <m:t>2</m:t>
+                            </m:r>
+                          </m:sub>
+                        </m:sSub>
+                        <m:r>
+                          <a:rPr kumimoji="1" lang="en-US" altLang="zh-CN" b="0" i="1" smtClean="0">
+                            <a:latin typeface="Cambria Math" panose="02040503050406030204" pitchFamily="18" charset="0"/>
+                          </a:rPr>
+                          <m:t>−</m:t>
+                        </m:r>
+                        <m:sSub>
+                          <m:sSubPr>
+                            <m:ctrlPr>
+                              <a:rPr kumimoji="1" lang="en-US" altLang="zh-CN" b="0" i="1" smtClean="0">
+                                <a:latin typeface="Cambria Math" panose="02040503050406030204" pitchFamily="18" charset="0"/>
+                              </a:rPr>
+                            </m:ctrlPr>
+                          </m:sSubPr>
+                          <m:e>
+                            <m:r>
+                              <a:rPr kumimoji="1" lang="en-US" altLang="zh-CN" b="0" i="1" smtClean="0">
+                                <a:latin typeface="Cambria Math" panose="02040503050406030204" pitchFamily="18" charset="0"/>
+                              </a:rPr>
+                              <m:t>𝑔</m:t>
+                            </m:r>
+                          </m:e>
+                          <m:sub>
+                            <m:r>
+                              <a:rPr kumimoji="1" lang="en-US" altLang="zh-CN" b="0" i="1" smtClean="0">
+                                <a:latin typeface="Cambria Math" panose="02040503050406030204" pitchFamily="18" charset="0"/>
+                              </a:rPr>
+                              <m:t>3</m:t>
+                            </m:r>
+                          </m:sub>
+                        </m:sSub>
+                      </m:oMath>
+                    </m:oMathPara>
+                  </a14:m>
+                  <a:endParaRPr kumimoji="1" lang="en-US" altLang="zh-CN" b="0" dirty="0"/>
+                </a:p>
+                <a:p>
+                  <a:endParaRPr kumimoji="1" lang="en-US" altLang="zh-CN" b="0" dirty="0"/>
+                </a:p>
+              </p:txBody>
+            </p:sp>
+          </mc:Choice>
+          <mc:Fallback>
+            <p:sp>
+              <p:nvSpPr>
+                <p:cNvPr id="29" name="文本框 28">
+                  <a:extLst>
+                    <a:ext uri="{FF2B5EF4-FFF2-40B4-BE49-F238E27FC236}">
+                      <a16:creationId xmlns:a16="http://schemas.microsoft.com/office/drawing/2014/main" id="{92CEABFD-D3A0-00AC-3676-142D636C83EA}"/>
+                    </a:ext>
+                  </a:extLst>
+                </p:cNvPr>
+                <p:cNvSpPr txBox="1">
+                  <a:spLocks noRot="1" noChangeAspect="1" noMove="1" noResize="1" noEditPoints="1" noAdjustHandles="1" noChangeArrowheads="1" noChangeShapeType="1" noTextEdit="1"/>
+                </p:cNvSpPr>
+                <p:nvPr/>
+              </p:nvSpPr>
+              <p:spPr>
+                <a:xfrm flipH="1">
+                  <a:off x="4903233" y="2966943"/>
+                  <a:ext cx="841021" cy="553998"/>
+                </a:xfrm>
+                <a:prstGeom prst="rect">
+                  <a:avLst/>
+                </a:prstGeom>
+                <a:blipFill>
+                  <a:blip r:embed="rId12"/>
+                  <a:stretch>
+                    <a:fillRect l="-2941"/>
+                  </a:stretch>
+                </a:blipFill>
+              </p:spPr>
+              <p:txBody>
+                <a:bodyPr/>
+                <a:lstStyle/>
+                <a:p>
+                  <a:r>
+                    <a:rPr lang="zh-CN" altLang="en-US">
+                      <a:noFill/>
+                    </a:rPr>
+                    <a:t> </a:t>
+                  </a:r>
+                </a:p>
+              </p:txBody>
+            </p:sp>
+          </mc:Fallback>
+        </mc:AlternateContent>
+        <mc:AlternateContent xmlns:mc="http://schemas.openxmlformats.org/markup-compatibility/2006">
+          <mc:Choice xmlns:a14="http://schemas.microsoft.com/office/drawing/2010/main" Requires="a14">
+            <p:sp>
+              <p:nvSpPr>
+                <p:cNvPr id="42" name="文本框 41">
+                  <a:extLst>
+                    <a:ext uri="{FF2B5EF4-FFF2-40B4-BE49-F238E27FC236}">
+                      <a16:creationId xmlns:a16="http://schemas.microsoft.com/office/drawing/2014/main" id="{67CFDFE9-F310-4FF6-7C87-9BFFF6D7C752}"/>
+                    </a:ext>
+                  </a:extLst>
+                </p:cNvPr>
+                <p:cNvSpPr txBox="1"/>
+                <p:nvPr/>
+              </p:nvSpPr>
+              <p:spPr>
+                <a:xfrm>
+                  <a:off x="6855179" y="3214990"/>
+                  <a:ext cx="1270000" cy="841897"/>
+                </a:xfrm>
+                <a:prstGeom prst="rect">
+                  <a:avLst/>
+                </a:prstGeom>
+                <a:noFill/>
+              </p:spPr>
+              <p:txBody>
+                <a:bodyPr wrap="square">
+                  <a:spAutoFit/>
+                </a:bodyPr>
+                <a:lstStyle/>
+                <a:p>
+                  <a:pPr/>
+                  <a14:m>
+                    <m:oMathPara xmlns:m="http://schemas.openxmlformats.org/officeDocument/2006/math">
+                      <m:oMathParaPr>
+                        <m:jc m:val="centerGroup"/>
+                      </m:oMathParaPr>
+                      <m:oMath xmlns:m="http://schemas.openxmlformats.org/officeDocument/2006/math">
+                        <m:f>
+                          <m:fPr>
+                            <m:ctrlPr>
+                              <a:rPr kumimoji="1" lang="en-US" altLang="zh-CN" b="0" i="1" smtClean="0">
+                                <a:latin typeface="Cambria Math" panose="02040503050406030204" pitchFamily="18" charset="0"/>
+                              </a:rPr>
+                            </m:ctrlPr>
+                          </m:fPr>
+                          <m:num>
+                            <m:sSub>
+                              <m:sSubPr>
+                                <m:ctrlPr>
+                                  <a:rPr kumimoji="1" lang="en-US" altLang="zh-CN" b="0" i="1" smtClean="0">
+                                    <a:latin typeface="Cambria Math" panose="02040503050406030204" pitchFamily="18" charset="0"/>
+                                  </a:rPr>
+                                </m:ctrlPr>
+                              </m:sSubPr>
+                              <m:e>
+                                <m:r>
+                                  <a:rPr kumimoji="1" lang="en-US" altLang="zh-CN" b="0" i="1" smtClean="0">
+                                    <a:latin typeface="Cambria Math" panose="02040503050406030204" pitchFamily="18" charset="0"/>
+                                  </a:rPr>
+                                  <m:t>𝑔</m:t>
+                                </m:r>
+                              </m:e>
+                              <m:sub>
+                                <m:r>
+                                  <a:rPr kumimoji="1" lang="en-US" altLang="zh-CN" b="0" i="1" smtClean="0">
+                                    <a:latin typeface="Cambria Math" panose="02040503050406030204" pitchFamily="18" charset="0"/>
+                                  </a:rPr>
+                                  <m:t>1</m:t>
+                                </m:r>
+                              </m:sub>
+                            </m:sSub>
+                          </m:num>
+                          <m:den>
+                            <m:r>
+                              <a:rPr kumimoji="1" lang="en-US" altLang="zh-CN" b="0" i="1" smtClean="0">
+                                <a:latin typeface="Cambria Math" panose="02040503050406030204" pitchFamily="18" charset="0"/>
+                              </a:rPr>
+                              <m:t>2</m:t>
+                            </m:r>
+                          </m:den>
+                        </m:f>
+                        <m:r>
+                          <a:rPr kumimoji="1" lang="en-US" altLang="zh-CN" b="0" i="1" smtClean="0">
+                            <a:latin typeface="Cambria Math" panose="02040503050406030204" pitchFamily="18" charset="0"/>
+                          </a:rPr>
+                          <m:t>+</m:t>
+                        </m:r>
+                        <m:sSub>
+                          <m:sSubPr>
+                            <m:ctrlPr>
+                              <a:rPr kumimoji="1" lang="en-US" altLang="zh-CN" b="0" i="1" smtClean="0">
+                                <a:latin typeface="Cambria Math" panose="02040503050406030204" pitchFamily="18" charset="0"/>
+                              </a:rPr>
+                            </m:ctrlPr>
+                          </m:sSubPr>
+                          <m:e>
+                            <m:r>
+                              <a:rPr kumimoji="1" lang="en-US" altLang="zh-CN" b="0" i="1" smtClean="0">
+                                <a:latin typeface="Cambria Math" panose="02040503050406030204" pitchFamily="18" charset="0"/>
+                              </a:rPr>
+                              <m:t>𝑔</m:t>
+                            </m:r>
+                          </m:e>
+                          <m:sub>
+                            <m:r>
+                              <a:rPr kumimoji="1" lang="en-US" altLang="zh-CN" b="0" i="1" smtClean="0">
+                                <a:latin typeface="Cambria Math" panose="02040503050406030204" pitchFamily="18" charset="0"/>
+                              </a:rPr>
+                              <m:t>3</m:t>
+                            </m:r>
+                          </m:sub>
+                        </m:sSub>
+                      </m:oMath>
+                    </m:oMathPara>
+                  </a14:m>
+                  <a:endParaRPr kumimoji="1" lang="en-US" altLang="zh-CN" b="0" dirty="0"/>
+                </a:p>
+                <a:p>
+                  <a:pPr/>
+                  <a:endParaRPr lang="zh-CN" altLang="en-US" dirty="0"/>
+                </a:p>
+              </p:txBody>
+            </p:sp>
+          </mc:Choice>
+          <mc:Fallback>
+            <p:sp>
+              <p:nvSpPr>
+                <p:cNvPr id="42" name="文本框 41">
+                  <a:extLst>
+                    <a:ext uri="{FF2B5EF4-FFF2-40B4-BE49-F238E27FC236}">
+                      <a16:creationId xmlns:a16="http://schemas.microsoft.com/office/drawing/2014/main" id="{67CFDFE9-F310-4FF6-7C87-9BFFF6D7C752}"/>
+                    </a:ext>
+                  </a:extLst>
+                </p:cNvPr>
+                <p:cNvSpPr txBox="1">
+                  <a:spLocks noRot="1" noChangeAspect="1" noMove="1" noResize="1" noEditPoints="1" noAdjustHandles="1" noChangeArrowheads="1" noChangeShapeType="1" noTextEdit="1"/>
+                </p:cNvSpPr>
+                <p:nvPr/>
+              </p:nvSpPr>
+              <p:spPr>
+                <a:xfrm>
+                  <a:off x="6855179" y="3214990"/>
+                  <a:ext cx="1270000" cy="841897"/>
+                </a:xfrm>
+                <a:prstGeom prst="rect">
+                  <a:avLst/>
+                </a:prstGeom>
+                <a:blipFill>
+                  <a:blip r:embed="rId13"/>
+                  <a:stretch>
+                    <a:fillRect/>
+                  </a:stretch>
+                </a:blipFill>
+              </p:spPr>
+              <p:txBody>
+                <a:bodyPr/>
+                <a:lstStyle/>
+                <a:p>
+                  <a:r>
+                    <a:rPr lang="zh-CN" altLang="en-US">
+                      <a:noFill/>
+                    </a:rPr>
+                    <a:t> </a:t>
+                  </a:r>
+                </a:p>
+              </p:txBody>
+            </p:sp>
+          </mc:Fallback>
+        </mc:AlternateContent>
+        <mc:AlternateContent xmlns:mc="http://schemas.openxmlformats.org/markup-compatibility/2006">
+          <mc:Choice xmlns:a14="http://schemas.microsoft.com/office/drawing/2010/main" Requires="a14">
+            <p:sp>
+              <p:nvSpPr>
+                <p:cNvPr id="47" name="文本框 46">
+                  <a:extLst>
+                    <a:ext uri="{FF2B5EF4-FFF2-40B4-BE49-F238E27FC236}">
+                      <a16:creationId xmlns:a16="http://schemas.microsoft.com/office/drawing/2014/main" id="{933EE7EB-A0EC-AF14-04F1-D79627BBD7B1}"/>
+                    </a:ext>
+                  </a:extLst>
+                </p:cNvPr>
+                <p:cNvSpPr txBox="1"/>
+                <p:nvPr/>
+              </p:nvSpPr>
+              <p:spPr>
+                <a:xfrm>
+                  <a:off x="6630106" y="4226682"/>
+                  <a:ext cx="4287312" cy="1218603"/>
+                </a:xfrm>
+                <a:prstGeom prst="rect">
+                  <a:avLst/>
+                </a:prstGeom>
+                <a:noFill/>
+              </p:spPr>
+              <p:txBody>
+                <a:bodyPr wrap="square" lIns="0" tIns="0" rIns="0" bIns="0" rtlCol="0">
+                  <a:spAutoFit/>
+                </a:bodyPr>
+                <a:lstStyle/>
+                <a:p>
+                  <a14:m>
+                    <m:oMathPara xmlns:m="http://schemas.openxmlformats.org/officeDocument/2006/math">
+                      <m:oMathParaPr>
+                        <m:jc m:val="centerGroup"/>
+                      </m:oMathParaPr>
+                      <m:oMath xmlns:m="http://schemas.openxmlformats.org/officeDocument/2006/math">
+                        <m:d>
+                          <m:dPr>
+                            <m:begChr m:val="["/>
+                            <m:endChr m:val="]"/>
+                            <m:ctrlPr>
+                              <a:rPr kumimoji="1" lang="en-US" altLang="zh-CN" i="1" smtClean="0">
+                                <a:latin typeface="Cambria Math" panose="02040503050406030204" pitchFamily="18" charset="0"/>
+                              </a:rPr>
+                            </m:ctrlPr>
+                          </m:dPr>
+                          <m:e>
+                            <m:m>
+                              <m:mPr>
+                                <m:mcs>
+                                  <m:mc>
+                                    <m:mcPr>
+                                      <m:count m:val="3"/>
+                                      <m:mcJc m:val="center"/>
+                                    </m:mcPr>
+                                  </m:mc>
+                                </m:mcs>
+                                <m:ctrlPr>
+                                  <a:rPr kumimoji="1" lang="en-US" altLang="zh-CN" i="1" smtClean="0">
+                                    <a:latin typeface="Cambria Math" panose="02040503050406030204" pitchFamily="18" charset="0"/>
+                                  </a:rPr>
+                                </m:ctrlPr>
+                              </m:mPr>
+                              <m:mr>
+                                <m:e>
+                                  <m:r>
+                                    <m:rPr>
+                                      <m:brk m:alnAt="7"/>
+                                    </m:rPr>
+                                    <a:rPr kumimoji="1" lang="en-US" altLang="zh-CN" b="0" i="1" smtClean="0">
+                                      <a:latin typeface="Cambria Math" panose="02040503050406030204" pitchFamily="18" charset="0"/>
+                                    </a:rPr>
+                                    <m:t>2</m:t>
+                                  </m:r>
+                                </m:e>
+                                <m:e>
+                                  <m:r>
+                                    <a:rPr kumimoji="1" lang="en-US" altLang="zh-CN" b="0" i="1" smtClean="0">
+                                      <a:latin typeface="Cambria Math" panose="02040503050406030204" pitchFamily="18" charset="0"/>
+                                    </a:rPr>
+                                    <m:t>-1</m:t>
+                                  </m:r>
+                                </m:e>
+                                <m:e>
+                                  <m:r>
+                                    <a:rPr kumimoji="1" lang="en-US" altLang="zh-CN" b="0" i="1" smtClean="0">
+                                      <a:latin typeface="Cambria Math" panose="02040503050406030204" pitchFamily="18" charset="0"/>
+                                    </a:rPr>
+                                    <m:t>0</m:t>
+                                  </m:r>
+                                </m:e>
+                              </m:mr>
+                            </m:m>
+                          </m:e>
+                        </m:d>
+                        <m:d>
+                          <m:dPr>
+                            <m:begChr m:val="["/>
+                            <m:endChr m:val="]"/>
+                            <m:ctrlPr>
+                              <a:rPr kumimoji="1" lang="en-US" altLang="zh-CN" i="1" smtClean="0">
+                                <a:latin typeface="Cambria Math" panose="02040503050406030204" pitchFamily="18" charset="0"/>
+                              </a:rPr>
+                            </m:ctrlPr>
+                          </m:dPr>
+                          <m:e>
+                            <m:eqArr>
+                              <m:eqArrPr>
+                                <m:ctrlPr>
+                                  <a:rPr kumimoji="1" lang="en-US" altLang="zh-CN" i="1" smtClean="0">
+                                    <a:latin typeface="Cambria Math" panose="02040503050406030204" pitchFamily="18" charset="0"/>
+                                  </a:rPr>
+                                </m:ctrlPr>
+                              </m:eqArrPr>
+                              <m:e>
+                                <m:f>
+                                  <m:fPr>
+                                    <m:ctrlPr>
+                                      <a:rPr kumimoji="1" lang="en-US" altLang="zh-CN" i="1">
+                                        <a:latin typeface="Cambria Math" panose="02040503050406030204" pitchFamily="18" charset="0"/>
+                                      </a:rPr>
+                                    </m:ctrlPr>
+                                  </m:fPr>
+                                  <m:num>
+                                    <m:sSub>
+                                      <m:sSubPr>
+                                        <m:ctrlPr>
+                                          <a:rPr kumimoji="1" lang="en-US" altLang="zh-CN" i="1">
+                                            <a:latin typeface="Cambria Math" panose="02040503050406030204" pitchFamily="18" charset="0"/>
+                                          </a:rPr>
+                                        </m:ctrlPr>
+                                      </m:sSubPr>
+                                      <m:e>
+                                        <m:r>
+                                          <a:rPr kumimoji="1" lang="en-US" altLang="zh-CN" i="1">
+                                            <a:latin typeface="Cambria Math" panose="02040503050406030204" pitchFamily="18" charset="0"/>
+                                          </a:rPr>
+                                          <m:t>𝑔</m:t>
+                                        </m:r>
+                                      </m:e>
+                                      <m:sub>
+                                        <m:r>
+                                          <a:rPr kumimoji="1" lang="en-US" altLang="zh-CN" i="1">
+                                            <a:latin typeface="Cambria Math" panose="02040503050406030204" pitchFamily="18" charset="0"/>
+                                          </a:rPr>
+                                          <m:t>1</m:t>
+                                        </m:r>
+                                      </m:sub>
+                                    </m:sSub>
+                                  </m:num>
+                                  <m:den>
+                                    <m:r>
+                                      <a:rPr kumimoji="1" lang="en-US" altLang="zh-CN" i="1">
+                                        <a:latin typeface="Cambria Math" panose="02040503050406030204" pitchFamily="18" charset="0"/>
+                                      </a:rPr>
+                                      <m:t>2</m:t>
+                                    </m:r>
+                                  </m:den>
+                                </m:f>
+                                <m:r>
+                                  <a:rPr kumimoji="1" lang="en-US" altLang="zh-CN" i="1">
+                                    <a:latin typeface="Cambria Math" panose="02040503050406030204" pitchFamily="18" charset="0"/>
+                                  </a:rPr>
+                                  <m:t>+</m:t>
+                                </m:r>
+                                <m:sSub>
+                                  <m:sSubPr>
+                                    <m:ctrlPr>
+                                      <a:rPr kumimoji="1" lang="en-US" altLang="zh-CN" i="1">
+                                        <a:latin typeface="Cambria Math" panose="02040503050406030204" pitchFamily="18" charset="0"/>
+                                      </a:rPr>
+                                    </m:ctrlPr>
+                                  </m:sSubPr>
+                                  <m:e>
+                                    <m:r>
+                                      <a:rPr kumimoji="1" lang="en-US" altLang="zh-CN" i="1">
+                                        <a:latin typeface="Cambria Math" panose="02040503050406030204" pitchFamily="18" charset="0"/>
+                                      </a:rPr>
+                                      <m:t>𝑔</m:t>
+                                    </m:r>
+                                  </m:e>
+                                  <m:sub>
+                                    <m:r>
+                                      <a:rPr kumimoji="1" lang="en-US" altLang="zh-CN" i="1">
+                                        <a:latin typeface="Cambria Math" panose="02040503050406030204" pitchFamily="18" charset="0"/>
+                                      </a:rPr>
+                                      <m:t>2</m:t>
+                                    </m:r>
+                                  </m:sub>
+                                </m:sSub>
+                              </m:e>
+                              <m:e>
+                                <m:sSub>
+                                  <m:sSubPr>
+                                    <m:ctrlPr>
+                                      <a:rPr kumimoji="1" lang="en-US" altLang="zh-CN" i="1">
+                                        <a:latin typeface="Cambria Math" panose="02040503050406030204" pitchFamily="18" charset="0"/>
+                                      </a:rPr>
+                                    </m:ctrlPr>
+                                  </m:sSubPr>
+                                  <m:e>
+                                    <m:r>
+                                      <a:rPr kumimoji="1" lang="en-US" altLang="zh-CN" i="1">
+                                        <a:latin typeface="Cambria Math" panose="02040503050406030204" pitchFamily="18" charset="0"/>
+                                      </a:rPr>
+                                      <m:t>𝑔</m:t>
+                                    </m:r>
+                                  </m:e>
+                                  <m:sub>
+                                    <m:r>
+                                      <a:rPr kumimoji="1" lang="en-US" altLang="zh-CN" i="1">
+                                        <a:latin typeface="Cambria Math" panose="02040503050406030204" pitchFamily="18" charset="0"/>
+                                      </a:rPr>
+                                      <m:t>2</m:t>
+                                    </m:r>
+                                  </m:sub>
+                                </m:sSub>
+                                <m:r>
+                                  <a:rPr kumimoji="1" lang="en-US" altLang="zh-CN" i="1">
+                                    <a:latin typeface="Cambria Math" panose="02040503050406030204" pitchFamily="18" charset="0"/>
+                                  </a:rPr>
+                                  <m:t>−</m:t>
+                                </m:r>
+                                <m:sSub>
+                                  <m:sSubPr>
+                                    <m:ctrlPr>
+                                      <a:rPr kumimoji="1" lang="en-US" altLang="zh-CN" i="1">
+                                        <a:latin typeface="Cambria Math" panose="02040503050406030204" pitchFamily="18" charset="0"/>
+                                      </a:rPr>
+                                    </m:ctrlPr>
+                                  </m:sSubPr>
+                                  <m:e>
+                                    <m:r>
+                                      <a:rPr kumimoji="1" lang="en-US" altLang="zh-CN" i="1">
+                                        <a:latin typeface="Cambria Math" panose="02040503050406030204" pitchFamily="18" charset="0"/>
+                                      </a:rPr>
+                                      <m:t>𝑔</m:t>
+                                    </m:r>
+                                  </m:e>
+                                  <m:sub>
+                                    <m:r>
+                                      <a:rPr kumimoji="1" lang="en-US" altLang="zh-CN" i="1">
+                                        <a:latin typeface="Cambria Math" panose="02040503050406030204" pitchFamily="18" charset="0"/>
+                                      </a:rPr>
+                                      <m:t>3</m:t>
+                                    </m:r>
+                                  </m:sub>
+                                </m:sSub>
+                                <m:r>
+                                  <m:rPr>
+                                    <m:nor/>
+                                  </m:rPr>
+                                  <a:rPr kumimoji="1" lang="en-US" altLang="zh-CN" dirty="0"/>
+                                  <m:t> </m:t>
+                                </m:r>
+                              </m:e>
+                              <m:e>
+                                <m:f>
+                                  <m:fPr>
+                                    <m:ctrlPr>
+                                      <a:rPr kumimoji="1" lang="en-US" altLang="zh-CN" i="1" smtClean="0">
+                                        <a:solidFill>
+                                          <a:srgbClr val="FF0000"/>
+                                        </a:solidFill>
+                                        <a:latin typeface="Cambria Math" panose="02040503050406030204" pitchFamily="18" charset="0"/>
+                                      </a:rPr>
+                                    </m:ctrlPr>
+                                  </m:fPr>
+                                  <m:num>
+                                    <m:sSub>
+                                      <m:sSubPr>
+                                        <m:ctrlPr>
+                                          <a:rPr kumimoji="1" lang="en-US" altLang="zh-CN" i="1">
+                                            <a:solidFill>
+                                              <a:srgbClr val="FF0000"/>
+                                            </a:solidFill>
+                                            <a:latin typeface="Cambria Math" panose="02040503050406030204" pitchFamily="18" charset="0"/>
+                                          </a:rPr>
+                                        </m:ctrlPr>
+                                      </m:sSubPr>
+                                      <m:e>
+                                        <m:r>
+                                          <a:rPr kumimoji="1" lang="en-US" altLang="zh-CN" i="1">
+                                            <a:solidFill>
+                                              <a:srgbClr val="FF0000"/>
+                                            </a:solidFill>
+                                            <a:latin typeface="Cambria Math" panose="02040503050406030204" pitchFamily="18" charset="0"/>
+                                          </a:rPr>
+                                          <m:t>𝑔</m:t>
+                                        </m:r>
+                                      </m:e>
+                                      <m:sub>
+                                        <m:r>
+                                          <a:rPr kumimoji="1" lang="en-US" altLang="zh-CN" i="1">
+                                            <a:solidFill>
+                                              <a:srgbClr val="FF0000"/>
+                                            </a:solidFill>
+                                            <a:latin typeface="Cambria Math" panose="02040503050406030204" pitchFamily="18" charset="0"/>
+                                          </a:rPr>
+                                          <m:t>1</m:t>
+                                        </m:r>
+                                      </m:sub>
+                                    </m:sSub>
+                                  </m:num>
+                                  <m:den>
+                                    <m:r>
+                                      <a:rPr kumimoji="1" lang="en-US" altLang="zh-CN" i="1">
+                                        <a:solidFill>
+                                          <a:srgbClr val="FF0000"/>
+                                        </a:solidFill>
+                                        <a:latin typeface="Cambria Math" panose="02040503050406030204" pitchFamily="18" charset="0"/>
+                                      </a:rPr>
+                                      <m:t>2</m:t>
+                                    </m:r>
+                                  </m:den>
+                                </m:f>
+                                <m:r>
+                                  <a:rPr kumimoji="1" lang="en-US" altLang="zh-CN" i="1">
+                                    <a:solidFill>
+                                      <a:srgbClr val="FF0000"/>
+                                    </a:solidFill>
+                                    <a:latin typeface="Cambria Math" panose="02040503050406030204" pitchFamily="18" charset="0"/>
+                                  </a:rPr>
+                                  <m:t>+</m:t>
+                                </m:r>
+                                <m:sSub>
+                                  <m:sSubPr>
+                                    <m:ctrlPr>
+                                      <a:rPr kumimoji="1" lang="en-US" altLang="zh-CN" i="1">
+                                        <a:solidFill>
+                                          <a:srgbClr val="FF0000"/>
+                                        </a:solidFill>
+                                        <a:latin typeface="Cambria Math" panose="02040503050406030204" pitchFamily="18" charset="0"/>
+                                      </a:rPr>
+                                    </m:ctrlPr>
+                                  </m:sSubPr>
+                                  <m:e>
+                                    <m:r>
+                                      <a:rPr kumimoji="1" lang="en-US" altLang="zh-CN" i="1">
+                                        <a:solidFill>
+                                          <a:srgbClr val="FF0000"/>
+                                        </a:solidFill>
+                                        <a:latin typeface="Cambria Math" panose="02040503050406030204" pitchFamily="18" charset="0"/>
+                                      </a:rPr>
+                                      <m:t>𝑔</m:t>
+                                    </m:r>
+                                  </m:e>
+                                  <m:sub>
+                                    <m:r>
+                                      <a:rPr kumimoji="1" lang="en-US" altLang="zh-CN" i="1">
+                                        <a:solidFill>
+                                          <a:srgbClr val="FF0000"/>
+                                        </a:solidFill>
+                                        <a:latin typeface="Cambria Math" panose="02040503050406030204" pitchFamily="18" charset="0"/>
+                                      </a:rPr>
+                                      <m:t>3</m:t>
+                                    </m:r>
+                                  </m:sub>
+                                </m:sSub>
+                              </m:e>
+                            </m:eqArr>
+                          </m:e>
+                        </m:d>
+                        <m:r>
+                          <a:rPr kumimoji="1" lang="en-US" altLang="zh-CN" b="0" i="0" smtClean="0">
+                            <a:latin typeface="Cambria Math" panose="02040503050406030204" pitchFamily="18" charset="0"/>
+                          </a:rPr>
+                          <m:t>=</m:t>
+                        </m:r>
+                        <m:sSub>
+                          <m:sSubPr>
+                            <m:ctrlPr>
+                              <a:rPr kumimoji="1" lang="en-US" altLang="zh-CN" b="0" i="0" smtClean="0">
+                                <a:latin typeface="Cambria Math" panose="02040503050406030204" pitchFamily="18" charset="0"/>
+                              </a:rPr>
+                            </m:ctrlPr>
+                          </m:sSubPr>
+                          <m:e>
+                            <m:r>
+                              <a:rPr kumimoji="1" lang="en-US" altLang="zh-CN" b="0" i="0" smtClean="0">
+                                <a:latin typeface="Cambria Math" panose="02040503050406030204" pitchFamily="18" charset="0"/>
+                              </a:rPr>
+                              <m:t>𝑔</m:t>
+                            </m:r>
+                          </m:e>
+                          <m:sub>
+                            <m:r>
+                              <a:rPr kumimoji="1" lang="en-US" altLang="zh-CN" b="0" i="0" smtClean="0">
+                                <a:latin typeface="Cambria Math" panose="02040503050406030204" pitchFamily="18" charset="0"/>
+                              </a:rPr>
+                              <m:t>1</m:t>
+                            </m:r>
+                          </m:sub>
+                        </m:sSub>
+                        <m:r>
+                          <a:rPr kumimoji="1" lang="en-US" altLang="zh-CN" b="0" i="0" smtClean="0">
+                            <a:latin typeface="Cambria Math" panose="02040503050406030204" pitchFamily="18" charset="0"/>
+                          </a:rPr>
+                          <m:t>+</m:t>
+                        </m:r>
+                        <m:sSub>
+                          <m:sSubPr>
+                            <m:ctrlPr>
+                              <a:rPr kumimoji="1" lang="en-US" altLang="zh-CN" b="0" i="0" smtClean="0">
+                                <a:latin typeface="Cambria Math" panose="02040503050406030204" pitchFamily="18" charset="0"/>
+                              </a:rPr>
+                            </m:ctrlPr>
+                          </m:sSubPr>
+                          <m:e>
+                            <m:r>
+                              <a:rPr kumimoji="1" lang="en-US" altLang="zh-CN" b="0" i="0" smtClean="0">
+                                <a:latin typeface="Cambria Math" panose="02040503050406030204" pitchFamily="18" charset="0"/>
+                              </a:rPr>
+                              <m:t>𝑔</m:t>
+                            </m:r>
+                          </m:e>
+                          <m:sub>
+                            <m:r>
+                              <a:rPr kumimoji="1" lang="en-US" altLang="zh-CN" b="0" i="0" smtClean="0">
+                                <a:latin typeface="Cambria Math" panose="02040503050406030204" pitchFamily="18" charset="0"/>
+                              </a:rPr>
+                              <m:t>2</m:t>
+                            </m:r>
+                          </m:sub>
+                        </m:sSub>
+                        <m:r>
+                          <a:rPr kumimoji="1" lang="en-US" altLang="zh-CN" b="0" i="0" smtClean="0">
+                            <a:latin typeface="Cambria Math" panose="02040503050406030204" pitchFamily="18" charset="0"/>
+                          </a:rPr>
+                          <m:t>+</m:t>
+                        </m:r>
+                        <m:sSub>
+                          <m:sSubPr>
+                            <m:ctrlPr>
+                              <a:rPr kumimoji="1" lang="en-US" altLang="zh-CN" b="0" i="0" smtClean="0">
+                                <a:latin typeface="Cambria Math" panose="02040503050406030204" pitchFamily="18" charset="0"/>
+                              </a:rPr>
+                            </m:ctrlPr>
+                          </m:sSubPr>
+                          <m:e>
+                            <m:r>
+                              <a:rPr kumimoji="1" lang="en-US" altLang="zh-CN" b="0" i="0" smtClean="0">
+                                <a:latin typeface="Cambria Math" panose="02040503050406030204" pitchFamily="18" charset="0"/>
+                              </a:rPr>
+                              <m:t>𝑔</m:t>
+                            </m:r>
+                          </m:e>
+                          <m:sub>
+                            <m:r>
+                              <a:rPr kumimoji="1" lang="en-US" altLang="zh-CN" b="0" i="0" smtClean="0">
+                                <a:latin typeface="Cambria Math" panose="02040503050406030204" pitchFamily="18" charset="0"/>
+                              </a:rPr>
+                              <m:t>3</m:t>
+                            </m:r>
+                          </m:sub>
+                        </m:sSub>
+                      </m:oMath>
+                    </m:oMathPara>
+                  </a14:m>
+                  <a:endParaRPr kumimoji="1" lang="en-US" altLang="zh-CN" dirty="0"/>
+                </a:p>
+              </p:txBody>
+            </p:sp>
+          </mc:Choice>
+          <mc:Fallback>
+            <p:sp>
+              <p:nvSpPr>
+                <p:cNvPr id="47" name="文本框 46">
+                  <a:extLst>
+                    <a:ext uri="{FF2B5EF4-FFF2-40B4-BE49-F238E27FC236}">
+                      <a16:creationId xmlns:a16="http://schemas.microsoft.com/office/drawing/2014/main" id="{933EE7EB-A0EC-AF14-04F1-D79627BBD7B1}"/>
+                    </a:ext>
+                  </a:extLst>
+                </p:cNvPr>
+                <p:cNvSpPr txBox="1">
+                  <a:spLocks noRot="1" noChangeAspect="1" noMove="1" noResize="1" noEditPoints="1" noAdjustHandles="1" noChangeArrowheads="1" noChangeShapeType="1" noTextEdit="1"/>
+                </p:cNvSpPr>
+                <p:nvPr/>
+              </p:nvSpPr>
+              <p:spPr>
+                <a:xfrm>
+                  <a:off x="6630106" y="4226682"/>
+                  <a:ext cx="4287312" cy="1218603"/>
+                </a:xfrm>
+                <a:prstGeom prst="rect">
+                  <a:avLst/>
+                </a:prstGeom>
+                <a:blipFill>
+                  <a:blip r:embed="rId14"/>
+                  <a:stretch>
+                    <a:fillRect t="-1031" b="-5155"/>
+                  </a:stretch>
+                </a:blipFill>
+              </p:spPr>
+              <p:txBody>
+                <a:bodyPr/>
+                <a:lstStyle/>
+                <a:p>
+                  <a:r>
+                    <a:rPr lang="zh-CN" altLang="en-US">
+                      <a:noFill/>
+                    </a:rPr>
+                    <a:t> </a:t>
+                  </a:r>
+                </a:p>
+              </p:txBody>
+            </p:sp>
+          </mc:Fallback>
+        </mc:AlternateContent>
+        <p:sp>
+          <p:nvSpPr>
+            <p:cNvPr id="51" name="文本框 50">
+              <a:extLst>
+                <a:ext uri="{FF2B5EF4-FFF2-40B4-BE49-F238E27FC236}">
+                  <a16:creationId xmlns:a16="http://schemas.microsoft.com/office/drawing/2014/main" id="{E421DA39-7A7E-3587-F679-45FFD47D8B5D}"/>
+                </a:ext>
+              </a:extLst>
+            </p:cNvPr>
+            <p:cNvSpPr txBox="1"/>
+            <p:nvPr/>
+          </p:nvSpPr>
+          <p:spPr>
+            <a:xfrm>
+              <a:off x="5407378" y="5408025"/>
+              <a:ext cx="1222727" cy="369332"/>
+            </a:xfrm>
+            <a:prstGeom prst="rect">
+              <a:avLst/>
+            </a:prstGeom>
+            <a:noFill/>
+          </p:spPr>
+          <p:txBody>
+            <a:bodyPr wrap="square" rtlCol="0">
+              <a:spAutoFit/>
+            </a:bodyPr>
+            <a:lstStyle/>
+            <a:p>
+              <a:r>
+                <a:rPr kumimoji="1" lang="zh-CN" altLang="en-US" dirty="0">
+                  <a:latin typeface="SimSun" panose="02010600030101010101" pitchFamily="2" charset="-122"/>
+                  <a:ea typeface="SimSun" panose="02010600030101010101" pitchFamily="2" charset="-122"/>
+                </a:rPr>
+                <a:t>移动设备</a:t>
+              </a:r>
+            </a:p>
+          </p:txBody>
+        </p:sp>
+      </p:grpSp>
+    </p:spTree>
+    <p:extLst>
+      <p:ext uri="{BB962C8B-B14F-4D97-AF65-F5344CB8AC3E}">
+        <p14:creationId xmlns:p14="http://schemas.microsoft.com/office/powerpoint/2010/main" val="3873005690"/>
       </p:ext>
     </p:extLst>
   </p:cSld>
